--- a/TP2/Presentación/Trabajo practico 2.pptx
+++ b/TP2/Presentación/Trabajo practico 2.pptx
@@ -1,31 +1,32 @@
 
 <file path=ppt/presentation.xml><?xml version="1.0" encoding="utf-8"?>
-<p:presentation xmlns:a="http://schemas.openxmlformats.org/drawingml/2006/main" xmlns:r="http://schemas.openxmlformats.org/officeDocument/2006/relationships" xmlns:p="http://schemas.openxmlformats.org/presentationml/2006/main" saveSubsetFonts="1" embedTrueTypeFonts="true">
+<p:presentation xmlns:a="http://schemas.openxmlformats.org/drawingml/2006/main" xmlns:r="http://schemas.openxmlformats.org/officeDocument/2006/relationships" xmlns:p="http://schemas.openxmlformats.org/presentationml/2006/main" embedTrueTypeFonts="1" saveSubsetFonts="1">
   <p:sldMasterIdLst>
     <p:sldMasterId id="2147483648" r:id="rId1"/>
   </p:sldMasterIdLst>
   <p:sldIdLst>
-    <p:sldId id="256" r:id="rId6"/>
-    <p:sldId id="257" r:id="rId7"/>
-    <p:sldId id="258" r:id="rId8"/>
-    <p:sldId id="259" r:id="rId9"/>
-    <p:sldId id="260" r:id="rId10"/>
-    <p:sldId id="261" r:id="rId11"/>
-    <p:sldId id="262" r:id="rId12"/>
-    <p:sldId id="263" r:id="rId13"/>
-    <p:sldId id="264" r:id="rId14"/>
-    <p:sldId id="265" r:id="rId15"/>
+    <p:sldId id="256" r:id="rId2"/>
+    <p:sldId id="257" r:id="rId3"/>
+    <p:sldId id="258" r:id="rId4"/>
+    <p:sldId id="259" r:id="rId5"/>
+    <p:sldId id="260" r:id="rId6"/>
+    <p:sldId id="261" r:id="rId7"/>
+    <p:sldId id="262" r:id="rId8"/>
+    <p:sldId id="263" r:id="rId9"/>
+    <p:sldId id="266" r:id="rId10"/>
+    <p:sldId id="264" r:id="rId11"/>
+    <p:sldId id="265" r:id="rId12"/>
   </p:sldIdLst>
   <p:sldSz cx="18288000" cy="10287000"/>
   <p:notesSz cx="6858000" cy="9144000"/>
   <p:embeddedFontLst>
     <p:embeddedFont>
-      <p:font typeface="Aptos" charset="1" panose="020B0004020202020204"/>
-      <p:regular r:id="rId16"/>
+      <p:font typeface="Aptos Bold" panose="020B0604020202020204" charset="0"/>
+      <p:regular r:id="rId13"/>
     </p:embeddedFont>
     <p:embeddedFont>
-      <p:font typeface="Aptos Bold" charset="1" panose="020B0004020202020204"/>
-      <p:regular r:id="rId17"/>
+      <p:font typeface="Cambria Math" panose="02040503050406030204" pitchFamily="18" charset="0"/>
+      <p:regular r:id="rId14"/>
     </p:embeddedFont>
   </p:embeddedFontLst>
   <p:defaultTextStyle>
@@ -123,6 +124,22 @@
       </a:defRPr>
     </a:lvl9pPr>
   </p:defaultTextStyle>
+  <p:extLst>
+    <p:ext uri="{EFAFB233-063F-42B5-8137-9DF3F51BA10A}">
+      <p15:sldGuideLst xmlns:p15="http://schemas.microsoft.com/office/powerpoint/2012/main">
+        <p15:guide id="1" orient="horz" pos="2160">
+          <p15:clr>
+            <a:srgbClr val="A4A3A4"/>
+          </p15:clr>
+        </p15:guide>
+        <p15:guide id="2" pos="2880">
+          <p15:clr>
+            <a:srgbClr val="A4A3A4"/>
+          </p15:clr>
+        </p15:guide>
+      </p15:sldGuideLst>
+    </p:ext>
+  </p:extLst>
 </p:presentation>
 </file>
 
@@ -164,10 +181,9 @@
           <a:lstStyle/>
           <a:p>
             <a:r>
-              <a:rPr lang="en-US" smtClean="0"/>
+              <a:rPr lang="en-US"/>
               <a:t>Click to edit Master title style</a:t>
             </a:r>
-            <a:endParaRPr lang="en-US"/>
           </a:p>
         </p:txBody>
       </p:sp>
@@ -283,10 +299,9 @@
           </a:lstStyle>
           <a:p>
             <a:r>
-              <a:rPr lang="en-US" smtClean="0"/>
+              <a:rPr lang="en-US"/>
               <a:t>Click to edit Master subtitle style</a:t>
             </a:r>
-            <a:endParaRPr lang="en-US"/>
           </a:p>
         </p:txBody>
       </p:sp>
@@ -308,7 +323,7 @@
             <a:fld id="{1D8BD707-D9CF-40AE-B4C6-C98DA3205C09}" type="datetimeFigureOut">
               <a:rPr lang="en-US" smtClean="0"/>
               <a:pPr/>
-              <a:t>8/1/2011</a:t>
+              <a:t>6/5/2026</a:t>
             </a:fld>
             <a:endParaRPr lang="en-US"/>
           </a:p>
@@ -398,10 +413,9 @@
           <a:lstStyle/>
           <a:p>
             <a:r>
-              <a:rPr lang="en-US" smtClean="0"/>
+              <a:rPr lang="en-US"/>
               <a:t>Click to edit Master title style</a:t>
             </a:r>
-            <a:endParaRPr lang="en-US"/>
           </a:p>
         </p:txBody>
       </p:sp>
@@ -422,38 +436,37 @@
           <a:p>
             <a:pPr lvl="0"/>
             <a:r>
-              <a:rPr lang="en-US" smtClean="0"/>
+              <a:rPr lang="en-US"/>
               <a:t>Click to edit Master text styles</a:t>
             </a:r>
           </a:p>
           <a:p>
             <a:pPr lvl="1"/>
             <a:r>
-              <a:rPr lang="en-US" smtClean="0"/>
+              <a:rPr lang="en-US"/>
               <a:t>Second level</a:t>
             </a:r>
           </a:p>
           <a:p>
             <a:pPr lvl="2"/>
             <a:r>
-              <a:rPr lang="en-US" smtClean="0"/>
+              <a:rPr lang="en-US"/>
               <a:t>Third level</a:t>
             </a:r>
           </a:p>
           <a:p>
             <a:pPr lvl="3"/>
             <a:r>
-              <a:rPr lang="en-US" smtClean="0"/>
+              <a:rPr lang="en-US"/>
               <a:t>Fourth level</a:t>
             </a:r>
           </a:p>
           <a:p>
             <a:pPr lvl="4"/>
             <a:r>
-              <a:rPr lang="en-US" smtClean="0"/>
+              <a:rPr lang="en-US"/>
               <a:t>Fifth level</a:t>
             </a:r>
-            <a:endParaRPr lang="en-US"/>
           </a:p>
         </p:txBody>
       </p:sp>
@@ -475,7 +488,7 @@
             <a:fld id="{1D8BD707-D9CF-40AE-B4C6-C98DA3205C09}" type="datetimeFigureOut">
               <a:rPr lang="en-US" smtClean="0"/>
               <a:pPr/>
-              <a:t>8/1/2011</a:t>
+              <a:t>6/5/2026</a:t>
             </a:fld>
             <a:endParaRPr lang="en-US"/>
           </a:p>
@@ -570,10 +583,9 @@
           <a:lstStyle/>
           <a:p>
             <a:r>
-              <a:rPr lang="en-US" smtClean="0"/>
+              <a:rPr lang="en-US"/>
               <a:t>Click to edit Master title style</a:t>
             </a:r>
-            <a:endParaRPr lang="en-US"/>
           </a:p>
         </p:txBody>
       </p:sp>
@@ -599,38 +611,37 @@
           <a:p>
             <a:pPr lvl="0"/>
             <a:r>
-              <a:rPr lang="en-US" smtClean="0"/>
+              <a:rPr lang="en-US"/>
               <a:t>Click to edit Master text styles</a:t>
             </a:r>
           </a:p>
           <a:p>
             <a:pPr lvl="1"/>
             <a:r>
-              <a:rPr lang="en-US" smtClean="0"/>
+              <a:rPr lang="en-US"/>
               <a:t>Second level</a:t>
             </a:r>
           </a:p>
           <a:p>
             <a:pPr lvl="2"/>
             <a:r>
-              <a:rPr lang="en-US" smtClean="0"/>
+              <a:rPr lang="en-US"/>
               <a:t>Third level</a:t>
             </a:r>
           </a:p>
           <a:p>
             <a:pPr lvl="3"/>
             <a:r>
-              <a:rPr lang="en-US" smtClean="0"/>
+              <a:rPr lang="en-US"/>
               <a:t>Fourth level</a:t>
             </a:r>
           </a:p>
           <a:p>
             <a:pPr lvl="4"/>
             <a:r>
-              <a:rPr lang="en-US" smtClean="0"/>
+              <a:rPr lang="en-US"/>
               <a:t>Fifth level</a:t>
             </a:r>
-            <a:endParaRPr lang="en-US"/>
           </a:p>
         </p:txBody>
       </p:sp>
@@ -652,7 +663,7 @@
             <a:fld id="{1D8BD707-D9CF-40AE-B4C6-C98DA3205C09}" type="datetimeFigureOut">
               <a:rPr lang="en-US" smtClean="0"/>
               <a:pPr/>
-              <a:t>8/1/2011</a:t>
+              <a:t>6/5/2026</a:t>
             </a:fld>
             <a:endParaRPr lang="en-US"/>
           </a:p>
@@ -742,10 +753,9 @@
           <a:lstStyle/>
           <a:p>
             <a:r>
-              <a:rPr lang="en-US" smtClean="0"/>
+              <a:rPr lang="en-US"/>
               <a:t>Click to edit Master title style</a:t>
             </a:r>
-            <a:endParaRPr lang="en-US"/>
           </a:p>
         </p:txBody>
       </p:sp>
@@ -766,38 +776,37 @@
           <a:p>
             <a:pPr lvl="0"/>
             <a:r>
-              <a:rPr lang="en-US" smtClean="0"/>
+              <a:rPr lang="en-US"/>
               <a:t>Click to edit Master text styles</a:t>
             </a:r>
           </a:p>
           <a:p>
             <a:pPr lvl="1"/>
             <a:r>
-              <a:rPr lang="en-US" smtClean="0"/>
+              <a:rPr lang="en-US"/>
               <a:t>Second level</a:t>
             </a:r>
           </a:p>
           <a:p>
             <a:pPr lvl="2"/>
             <a:r>
-              <a:rPr lang="en-US" smtClean="0"/>
+              <a:rPr lang="en-US"/>
               <a:t>Third level</a:t>
             </a:r>
           </a:p>
           <a:p>
             <a:pPr lvl="3"/>
             <a:r>
-              <a:rPr lang="en-US" smtClean="0"/>
+              <a:rPr lang="en-US"/>
               <a:t>Fourth level</a:t>
             </a:r>
           </a:p>
           <a:p>
             <a:pPr lvl="4"/>
             <a:r>
-              <a:rPr lang="en-US" smtClean="0"/>
+              <a:rPr lang="en-US"/>
               <a:t>Fifth level</a:t>
             </a:r>
-            <a:endParaRPr lang="en-US"/>
           </a:p>
         </p:txBody>
       </p:sp>
@@ -819,7 +828,7 @@
             <a:fld id="{1D8BD707-D9CF-40AE-B4C6-C98DA3205C09}" type="datetimeFigureOut">
               <a:rPr lang="en-US" smtClean="0"/>
               <a:pPr/>
-              <a:t>8/1/2011</a:t>
+              <a:t>6/5/2026</a:t>
             </a:fld>
             <a:endParaRPr lang="en-US"/>
           </a:p>
@@ -918,10 +927,9 @@
           </a:lstStyle>
           <a:p>
             <a:r>
-              <a:rPr lang="en-US" smtClean="0"/>
+              <a:rPr lang="en-US"/>
               <a:t>Click to edit Master title style</a:t>
             </a:r>
-            <a:endParaRPr lang="en-US"/>
           </a:p>
         </p:txBody>
       </p:sp>
@@ -1038,7 +1046,7 @@
           <a:p>
             <a:pPr lvl="0"/>
             <a:r>
-              <a:rPr lang="en-US" smtClean="0"/>
+              <a:rPr lang="en-US"/>
               <a:t>Click to edit Master text styles</a:t>
             </a:r>
           </a:p>
@@ -1062,7 +1070,7 @@
             <a:fld id="{1D8BD707-D9CF-40AE-B4C6-C98DA3205C09}" type="datetimeFigureOut">
               <a:rPr lang="en-US" smtClean="0"/>
               <a:pPr/>
-              <a:t>8/1/2011</a:t>
+              <a:t>6/5/2026</a:t>
             </a:fld>
             <a:endParaRPr lang="en-US"/>
           </a:p>
@@ -1152,10 +1160,9 @@
           <a:lstStyle/>
           <a:p>
             <a:r>
-              <a:rPr lang="en-US" smtClean="0"/>
+              <a:rPr lang="en-US"/>
               <a:t>Click to edit Master title style</a:t>
             </a:r>
-            <a:endParaRPr lang="en-US"/>
           </a:p>
         </p:txBody>
       </p:sp>
@@ -1209,38 +1216,37 @@
           <a:p>
             <a:pPr lvl="0"/>
             <a:r>
-              <a:rPr lang="en-US" smtClean="0"/>
+              <a:rPr lang="en-US"/>
               <a:t>Click to edit Master text styles</a:t>
             </a:r>
           </a:p>
           <a:p>
             <a:pPr lvl="1"/>
             <a:r>
-              <a:rPr lang="en-US" smtClean="0"/>
+              <a:rPr lang="en-US"/>
               <a:t>Second level</a:t>
             </a:r>
           </a:p>
           <a:p>
             <a:pPr lvl="2"/>
             <a:r>
-              <a:rPr lang="en-US" smtClean="0"/>
+              <a:rPr lang="en-US"/>
               <a:t>Third level</a:t>
             </a:r>
           </a:p>
           <a:p>
             <a:pPr lvl="3"/>
             <a:r>
-              <a:rPr lang="en-US" smtClean="0"/>
+              <a:rPr lang="en-US"/>
               <a:t>Fourth level</a:t>
             </a:r>
           </a:p>
           <a:p>
             <a:pPr lvl="4"/>
             <a:r>
-              <a:rPr lang="en-US" smtClean="0"/>
+              <a:rPr lang="en-US"/>
               <a:t>Fifth level</a:t>
             </a:r>
-            <a:endParaRPr lang="en-US"/>
           </a:p>
         </p:txBody>
       </p:sp>
@@ -1294,38 +1300,37 @@
           <a:p>
             <a:pPr lvl="0"/>
             <a:r>
-              <a:rPr lang="en-US" smtClean="0"/>
+              <a:rPr lang="en-US"/>
               <a:t>Click to edit Master text styles</a:t>
             </a:r>
           </a:p>
           <a:p>
             <a:pPr lvl="1"/>
             <a:r>
-              <a:rPr lang="en-US" smtClean="0"/>
+              <a:rPr lang="en-US"/>
               <a:t>Second level</a:t>
             </a:r>
           </a:p>
           <a:p>
             <a:pPr lvl="2"/>
             <a:r>
-              <a:rPr lang="en-US" smtClean="0"/>
+              <a:rPr lang="en-US"/>
               <a:t>Third level</a:t>
             </a:r>
           </a:p>
           <a:p>
             <a:pPr lvl="3"/>
             <a:r>
-              <a:rPr lang="en-US" smtClean="0"/>
+              <a:rPr lang="en-US"/>
               <a:t>Fourth level</a:t>
             </a:r>
           </a:p>
           <a:p>
             <a:pPr lvl="4"/>
             <a:r>
-              <a:rPr lang="en-US" smtClean="0"/>
+              <a:rPr lang="en-US"/>
               <a:t>Fifth level</a:t>
             </a:r>
-            <a:endParaRPr lang="en-US"/>
           </a:p>
         </p:txBody>
       </p:sp>
@@ -1347,7 +1352,7 @@
             <a:fld id="{1D8BD707-D9CF-40AE-B4C6-C98DA3205C09}" type="datetimeFigureOut">
               <a:rPr lang="en-US" smtClean="0"/>
               <a:pPr/>
-              <a:t>8/1/2011</a:t>
+              <a:t>6/5/2026</a:t>
             </a:fld>
             <a:endParaRPr lang="en-US"/>
           </a:p>
@@ -1441,10 +1446,9 @@
           </a:lstStyle>
           <a:p>
             <a:r>
-              <a:rPr lang="en-US" smtClean="0"/>
+              <a:rPr lang="en-US"/>
               <a:t>Click to edit Master title style</a:t>
             </a:r>
-            <a:endParaRPr lang="en-US"/>
           </a:p>
         </p:txBody>
       </p:sp>
@@ -1507,7 +1511,7 @@
           <a:p>
             <a:pPr lvl="0"/>
             <a:r>
-              <a:rPr lang="en-US" smtClean="0"/>
+              <a:rPr lang="en-US"/>
               <a:t>Click to edit Master text styles</a:t>
             </a:r>
           </a:p>
@@ -1563,38 +1567,37 @@
           <a:p>
             <a:pPr lvl="0"/>
             <a:r>
-              <a:rPr lang="en-US" smtClean="0"/>
+              <a:rPr lang="en-US"/>
               <a:t>Click to edit Master text styles</a:t>
             </a:r>
           </a:p>
           <a:p>
             <a:pPr lvl="1"/>
             <a:r>
-              <a:rPr lang="en-US" smtClean="0"/>
+              <a:rPr lang="en-US"/>
               <a:t>Second level</a:t>
             </a:r>
           </a:p>
           <a:p>
             <a:pPr lvl="2"/>
             <a:r>
-              <a:rPr lang="en-US" smtClean="0"/>
+              <a:rPr lang="en-US"/>
               <a:t>Third level</a:t>
             </a:r>
           </a:p>
           <a:p>
             <a:pPr lvl="3"/>
             <a:r>
-              <a:rPr lang="en-US" smtClean="0"/>
+              <a:rPr lang="en-US"/>
               <a:t>Fourth level</a:t>
             </a:r>
           </a:p>
           <a:p>
             <a:pPr lvl="4"/>
             <a:r>
-              <a:rPr lang="en-US" smtClean="0"/>
+              <a:rPr lang="en-US"/>
               <a:t>Fifth level</a:t>
             </a:r>
-            <a:endParaRPr lang="en-US"/>
           </a:p>
         </p:txBody>
       </p:sp>
@@ -1657,7 +1660,7 @@
           <a:p>
             <a:pPr lvl="0"/>
             <a:r>
-              <a:rPr lang="en-US" smtClean="0"/>
+              <a:rPr lang="en-US"/>
               <a:t>Click to edit Master text styles</a:t>
             </a:r>
           </a:p>
@@ -1713,38 +1716,37 @@
           <a:p>
             <a:pPr lvl="0"/>
             <a:r>
-              <a:rPr lang="en-US" smtClean="0"/>
+              <a:rPr lang="en-US"/>
               <a:t>Click to edit Master text styles</a:t>
             </a:r>
           </a:p>
           <a:p>
             <a:pPr lvl="1"/>
             <a:r>
-              <a:rPr lang="en-US" smtClean="0"/>
+              <a:rPr lang="en-US"/>
               <a:t>Second level</a:t>
             </a:r>
           </a:p>
           <a:p>
             <a:pPr lvl="2"/>
             <a:r>
-              <a:rPr lang="en-US" smtClean="0"/>
+              <a:rPr lang="en-US"/>
               <a:t>Third level</a:t>
             </a:r>
           </a:p>
           <a:p>
             <a:pPr lvl="3"/>
             <a:r>
-              <a:rPr lang="en-US" smtClean="0"/>
+              <a:rPr lang="en-US"/>
               <a:t>Fourth level</a:t>
             </a:r>
           </a:p>
           <a:p>
             <a:pPr lvl="4"/>
             <a:r>
-              <a:rPr lang="en-US" smtClean="0"/>
+              <a:rPr lang="en-US"/>
               <a:t>Fifth level</a:t>
             </a:r>
-            <a:endParaRPr lang="en-US"/>
           </a:p>
         </p:txBody>
       </p:sp>
@@ -1766,7 +1768,7 @@
             <a:fld id="{1D8BD707-D9CF-40AE-B4C6-C98DA3205C09}" type="datetimeFigureOut">
               <a:rPr lang="en-US" smtClean="0"/>
               <a:pPr/>
-              <a:t>8/1/2011</a:t>
+              <a:t>6/5/2026</a:t>
             </a:fld>
             <a:endParaRPr lang="en-US"/>
           </a:p>
@@ -1856,10 +1858,9 @@
           <a:lstStyle/>
           <a:p>
             <a:r>
-              <a:rPr lang="en-US" smtClean="0"/>
+              <a:rPr lang="en-US"/>
               <a:t>Click to edit Master title style</a:t>
             </a:r>
-            <a:endParaRPr lang="en-US"/>
           </a:p>
         </p:txBody>
       </p:sp>
@@ -1881,7 +1882,7 @@
             <a:fld id="{1D8BD707-D9CF-40AE-B4C6-C98DA3205C09}" type="datetimeFigureOut">
               <a:rPr lang="en-US" smtClean="0"/>
               <a:pPr/>
-              <a:t>8/1/2011</a:t>
+              <a:t>6/5/2026</a:t>
             </a:fld>
             <a:endParaRPr lang="en-US"/>
           </a:p>
@@ -1973,7 +1974,7 @@
             <a:fld id="{1D8BD707-D9CF-40AE-B4C6-C98DA3205C09}" type="datetimeFigureOut">
               <a:rPr lang="en-US" smtClean="0"/>
               <a:pPr/>
-              <a:t>8/1/2011</a:t>
+              <a:t>6/5/2026</a:t>
             </a:fld>
             <a:endParaRPr lang="en-US"/>
           </a:p>
@@ -2072,10 +2073,9 @@
           </a:lstStyle>
           <a:p>
             <a:r>
-              <a:rPr lang="en-US" smtClean="0"/>
+              <a:rPr lang="en-US"/>
               <a:t>Click to edit Master title style</a:t>
             </a:r>
-            <a:endParaRPr lang="en-US"/>
           </a:p>
         </p:txBody>
       </p:sp>
@@ -2129,38 +2129,37 @@
           <a:p>
             <a:pPr lvl="0"/>
             <a:r>
-              <a:rPr lang="en-US" smtClean="0"/>
+              <a:rPr lang="en-US"/>
               <a:t>Click to edit Master text styles</a:t>
             </a:r>
           </a:p>
           <a:p>
             <a:pPr lvl="1"/>
             <a:r>
-              <a:rPr lang="en-US" smtClean="0"/>
+              <a:rPr lang="en-US"/>
               <a:t>Second level</a:t>
             </a:r>
           </a:p>
           <a:p>
             <a:pPr lvl="2"/>
             <a:r>
-              <a:rPr lang="en-US" smtClean="0"/>
+              <a:rPr lang="en-US"/>
               <a:t>Third level</a:t>
             </a:r>
           </a:p>
           <a:p>
             <a:pPr lvl="3"/>
             <a:r>
-              <a:rPr lang="en-US" smtClean="0"/>
+              <a:rPr lang="en-US"/>
               <a:t>Fourth level</a:t>
             </a:r>
           </a:p>
           <a:p>
             <a:pPr lvl="4"/>
             <a:r>
-              <a:rPr lang="en-US" smtClean="0"/>
+              <a:rPr lang="en-US"/>
               <a:t>Fifth level</a:t>
             </a:r>
-            <a:endParaRPr lang="en-US"/>
           </a:p>
         </p:txBody>
       </p:sp>
@@ -2223,7 +2222,7 @@
           <a:p>
             <a:pPr lvl="0"/>
             <a:r>
-              <a:rPr lang="en-US" smtClean="0"/>
+              <a:rPr lang="en-US"/>
               <a:t>Click to edit Master text styles</a:t>
             </a:r>
           </a:p>
@@ -2247,7 +2246,7 @@
             <a:fld id="{1D8BD707-D9CF-40AE-B4C6-C98DA3205C09}" type="datetimeFigureOut">
               <a:rPr lang="en-US" smtClean="0"/>
               <a:pPr/>
-              <a:t>8/1/2011</a:t>
+              <a:t>6/5/2026</a:t>
             </a:fld>
             <a:endParaRPr lang="en-US"/>
           </a:p>
@@ -2346,10 +2345,9 @@
           </a:lstStyle>
           <a:p>
             <a:r>
-              <a:rPr lang="en-US" smtClean="0"/>
+              <a:rPr lang="en-US"/>
               <a:t>Click to edit Master title style</a:t>
             </a:r>
-            <a:endParaRPr lang="en-US"/>
           </a:p>
         </p:txBody>
       </p:sp>
@@ -2473,7 +2471,7 @@
           <a:p>
             <a:pPr lvl="0"/>
             <a:r>
-              <a:rPr lang="en-US" smtClean="0"/>
+              <a:rPr lang="en-US"/>
               <a:t>Click to edit Master text styles</a:t>
             </a:r>
           </a:p>
@@ -2497,7 +2495,7 @@
             <a:fld id="{1D8BD707-D9CF-40AE-B4C6-C98DA3205C09}" type="datetimeFigureOut">
               <a:rPr lang="en-US" smtClean="0"/>
               <a:pPr/>
-              <a:t>8/1/2011</a:t>
+              <a:t>6/5/2026</a:t>
             </a:fld>
             <a:endParaRPr lang="en-US"/>
           </a:p>
@@ -2602,10 +2600,9 @@
           <a:lstStyle/>
           <a:p>
             <a:r>
-              <a:rPr lang="en-US" smtClean="0"/>
+              <a:rPr lang="en-US"/>
               <a:t>Click to edit Master title style</a:t>
             </a:r>
-            <a:endParaRPr lang="en-US"/>
           </a:p>
         </p:txBody>
       </p:sp>
@@ -2636,38 +2633,37 @@
           <a:p>
             <a:pPr lvl="0"/>
             <a:r>
-              <a:rPr lang="en-US" smtClean="0"/>
+              <a:rPr lang="en-US"/>
               <a:t>Click to edit Master text styles</a:t>
             </a:r>
           </a:p>
           <a:p>
             <a:pPr lvl="1"/>
             <a:r>
-              <a:rPr lang="en-US" smtClean="0"/>
+              <a:rPr lang="en-US"/>
               <a:t>Second level</a:t>
             </a:r>
           </a:p>
           <a:p>
             <a:pPr lvl="2"/>
             <a:r>
-              <a:rPr lang="en-US" smtClean="0"/>
+              <a:rPr lang="en-US"/>
               <a:t>Third level</a:t>
             </a:r>
           </a:p>
           <a:p>
             <a:pPr lvl="3"/>
             <a:r>
-              <a:rPr lang="en-US" smtClean="0"/>
+              <a:rPr lang="en-US"/>
               <a:t>Fourth level</a:t>
             </a:r>
           </a:p>
           <a:p>
             <a:pPr lvl="4"/>
             <a:r>
-              <a:rPr lang="en-US" smtClean="0"/>
+              <a:rPr lang="en-US"/>
               <a:t>Fifth level</a:t>
             </a:r>
-            <a:endParaRPr lang="en-US"/>
           </a:p>
         </p:txBody>
       </p:sp>
@@ -2707,7 +2703,7 @@
             <a:fld id="{1D8BD707-D9CF-40AE-B4C6-C98DA3205C09}" type="datetimeFigureOut">
               <a:rPr lang="en-US" smtClean="0"/>
               <a:pPr/>
-              <a:t>8/1/2011</a:t>
+              <a:t>6/5/2026</a:t>
             </a:fld>
             <a:endParaRPr lang="en-US"/>
           </a:p>
@@ -3062,13 +3058,14 @@
 </file>
 
 <file path=ppt/slides/slide1.xml><?xml version="1.0" encoding="utf-8"?>
-<p:sld xmlns:p="http://schemas.openxmlformats.org/presentationml/2006/main" xmlns:a="http://schemas.openxmlformats.org/drawingml/2006/main" xmlns:r="http://schemas.openxmlformats.org/officeDocument/2006/relationships">
+<p:sld xmlns:a="http://schemas.openxmlformats.org/drawingml/2006/main" xmlns:r="http://schemas.openxmlformats.org/officeDocument/2006/relationships" xmlns:p="http://schemas.openxmlformats.org/presentationml/2006/main">
   <p:cSld>
     <p:bg>
       <p:bgPr>
         <a:solidFill>
           <a:srgbClr val="005088"/>
         </a:solidFill>
+        <a:effectLst/>
       </p:bgPr>
     </p:bg>
     <p:spTree>
@@ -3087,12 +3084,12 @@
       </p:grpSpPr>
       <p:grpSp>
         <p:nvGrpSpPr>
-          <p:cNvPr name="Group 2" id="2"/>
+          <p:cNvPr id="2" name="Group 2"/>
           <p:cNvGrpSpPr/>
           <p:nvPr/>
         </p:nvGrpSpPr>
         <p:grpSpPr>
-          <a:xfrm rot="0">
+          <a:xfrm>
             <a:off x="2286000" y="309521"/>
             <a:ext cx="13716000" cy="4447918"/>
             <a:chOff x="0" y="0"/>
@@ -3101,12 +3098,12 @@
         </p:grpSpPr>
         <p:sp>
           <p:nvSpPr>
-            <p:cNvPr name="Freeform 3" id="3"/>
+            <p:cNvPr id="3" name="Freeform 3"/>
             <p:cNvSpPr/>
             <p:nvPr/>
           </p:nvSpPr>
           <p:spPr>
-            <a:xfrm flipH="false" flipV="false" rot="0">
+            <a:xfrm>
               <a:off x="0" y="0"/>
               <a:ext cx="18288000" cy="5930557"/>
             </a:xfrm>
@@ -3115,9 +3112,9 @@
               <a:gdLst/>
               <a:ahLst/>
               <a:cxnLst/>
-              <a:rect r="r" b="b" t="t" l="l"/>
+              <a:rect l="l" t="t" r="r" b="b"/>
               <a:pathLst>
-                <a:path h="5930557" w="18288000">
+                <a:path w="18288000" h="5930557">
                   <a:moveTo>
                     <a:pt x="0" y="0"/>
                   </a:moveTo>
@@ -3139,15 +3136,22 @@
                 <a:alphaModFix amt="0"/>
               </a:blip>
               <a:stretch>
-                <a:fillRect l="0" t="-19826" r="0" b="-345"/>
+                <a:fillRect t="-19826" b="-345"/>
               </a:stretch>
             </a:blipFill>
           </p:spPr>
+          <p:txBody>
+            <a:bodyPr/>
+            <a:lstStyle/>
+            <a:p>
+              <a:endParaRPr lang="es-AR"/>
+            </a:p>
+          </p:txBody>
         </p:sp>
         <p:sp>
           <p:nvSpPr>
-            <p:cNvPr name="TextBox 4" id="4"/>
-            <p:cNvSpPr txBox="true"/>
+            <p:cNvPr id="4" name="TextBox 4"/>
+            <p:cNvSpPr txBox="1"/>
             <p:nvPr/>
           </p:nvSpPr>
           <p:spPr>
@@ -3160,7 +3164,7 @@
             </a:prstGeom>
           </p:spPr>
           <p:txBody>
-            <a:bodyPr anchor="b" rtlCol="false" tIns="0" lIns="0" bIns="0" rIns="0"/>
+            <a:bodyPr lIns="0" tIns="0" rIns="0" bIns="0" rtlCol="0" anchor="b"/>
             <a:lstStyle/>
             <a:p>
               <a:pPr algn="ctr">
@@ -3205,12 +3209,12 @@
       </p:grpSp>
       <p:sp>
         <p:nvSpPr>
-          <p:cNvPr name="TextBox 5" id="5"/>
-          <p:cNvSpPr txBox="true"/>
+          <p:cNvPr id="5" name="TextBox 5"/>
+          <p:cNvSpPr txBox="1"/>
           <p:nvPr/>
         </p:nvSpPr>
         <p:spPr>
-          <a:xfrm rot="0">
+          <a:xfrm>
             <a:off x="1028700" y="6373749"/>
             <a:ext cx="15512478" cy="2884551"/>
           </a:xfrm>
@@ -3219,7 +3223,7 @@
           </a:prstGeom>
         </p:spPr>
         <p:txBody>
-          <a:bodyPr anchor="t" rtlCol="false" tIns="0" lIns="0" bIns="0" rIns="0">
+          <a:bodyPr lIns="0" tIns="0" rIns="0" bIns="0" rtlCol="0" anchor="t">
             <a:spAutoFit/>
           </a:bodyPr>
           <a:lstStyle/>
@@ -3267,6 +3271,15 @@
                 <a:spcPts val="5832"/>
               </a:lnSpc>
             </a:pPr>
+            <a:endParaRPr lang="en-US" sz="3600">
+              <a:solidFill>
+                <a:srgbClr val="F3F0DF"/>
+              </a:solidFill>
+              <a:latin typeface="Aptos"/>
+              <a:ea typeface="Aptos"/>
+              <a:cs typeface="Aptos"/>
+              <a:sym typeface="Aptos"/>
+            </a:endParaRPr>
           </a:p>
           <a:p>
             <a:pPr algn="l">
@@ -3291,7 +3304,7 @@
       </p:sp>
       <p:sp>
         <p:nvSpPr>
-          <p:cNvPr name="AutoShape 6" id="6"/>
+          <p:cNvPr id="6" name="AutoShape 6"/>
           <p:cNvSpPr/>
           <p:nvPr/>
         </p:nvSpPr>
@@ -3303,15 +3316,22 @@
           <a:prstGeom prst="line">
             <a:avLst/>
           </a:prstGeom>
-          <a:ln cap="flat" w="38100">
+          <a:ln w="38100" cap="flat">
             <a:solidFill>
               <a:srgbClr val="11CAA0"/>
             </a:solidFill>
             <a:prstDash val="solid"/>
-            <a:headEnd type="none" len="sm" w="sm"/>
-            <a:tailEnd type="none" len="sm" w="sm"/>
+            <a:headEnd type="none" w="sm" len="sm"/>
+            <a:tailEnd type="none" w="sm" len="sm"/>
           </a:ln>
         </p:spPr>
+        <p:txBody>
+          <a:bodyPr/>
+          <a:lstStyle/>
+          <a:p>
+            <a:endParaRPr lang="es-AR"/>
+          </a:p>
+        </p:txBody>
       </p:sp>
     </p:spTree>
   </p:cSld>
@@ -3322,13 +3342,14 @@
 </file>
 
 <file path=ppt/slides/slide10.xml><?xml version="1.0" encoding="utf-8"?>
-<p:sld xmlns:p="http://schemas.openxmlformats.org/presentationml/2006/main" xmlns:a="http://schemas.openxmlformats.org/drawingml/2006/main" xmlns:r="http://schemas.openxmlformats.org/officeDocument/2006/relationships">
+<p:sld xmlns:a="http://schemas.openxmlformats.org/drawingml/2006/main" xmlns:r="http://schemas.openxmlformats.org/officeDocument/2006/relationships" xmlns:p="http://schemas.openxmlformats.org/presentationml/2006/main">
   <p:cSld>
     <p:bg>
       <p:bgPr>
         <a:solidFill>
           <a:srgbClr val="F3F0DF"/>
         </a:solidFill>
+        <a:effectLst/>
       </p:bgPr>
     </p:bg>
     <p:spTree>
@@ -3347,12 +3368,12 @@
       </p:grpSpPr>
       <p:grpSp>
         <p:nvGrpSpPr>
-          <p:cNvPr name="Group 2" id="2"/>
+          <p:cNvPr id="2" name="Group 2"/>
           <p:cNvGrpSpPr/>
           <p:nvPr/>
         </p:nvGrpSpPr>
         <p:grpSpPr>
-          <a:xfrm rot="0">
+          <a:xfrm>
             <a:off x="1257300" y="547688"/>
             <a:ext cx="15773400" cy="1988345"/>
             <a:chOff x="0" y="0"/>
@@ -3361,12 +3382,12 @@
         </p:grpSpPr>
         <p:sp>
           <p:nvSpPr>
-            <p:cNvPr name="Freeform 3" id="3"/>
+            <p:cNvPr id="3" name="Freeform 3"/>
             <p:cNvSpPr/>
             <p:nvPr/>
           </p:nvSpPr>
           <p:spPr>
-            <a:xfrm flipH="false" flipV="false" rot="0">
+            <a:xfrm>
               <a:off x="0" y="0"/>
               <a:ext cx="21031200" cy="2651127"/>
             </a:xfrm>
@@ -3375,9 +3396,9 @@
               <a:gdLst/>
               <a:ahLst/>
               <a:cxnLst/>
-              <a:rect r="r" b="b" t="t" l="l"/>
+              <a:rect l="l" t="t" r="r" b="b"/>
               <a:pathLst>
-                <a:path h="2651127" w="21031200">
+                <a:path w="21031200" h="2651127">
                   <a:moveTo>
                     <a:pt x="0" y="0"/>
                   </a:moveTo>
@@ -3399,15 +3420,1076 @@
                 <a:alphaModFix amt="0"/>
               </a:blip>
               <a:stretch>
-                <a:fillRect l="0" t="-104573" r="0" b="-104573"/>
+                <a:fillRect t="-104573" b="-104573"/>
               </a:stretch>
             </a:blipFill>
           </p:spPr>
+          <p:txBody>
+            <a:bodyPr/>
+            <a:lstStyle/>
+            <a:p>
+              <a:endParaRPr lang="es-AR"/>
+            </a:p>
+          </p:txBody>
         </p:sp>
         <p:sp>
           <p:nvSpPr>
-            <p:cNvPr name="TextBox 4" id="4"/>
-            <p:cNvSpPr txBox="true"/>
+            <p:cNvPr id="4" name="TextBox 4"/>
+            <p:cNvSpPr txBox="1"/>
+            <p:nvPr/>
+          </p:nvSpPr>
+          <p:spPr>
+            <a:xfrm>
+              <a:off x="0" y="66675"/>
+              <a:ext cx="21031200" cy="2584451"/>
+            </a:xfrm>
+            <a:prstGeom prst="rect">
+              <a:avLst/>
+            </a:prstGeom>
+          </p:spPr>
+          <p:txBody>
+            <a:bodyPr lIns="0" tIns="0" rIns="0" bIns="0" rtlCol="0" anchor="ctr"/>
+            <a:lstStyle/>
+            <a:p>
+              <a:pPr algn="l">
+                <a:lnSpc>
+                  <a:spcPts val="7128"/>
+                </a:lnSpc>
+              </a:pPr>
+              <a:r>
+                <a:rPr lang="en-US" sz="6600" b="1">
+                  <a:solidFill>
+                    <a:srgbClr val="005088"/>
+                  </a:solidFill>
+                  <a:latin typeface="Aptos Bold"/>
+                  <a:ea typeface="Aptos Bold"/>
+                  <a:cs typeface="Aptos Bold"/>
+                  <a:sym typeface="Aptos Bold"/>
+                </a:rPr>
+                <a:t>Resultados: TIF vs JPG</a:t>
+              </a:r>
+            </a:p>
+          </p:txBody>
+        </p:sp>
+      </p:grpSp>
+      <p:sp>
+        <p:nvSpPr>
+          <p:cNvPr id="5" name="AutoShape 5"/>
+          <p:cNvSpPr/>
+          <p:nvPr/>
+        </p:nvSpPr>
+        <p:spPr>
+          <a:xfrm flipV="1">
+            <a:off x="1257389" y="2421732"/>
+            <a:ext cx="8115300" cy="19050"/>
+          </a:xfrm>
+          <a:prstGeom prst="line">
+            <a:avLst/>
+          </a:prstGeom>
+          <a:ln w="38100" cap="flat">
+            <a:solidFill>
+              <a:srgbClr val="11CAA0"/>
+            </a:solidFill>
+            <a:prstDash val="solid"/>
+            <a:headEnd type="none" w="sm" len="sm"/>
+            <a:tailEnd type="none" w="sm" len="sm"/>
+          </a:ln>
+        </p:spPr>
+        <p:txBody>
+          <a:bodyPr/>
+          <a:lstStyle/>
+          <a:p>
+            <a:endParaRPr lang="es-AR"/>
+          </a:p>
+        </p:txBody>
+      </p:sp>
+      <p:grpSp>
+        <p:nvGrpSpPr>
+          <p:cNvPr id="6" name="Group 6"/>
+          <p:cNvGrpSpPr/>
+          <p:nvPr/>
+        </p:nvGrpSpPr>
+        <p:grpSpPr>
+          <a:xfrm>
+            <a:off x="1257300" y="2784158"/>
+            <a:ext cx="7561921" cy="5698801"/>
+            <a:chOff x="0" y="0"/>
+            <a:chExt cx="1991617" cy="1500919"/>
+          </a:xfrm>
+        </p:grpSpPr>
+        <p:sp>
+          <p:nvSpPr>
+            <p:cNvPr id="7" name="Freeform 7"/>
+            <p:cNvSpPr/>
+            <p:nvPr/>
+          </p:nvSpPr>
+          <p:spPr>
+            <a:xfrm>
+              <a:off x="0" y="0"/>
+              <a:ext cx="1991617" cy="1500919"/>
+            </a:xfrm>
+            <a:custGeom>
+              <a:avLst/>
+              <a:gdLst/>
+              <a:ahLst/>
+              <a:cxnLst/>
+              <a:rect l="l" t="t" r="r" b="b"/>
+              <a:pathLst>
+                <a:path w="1991617" h="1500919">
+                  <a:moveTo>
+                    <a:pt x="52214" y="0"/>
+                  </a:moveTo>
+                  <a:lnTo>
+                    <a:pt x="1939403" y="0"/>
+                  </a:lnTo>
+                  <a:cubicBezTo>
+                    <a:pt x="1968240" y="0"/>
+                    <a:pt x="1991617" y="23377"/>
+                    <a:pt x="1991617" y="52214"/>
+                  </a:cubicBezTo>
+                  <a:lnTo>
+                    <a:pt x="1991617" y="1448705"/>
+                  </a:lnTo>
+                  <a:cubicBezTo>
+                    <a:pt x="1991617" y="1462553"/>
+                    <a:pt x="1986116" y="1475834"/>
+                    <a:pt x="1976324" y="1485626"/>
+                  </a:cubicBezTo>
+                  <a:cubicBezTo>
+                    <a:pt x="1966532" y="1495418"/>
+                    <a:pt x="1953251" y="1500919"/>
+                    <a:pt x="1939403" y="1500919"/>
+                  </a:cubicBezTo>
+                  <a:lnTo>
+                    <a:pt x="52214" y="1500919"/>
+                  </a:lnTo>
+                  <a:cubicBezTo>
+                    <a:pt x="38366" y="1500919"/>
+                    <a:pt x="25085" y="1495418"/>
+                    <a:pt x="15293" y="1485626"/>
+                  </a:cubicBezTo>
+                  <a:cubicBezTo>
+                    <a:pt x="5501" y="1475834"/>
+                    <a:pt x="0" y="1462553"/>
+                    <a:pt x="0" y="1448705"/>
+                  </a:cubicBezTo>
+                  <a:lnTo>
+                    <a:pt x="0" y="52214"/>
+                  </a:lnTo>
+                  <a:cubicBezTo>
+                    <a:pt x="0" y="38366"/>
+                    <a:pt x="5501" y="25085"/>
+                    <a:pt x="15293" y="15293"/>
+                  </a:cubicBezTo>
+                  <a:cubicBezTo>
+                    <a:pt x="25085" y="5501"/>
+                    <a:pt x="38366" y="0"/>
+                    <a:pt x="52214" y="0"/>
+                  </a:cubicBezTo>
+                  <a:close/>
+                </a:path>
+              </a:pathLst>
+            </a:custGeom>
+            <a:solidFill>
+              <a:srgbClr val="FFFFFF"/>
+            </a:solidFill>
+            <a:ln w="38100" cap="rnd">
+              <a:solidFill>
+                <a:srgbClr val="000000"/>
+              </a:solidFill>
+              <a:prstDash val="solid"/>
+              <a:round/>
+            </a:ln>
+          </p:spPr>
+          <p:txBody>
+            <a:bodyPr/>
+            <a:lstStyle/>
+            <a:p>
+              <a:endParaRPr lang="es-AR"/>
+            </a:p>
+          </p:txBody>
+        </p:sp>
+        <p:sp>
+          <p:nvSpPr>
+            <p:cNvPr id="8" name="TextBox 8"/>
+            <p:cNvSpPr txBox="1"/>
+            <p:nvPr/>
+          </p:nvSpPr>
+          <p:spPr>
+            <a:xfrm>
+              <a:off x="0" y="-38100"/>
+              <a:ext cx="1991617" cy="1539019"/>
+            </a:xfrm>
+            <a:prstGeom prst="rect">
+              <a:avLst/>
+            </a:prstGeom>
+          </p:spPr>
+          <p:txBody>
+            <a:bodyPr lIns="50800" tIns="50800" rIns="50800" bIns="50800" rtlCol="0" anchor="ctr"/>
+            <a:lstStyle/>
+            <a:p>
+              <a:pPr algn="ctr">
+                <a:lnSpc>
+                  <a:spcPts val="2659"/>
+                </a:lnSpc>
+                <a:spcBef>
+                  <a:spcPct val="0"/>
+                </a:spcBef>
+              </a:pPr>
+              <a:endParaRPr/>
+            </a:p>
+          </p:txBody>
+        </p:sp>
+      </p:grpSp>
+      <p:grpSp>
+        <p:nvGrpSpPr>
+          <p:cNvPr id="9" name="Group 9"/>
+          <p:cNvGrpSpPr/>
+          <p:nvPr/>
+        </p:nvGrpSpPr>
+        <p:grpSpPr>
+          <a:xfrm>
+            <a:off x="9697379" y="2784158"/>
+            <a:ext cx="7561921" cy="5698801"/>
+            <a:chOff x="0" y="0"/>
+            <a:chExt cx="1991617" cy="1500919"/>
+          </a:xfrm>
+        </p:grpSpPr>
+        <p:sp>
+          <p:nvSpPr>
+            <p:cNvPr id="10" name="Freeform 10"/>
+            <p:cNvSpPr/>
+            <p:nvPr/>
+          </p:nvSpPr>
+          <p:spPr>
+            <a:xfrm>
+              <a:off x="0" y="0"/>
+              <a:ext cx="1991617" cy="1500919"/>
+            </a:xfrm>
+            <a:custGeom>
+              <a:avLst/>
+              <a:gdLst/>
+              <a:ahLst/>
+              <a:cxnLst/>
+              <a:rect l="l" t="t" r="r" b="b"/>
+              <a:pathLst>
+                <a:path w="1991617" h="1500919">
+                  <a:moveTo>
+                    <a:pt x="52214" y="0"/>
+                  </a:moveTo>
+                  <a:lnTo>
+                    <a:pt x="1939403" y="0"/>
+                  </a:lnTo>
+                  <a:cubicBezTo>
+                    <a:pt x="1968240" y="0"/>
+                    <a:pt x="1991617" y="23377"/>
+                    <a:pt x="1991617" y="52214"/>
+                  </a:cubicBezTo>
+                  <a:lnTo>
+                    <a:pt x="1991617" y="1448705"/>
+                  </a:lnTo>
+                  <a:cubicBezTo>
+                    <a:pt x="1991617" y="1462553"/>
+                    <a:pt x="1986116" y="1475834"/>
+                    <a:pt x="1976324" y="1485626"/>
+                  </a:cubicBezTo>
+                  <a:cubicBezTo>
+                    <a:pt x="1966532" y="1495418"/>
+                    <a:pt x="1953251" y="1500919"/>
+                    <a:pt x="1939403" y="1500919"/>
+                  </a:cubicBezTo>
+                  <a:lnTo>
+                    <a:pt x="52214" y="1500919"/>
+                  </a:lnTo>
+                  <a:cubicBezTo>
+                    <a:pt x="38366" y="1500919"/>
+                    <a:pt x="25085" y="1495418"/>
+                    <a:pt x="15293" y="1485626"/>
+                  </a:cubicBezTo>
+                  <a:cubicBezTo>
+                    <a:pt x="5501" y="1475834"/>
+                    <a:pt x="0" y="1462553"/>
+                    <a:pt x="0" y="1448705"/>
+                  </a:cubicBezTo>
+                  <a:lnTo>
+                    <a:pt x="0" y="52214"/>
+                  </a:lnTo>
+                  <a:cubicBezTo>
+                    <a:pt x="0" y="38366"/>
+                    <a:pt x="5501" y="25085"/>
+                    <a:pt x="15293" y="15293"/>
+                  </a:cubicBezTo>
+                  <a:cubicBezTo>
+                    <a:pt x="25085" y="5501"/>
+                    <a:pt x="38366" y="0"/>
+                    <a:pt x="52214" y="0"/>
+                  </a:cubicBezTo>
+                  <a:close/>
+                </a:path>
+              </a:pathLst>
+            </a:custGeom>
+            <a:solidFill>
+              <a:srgbClr val="FFFFFF"/>
+            </a:solidFill>
+            <a:ln w="38100" cap="rnd">
+              <a:solidFill>
+                <a:srgbClr val="000000"/>
+              </a:solidFill>
+              <a:prstDash val="solid"/>
+              <a:round/>
+            </a:ln>
+          </p:spPr>
+          <p:txBody>
+            <a:bodyPr/>
+            <a:lstStyle/>
+            <a:p>
+              <a:endParaRPr lang="es-AR"/>
+            </a:p>
+          </p:txBody>
+        </p:sp>
+        <p:sp>
+          <p:nvSpPr>
+            <p:cNvPr id="11" name="TextBox 11"/>
+            <p:cNvSpPr txBox="1"/>
+            <p:nvPr/>
+          </p:nvSpPr>
+          <p:spPr>
+            <a:xfrm>
+              <a:off x="0" y="-38100"/>
+              <a:ext cx="1991617" cy="1539019"/>
+            </a:xfrm>
+            <a:prstGeom prst="rect">
+              <a:avLst/>
+            </a:prstGeom>
+          </p:spPr>
+          <p:txBody>
+            <a:bodyPr lIns="50800" tIns="50800" rIns="50800" bIns="50800" rtlCol="0" anchor="ctr"/>
+            <a:lstStyle/>
+            <a:p>
+              <a:pPr algn="ctr">
+                <a:lnSpc>
+                  <a:spcPts val="2659"/>
+                </a:lnSpc>
+                <a:spcBef>
+                  <a:spcPct val="0"/>
+                </a:spcBef>
+              </a:pPr>
+              <a:endParaRPr/>
+            </a:p>
+          </p:txBody>
+        </p:sp>
+      </p:grpSp>
+      <p:sp>
+        <p:nvSpPr>
+          <p:cNvPr id="12" name="TextBox 12"/>
+          <p:cNvSpPr txBox="1"/>
+          <p:nvPr/>
+        </p:nvSpPr>
+        <p:spPr>
+          <a:xfrm>
+            <a:off x="1257300" y="3221266"/>
+            <a:ext cx="7561921" cy="2992550"/>
+          </a:xfrm>
+          <a:prstGeom prst="rect">
+            <a:avLst/>
+          </a:prstGeom>
+        </p:spPr>
+        <p:txBody>
+          <a:bodyPr lIns="0" tIns="0" rIns="0" bIns="0" rtlCol="0" anchor="t">
+            <a:spAutoFit/>
+          </a:bodyPr>
+          <a:lstStyle/>
+          <a:p>
+            <a:pPr algn="ctr">
+              <a:lnSpc>
+                <a:spcPts val="5724"/>
+              </a:lnSpc>
+            </a:pPr>
+            <a:r>
+              <a:rPr lang="en-US" sz="5300" b="1" dirty="0">
+                <a:solidFill>
+                  <a:srgbClr val="000000"/>
+                </a:solidFill>
+                <a:latin typeface="Aptos Bold"/>
+                <a:ea typeface="Aptos Bold"/>
+                <a:cs typeface="Aptos Bold"/>
+                <a:sym typeface="Aptos Bold"/>
+              </a:rPr>
+              <a:t>Formato JPG</a:t>
+            </a:r>
+          </a:p>
+          <a:p>
+            <a:pPr algn="ctr">
+              <a:lnSpc>
+                <a:spcPts val="4428"/>
+              </a:lnSpc>
+            </a:pPr>
+            <a:r>
+              <a:rPr lang="en-US" sz="4100" dirty="0">
+                <a:solidFill>
+                  <a:srgbClr val="000000"/>
+                </a:solidFill>
+                <a:latin typeface="Aptos"/>
+                <a:ea typeface="Aptos"/>
+                <a:cs typeface="Aptos"/>
+                <a:sym typeface="Aptos"/>
+              </a:rPr>
+              <a:t>La </a:t>
+            </a:r>
+            <a:r>
+              <a:rPr lang="en-US" sz="4100" dirty="0" err="1">
+                <a:solidFill>
+                  <a:srgbClr val="000000"/>
+                </a:solidFill>
+                <a:latin typeface="Aptos"/>
+                <a:ea typeface="Aptos"/>
+                <a:cs typeface="Aptos"/>
+                <a:sym typeface="Aptos"/>
+              </a:rPr>
+              <a:t>compresión</a:t>
+            </a:r>
+            <a:r>
+              <a:rPr lang="en-US" sz="4100" dirty="0">
+                <a:solidFill>
+                  <a:srgbClr val="000000"/>
+                </a:solidFill>
+                <a:latin typeface="Aptos"/>
+                <a:ea typeface="Aptos"/>
+                <a:cs typeface="Aptos"/>
+                <a:sym typeface="Aptos"/>
+              </a:rPr>
+              <a:t> </a:t>
+            </a:r>
+            <a:r>
+              <a:rPr lang="en-US" sz="4100" dirty="0" err="1">
+                <a:solidFill>
+                  <a:srgbClr val="000000"/>
+                </a:solidFill>
+                <a:latin typeface="Aptos"/>
+                <a:ea typeface="Aptos"/>
+                <a:cs typeface="Aptos"/>
+                <a:sym typeface="Aptos"/>
+              </a:rPr>
+              <a:t>recorta</a:t>
+            </a:r>
+            <a:r>
+              <a:rPr lang="en-US" sz="4100" dirty="0">
+                <a:solidFill>
+                  <a:srgbClr val="000000"/>
+                </a:solidFill>
+                <a:latin typeface="Aptos"/>
+                <a:ea typeface="Aptos"/>
+                <a:cs typeface="Aptos"/>
+                <a:sym typeface="Aptos"/>
+              </a:rPr>
+              <a:t> </a:t>
+            </a:r>
+            <a:r>
+              <a:rPr lang="en-US" sz="4100" dirty="0" err="1">
+                <a:solidFill>
+                  <a:srgbClr val="000000"/>
+                </a:solidFill>
+                <a:latin typeface="Aptos"/>
+                <a:ea typeface="Aptos"/>
+                <a:cs typeface="Aptos"/>
+                <a:sym typeface="Aptos"/>
+              </a:rPr>
+              <a:t>frecuencias</a:t>
+            </a:r>
+            <a:r>
+              <a:rPr lang="en-US" sz="4100" dirty="0">
+                <a:solidFill>
+                  <a:srgbClr val="000000"/>
+                </a:solidFill>
+                <a:latin typeface="Aptos"/>
+                <a:ea typeface="Aptos"/>
+                <a:cs typeface="Aptos"/>
+                <a:sym typeface="Aptos"/>
+              </a:rPr>
+              <a:t> </a:t>
+            </a:r>
+            <a:r>
+              <a:rPr lang="en-US" sz="4100" dirty="0" err="1">
+                <a:solidFill>
+                  <a:srgbClr val="000000"/>
+                </a:solidFill>
+                <a:latin typeface="Aptos"/>
+                <a:ea typeface="Aptos"/>
+                <a:cs typeface="Aptos"/>
+                <a:sym typeface="Aptos"/>
+              </a:rPr>
+              <a:t>altas</a:t>
+            </a:r>
+            <a:r>
+              <a:rPr lang="en-US" sz="4100" dirty="0">
+                <a:solidFill>
+                  <a:srgbClr val="000000"/>
+                </a:solidFill>
+                <a:latin typeface="Aptos"/>
+                <a:ea typeface="Aptos"/>
+                <a:cs typeface="Aptos"/>
+                <a:sym typeface="Aptos"/>
+              </a:rPr>
+              <a:t>, </a:t>
+            </a:r>
+            <a:r>
+              <a:rPr lang="en-US" sz="4100" dirty="0" err="1">
+                <a:solidFill>
+                  <a:srgbClr val="000000"/>
+                </a:solidFill>
+                <a:latin typeface="Aptos"/>
+                <a:ea typeface="Aptos"/>
+                <a:cs typeface="Aptos"/>
+                <a:sym typeface="Aptos"/>
+              </a:rPr>
+              <a:t>afetando</a:t>
+            </a:r>
+            <a:r>
+              <a:rPr lang="en-US" sz="4100" dirty="0">
+                <a:solidFill>
+                  <a:srgbClr val="000000"/>
+                </a:solidFill>
+                <a:latin typeface="Aptos"/>
+                <a:ea typeface="Aptos"/>
+                <a:cs typeface="Aptos"/>
+                <a:sym typeface="Aptos"/>
+              </a:rPr>
+              <a:t> </a:t>
+            </a:r>
+            <a:r>
+              <a:rPr lang="en-US" sz="4100" dirty="0" err="1">
+                <a:solidFill>
+                  <a:srgbClr val="000000"/>
+                </a:solidFill>
+                <a:latin typeface="Aptos"/>
+                <a:ea typeface="Aptos"/>
+                <a:cs typeface="Aptos"/>
+                <a:sym typeface="Aptos"/>
+              </a:rPr>
+              <a:t>agresivamente</a:t>
+            </a:r>
+            <a:r>
+              <a:rPr lang="en-US" sz="4100" dirty="0">
+                <a:solidFill>
+                  <a:srgbClr val="000000"/>
+                </a:solidFill>
+                <a:latin typeface="Aptos"/>
+                <a:ea typeface="Aptos"/>
+                <a:cs typeface="Aptos"/>
+                <a:sym typeface="Aptos"/>
+              </a:rPr>
+              <a:t> la </a:t>
+            </a:r>
+            <a:r>
+              <a:rPr lang="en-US" sz="4100" dirty="0" err="1">
+                <a:solidFill>
+                  <a:srgbClr val="000000"/>
+                </a:solidFill>
+                <a:latin typeface="Aptos"/>
+                <a:ea typeface="Aptos"/>
+                <a:cs typeface="Aptos"/>
+                <a:sym typeface="Aptos"/>
+              </a:rPr>
+              <a:t>fase</a:t>
+            </a:r>
+            <a:r>
+              <a:rPr lang="en-US" sz="4100" dirty="0">
+                <a:solidFill>
+                  <a:srgbClr val="000000"/>
+                </a:solidFill>
+                <a:latin typeface="Aptos"/>
+                <a:ea typeface="Aptos"/>
+                <a:cs typeface="Aptos"/>
+                <a:sym typeface="Aptos"/>
+              </a:rPr>
+              <a:t>.</a:t>
+            </a:r>
+          </a:p>
+          <a:p>
+            <a:pPr algn="ctr">
+              <a:lnSpc>
+                <a:spcPts val="4428"/>
+              </a:lnSpc>
+              <a:spcBef>
+                <a:spcPct val="0"/>
+              </a:spcBef>
+            </a:pPr>
+            <a:r>
+              <a:rPr lang="en-US" sz="4100" dirty="0">
+                <a:solidFill>
+                  <a:srgbClr val="000000"/>
+                </a:solidFill>
+                <a:latin typeface="Aptos"/>
+                <a:ea typeface="Aptos"/>
+                <a:cs typeface="Aptos"/>
+                <a:sym typeface="Aptos"/>
+              </a:rPr>
+              <a:t>Menor </a:t>
+            </a:r>
+            <a:r>
+              <a:rPr lang="en-US" sz="4100" dirty="0" err="1">
+                <a:solidFill>
+                  <a:srgbClr val="000000"/>
+                </a:solidFill>
+                <a:latin typeface="Aptos"/>
+                <a:ea typeface="Aptos"/>
+                <a:cs typeface="Aptos"/>
+                <a:sym typeface="Aptos"/>
+              </a:rPr>
+              <a:t>nitidez</a:t>
+            </a:r>
+            <a:r>
+              <a:rPr lang="en-US" sz="4100" dirty="0">
+                <a:solidFill>
+                  <a:srgbClr val="000000"/>
+                </a:solidFill>
+                <a:latin typeface="Aptos"/>
+                <a:ea typeface="Aptos"/>
+                <a:cs typeface="Aptos"/>
+                <a:sym typeface="Aptos"/>
+              </a:rPr>
+              <a:t> </a:t>
+            </a:r>
+            <a:r>
+              <a:rPr lang="en-US" sz="4100" dirty="0" err="1">
+                <a:solidFill>
+                  <a:srgbClr val="000000"/>
+                </a:solidFill>
+                <a:latin typeface="Aptos"/>
+                <a:ea typeface="Aptos"/>
+                <a:cs typeface="Aptos"/>
+                <a:sym typeface="Aptos"/>
+              </a:rPr>
+              <a:t>máxima</a:t>
+            </a:r>
+            <a:r>
+              <a:rPr lang="en-US" sz="4100" dirty="0">
+                <a:solidFill>
+                  <a:srgbClr val="000000"/>
+                </a:solidFill>
+                <a:latin typeface="Aptos"/>
+                <a:ea typeface="Aptos"/>
+                <a:cs typeface="Aptos"/>
+                <a:sym typeface="Aptos"/>
+              </a:rPr>
+              <a:t>.</a:t>
+            </a:r>
+          </a:p>
+        </p:txBody>
+      </p:sp>
+      <p:sp>
+        <p:nvSpPr>
+          <p:cNvPr id="13" name="TextBox 13"/>
+          <p:cNvSpPr txBox="1"/>
+          <p:nvPr/>
+        </p:nvSpPr>
+        <p:spPr>
+          <a:xfrm>
+            <a:off x="9697379" y="3221266"/>
+            <a:ext cx="7561921" cy="2992550"/>
+          </a:xfrm>
+          <a:prstGeom prst="rect">
+            <a:avLst/>
+          </a:prstGeom>
+        </p:spPr>
+        <p:txBody>
+          <a:bodyPr lIns="0" tIns="0" rIns="0" bIns="0" rtlCol="0" anchor="t">
+            <a:spAutoFit/>
+          </a:bodyPr>
+          <a:lstStyle/>
+          <a:p>
+            <a:pPr algn="ctr">
+              <a:lnSpc>
+                <a:spcPts val="5724"/>
+              </a:lnSpc>
+            </a:pPr>
+            <a:r>
+              <a:rPr lang="en-US" sz="5300" b="1" dirty="0">
+                <a:solidFill>
+                  <a:srgbClr val="000000"/>
+                </a:solidFill>
+                <a:latin typeface="Aptos Bold"/>
+                <a:ea typeface="Aptos Bold"/>
+                <a:cs typeface="Aptos Bold"/>
+                <a:sym typeface="Aptos Bold"/>
+              </a:rPr>
+              <a:t>Formato TIF</a:t>
+            </a:r>
+          </a:p>
+          <a:p>
+            <a:pPr algn="ctr">
+              <a:lnSpc>
+                <a:spcPts val="4428"/>
+              </a:lnSpc>
+            </a:pPr>
+            <a:r>
+              <a:rPr lang="en-US" sz="4100" dirty="0">
+                <a:solidFill>
+                  <a:srgbClr val="000000"/>
+                </a:solidFill>
+                <a:latin typeface="Aptos"/>
+                <a:ea typeface="Aptos"/>
+                <a:cs typeface="Aptos"/>
+                <a:sym typeface="Aptos"/>
+              </a:rPr>
+              <a:t>Sin </a:t>
+            </a:r>
+            <a:r>
+              <a:rPr lang="en-US" sz="4100" dirty="0" err="1">
+                <a:solidFill>
+                  <a:srgbClr val="000000"/>
+                </a:solidFill>
+                <a:latin typeface="Aptos"/>
+                <a:ea typeface="Aptos"/>
+                <a:cs typeface="Aptos"/>
+                <a:sym typeface="Aptos"/>
+              </a:rPr>
+              <a:t>pérdida</a:t>
+            </a:r>
+            <a:r>
+              <a:rPr lang="en-US" sz="4100" dirty="0">
+                <a:solidFill>
+                  <a:srgbClr val="000000"/>
+                </a:solidFill>
+                <a:latin typeface="Aptos"/>
+                <a:ea typeface="Aptos"/>
+                <a:cs typeface="Aptos"/>
+                <a:sym typeface="Aptos"/>
+              </a:rPr>
+              <a:t>.</a:t>
+            </a:r>
+          </a:p>
+          <a:p>
+            <a:pPr algn="ctr">
+              <a:lnSpc>
+                <a:spcPts val="4428"/>
+              </a:lnSpc>
+              <a:spcBef>
+                <a:spcPct val="0"/>
+              </a:spcBef>
+            </a:pPr>
+            <a:r>
+              <a:rPr lang="en-US" sz="4100" dirty="0" err="1">
+                <a:solidFill>
+                  <a:srgbClr val="000000"/>
+                </a:solidFill>
+                <a:latin typeface="Aptos"/>
+                <a:ea typeface="Aptos"/>
+                <a:cs typeface="Aptos"/>
+                <a:sym typeface="Aptos"/>
+              </a:rPr>
+              <a:t>Información</a:t>
+            </a:r>
+            <a:r>
+              <a:rPr lang="en-US" sz="4100" dirty="0">
+                <a:solidFill>
+                  <a:srgbClr val="000000"/>
+                </a:solidFill>
+                <a:latin typeface="Aptos"/>
+                <a:ea typeface="Aptos"/>
+                <a:cs typeface="Aptos"/>
+                <a:sym typeface="Aptos"/>
+              </a:rPr>
+              <a:t> </a:t>
+            </a:r>
+            <a:r>
+              <a:rPr lang="en-US" sz="4100" dirty="0" err="1">
+                <a:solidFill>
+                  <a:srgbClr val="000000"/>
+                </a:solidFill>
+                <a:latin typeface="Aptos"/>
+                <a:ea typeface="Aptos"/>
+                <a:cs typeface="Aptos"/>
+                <a:sym typeface="Aptos"/>
+              </a:rPr>
+              <a:t>matemática</a:t>
+            </a:r>
+            <a:r>
+              <a:rPr lang="en-US" sz="4100" dirty="0">
+                <a:solidFill>
+                  <a:srgbClr val="000000"/>
+                </a:solidFill>
+                <a:latin typeface="Aptos"/>
+                <a:ea typeface="Aptos"/>
+                <a:cs typeface="Aptos"/>
+                <a:sym typeface="Aptos"/>
+              </a:rPr>
+              <a:t> intacta, </a:t>
+            </a:r>
+            <a:r>
+              <a:rPr lang="en-US" sz="4100" dirty="0" err="1">
+                <a:solidFill>
+                  <a:srgbClr val="000000"/>
+                </a:solidFill>
+                <a:latin typeface="Aptos"/>
+                <a:ea typeface="Aptos"/>
+                <a:cs typeface="Aptos"/>
+                <a:sym typeface="Aptos"/>
+              </a:rPr>
+              <a:t>resultado</a:t>
+            </a:r>
+            <a:r>
+              <a:rPr lang="en-US" sz="4100" dirty="0">
+                <a:solidFill>
+                  <a:srgbClr val="000000"/>
+                </a:solidFill>
+                <a:latin typeface="Aptos"/>
+                <a:ea typeface="Aptos"/>
+                <a:cs typeface="Aptos"/>
+                <a:sym typeface="Aptos"/>
+              </a:rPr>
+              <a:t> </a:t>
+            </a:r>
+            <a:r>
+              <a:rPr lang="en-US" sz="4100" dirty="0" err="1">
+                <a:solidFill>
+                  <a:srgbClr val="000000"/>
+                </a:solidFill>
+                <a:latin typeface="Aptos"/>
+                <a:ea typeface="Aptos"/>
+                <a:cs typeface="Aptos"/>
+                <a:sym typeface="Aptos"/>
+              </a:rPr>
+              <a:t>en</a:t>
+            </a:r>
+            <a:r>
+              <a:rPr lang="en-US" sz="4100" dirty="0">
+                <a:solidFill>
+                  <a:srgbClr val="000000"/>
+                </a:solidFill>
+                <a:latin typeface="Aptos"/>
+                <a:ea typeface="Aptos"/>
+                <a:cs typeface="Aptos"/>
+                <a:sym typeface="Aptos"/>
+              </a:rPr>
+              <a:t> </a:t>
+            </a:r>
+            <a:r>
+              <a:rPr lang="en-US" sz="4100" dirty="0" err="1">
+                <a:solidFill>
+                  <a:srgbClr val="000000"/>
+                </a:solidFill>
+                <a:latin typeface="Aptos"/>
+                <a:ea typeface="Aptos"/>
+                <a:cs typeface="Aptos"/>
+                <a:sym typeface="Aptos"/>
+              </a:rPr>
+              <a:t>nitidez</a:t>
+            </a:r>
+            <a:r>
+              <a:rPr lang="en-US" sz="4100" dirty="0">
+                <a:solidFill>
+                  <a:srgbClr val="000000"/>
+                </a:solidFill>
+                <a:latin typeface="Aptos"/>
+                <a:ea typeface="Aptos"/>
+                <a:cs typeface="Aptos"/>
+                <a:sym typeface="Aptos"/>
+              </a:rPr>
+              <a:t> superior y k </a:t>
+            </a:r>
+            <a:r>
+              <a:rPr lang="en-US" sz="4100" dirty="0" err="1">
+                <a:solidFill>
+                  <a:srgbClr val="000000"/>
+                </a:solidFill>
+                <a:latin typeface="Aptos"/>
+                <a:ea typeface="Aptos"/>
+                <a:cs typeface="Aptos"/>
+                <a:sym typeface="Aptos"/>
+              </a:rPr>
+              <a:t>predecible</a:t>
+            </a:r>
+            <a:r>
+              <a:rPr lang="en-US" sz="4100" dirty="0">
+                <a:solidFill>
+                  <a:srgbClr val="000000"/>
+                </a:solidFill>
+                <a:latin typeface="Aptos"/>
+                <a:ea typeface="Aptos"/>
+                <a:cs typeface="Aptos"/>
+                <a:sym typeface="Aptos"/>
+              </a:rPr>
+              <a:t> (k ≈ 3.0).</a:t>
+            </a:r>
+          </a:p>
+        </p:txBody>
+      </p:sp>
+      <p:pic>
+        <p:nvPicPr>
+          <p:cNvPr id="15" name="Picture 14">
+            <a:extLst>
+              <a:ext uri="{FF2B5EF4-FFF2-40B4-BE49-F238E27FC236}">
+                <a16:creationId xmlns:a16="http://schemas.microsoft.com/office/drawing/2014/main" id="{CF512555-28ED-FAA9-8806-CB16887E8CEE}"/>
+              </a:ext>
+            </a:extLst>
+          </p:cNvPr>
+          <p:cNvPicPr>
+            <a:picLocks noChangeAspect="1"/>
+          </p:cNvPicPr>
+          <p:nvPr/>
+        </p:nvPicPr>
+        <p:blipFill>
+          <a:blip r:embed="rId3">
+            <a:extLst>
+              <a:ext uri="{28A0092B-C50C-407E-A947-70E740481C1C}">
+                <a14:useLocalDpi xmlns:a14="http://schemas.microsoft.com/office/drawing/2010/main" val="0"/>
+              </a:ext>
+            </a:extLst>
+          </a:blip>
+          <a:stretch>
+            <a:fillRect/>
+          </a:stretch>
+        </p:blipFill>
+        <p:spPr>
+          <a:xfrm>
+            <a:off x="12420599" y="6213816"/>
+            <a:ext cx="2115480" cy="2115480"/>
+          </a:xfrm>
+          <a:prstGeom prst="rect">
+            <a:avLst/>
+          </a:prstGeom>
+        </p:spPr>
+      </p:pic>
+      <p:pic>
+        <p:nvPicPr>
+          <p:cNvPr id="17" name="Picture 16">
+            <a:extLst>
+              <a:ext uri="{FF2B5EF4-FFF2-40B4-BE49-F238E27FC236}">
+                <a16:creationId xmlns:a16="http://schemas.microsoft.com/office/drawing/2014/main" id="{9EC7C67C-37F8-9092-68D2-F3DCC024AF73}"/>
+              </a:ext>
+            </a:extLst>
+          </p:cNvPr>
+          <p:cNvPicPr>
+            <a:picLocks noChangeAspect="1"/>
+          </p:cNvPicPr>
+          <p:nvPr/>
+        </p:nvPicPr>
+        <p:blipFill>
+          <a:blip r:embed="rId4">
+            <a:extLst>
+              <a:ext uri="{28A0092B-C50C-407E-A947-70E740481C1C}">
+                <a14:useLocalDpi xmlns:a14="http://schemas.microsoft.com/office/drawing/2010/main" val="0"/>
+              </a:ext>
+            </a:extLst>
+          </a:blip>
+          <a:stretch>
+            <a:fillRect/>
+          </a:stretch>
+        </p:blipFill>
+        <p:spPr>
+          <a:xfrm>
+            <a:off x="3980520" y="6213816"/>
+            <a:ext cx="2115480" cy="2115480"/>
+          </a:xfrm>
+          <a:prstGeom prst="rect">
+            <a:avLst/>
+          </a:prstGeom>
+        </p:spPr>
+      </p:pic>
+    </p:spTree>
+  </p:cSld>
+  <p:clrMapOvr>
+    <a:masterClrMapping/>
+  </p:clrMapOvr>
+</p:sld>
+</file>
+
+<file path=ppt/slides/slide11.xml><?xml version="1.0" encoding="utf-8"?>
+<p:sld xmlns:a="http://schemas.openxmlformats.org/drawingml/2006/main" xmlns:r="http://schemas.openxmlformats.org/officeDocument/2006/relationships" xmlns:p="http://schemas.openxmlformats.org/presentationml/2006/main">
+  <p:cSld>
+    <p:bg>
+      <p:bgPr>
+        <a:solidFill>
+          <a:srgbClr val="F3F0DF"/>
+        </a:solidFill>
+        <a:effectLst/>
+      </p:bgPr>
+    </p:bg>
+    <p:spTree>
+      <p:nvGrpSpPr>
+        <p:cNvPr id="1" name=""/>
+        <p:cNvGrpSpPr/>
+        <p:nvPr/>
+      </p:nvGrpSpPr>
+      <p:grpSpPr>
+        <a:xfrm>
+          <a:off x="0" y="0"/>
+          <a:ext cx="0" cy="0"/>
+          <a:chOff x="0" y="0"/>
+          <a:chExt cx="0" cy="0"/>
+        </a:xfrm>
+      </p:grpSpPr>
+      <p:grpSp>
+        <p:nvGrpSpPr>
+          <p:cNvPr id="2" name="Group 2"/>
+          <p:cNvGrpSpPr/>
+          <p:nvPr/>
+        </p:nvGrpSpPr>
+        <p:grpSpPr>
+          <a:xfrm>
+            <a:off x="1257300" y="547688"/>
+            <a:ext cx="15773400" cy="1988345"/>
+            <a:chOff x="0" y="0"/>
+            <a:chExt cx="21031200" cy="2651126"/>
+          </a:xfrm>
+        </p:grpSpPr>
+        <p:sp>
+          <p:nvSpPr>
+            <p:cNvPr id="3" name="Freeform 3"/>
+            <p:cNvSpPr/>
+            <p:nvPr/>
+          </p:nvSpPr>
+          <p:spPr>
+            <a:xfrm>
+              <a:off x="0" y="0"/>
+              <a:ext cx="21031200" cy="2651127"/>
+            </a:xfrm>
+            <a:custGeom>
+              <a:avLst/>
+              <a:gdLst/>
+              <a:ahLst/>
+              <a:cxnLst/>
+              <a:rect l="l" t="t" r="r" b="b"/>
+              <a:pathLst>
+                <a:path w="21031200" h="2651127">
+                  <a:moveTo>
+                    <a:pt x="0" y="0"/>
+                  </a:moveTo>
+                  <a:lnTo>
+                    <a:pt x="21031200" y="0"/>
+                  </a:lnTo>
+                  <a:lnTo>
+                    <a:pt x="21031200" y="2651127"/>
+                  </a:lnTo>
+                  <a:lnTo>
+                    <a:pt x="0" y="2651127"/>
+                  </a:lnTo>
+                  <a:close/>
+                </a:path>
+              </a:pathLst>
+            </a:custGeom>
+            <a:blipFill>
+              <a:blip r:embed="rId2">
+                <a:alphaModFix amt="0"/>
+              </a:blip>
+              <a:stretch>
+                <a:fillRect t="-104573" b="-104573"/>
+              </a:stretch>
+            </a:blipFill>
+          </p:spPr>
+          <p:txBody>
+            <a:bodyPr/>
+            <a:lstStyle/>
+            <a:p>
+              <a:endParaRPr lang="es-AR"/>
+            </a:p>
+          </p:txBody>
+        </p:sp>
+        <p:sp>
+          <p:nvSpPr>
+            <p:cNvPr id="4" name="TextBox 4"/>
+            <p:cNvSpPr txBox="1"/>
             <p:nvPr/>
           </p:nvSpPr>
           <p:spPr>
@@ -3420,7 +4502,7 @@
             </a:prstGeom>
           </p:spPr>
           <p:txBody>
-            <a:bodyPr anchor="ctr" rtlCol="false" tIns="0" lIns="0" bIns="0" rIns="0"/>
+            <a:bodyPr lIns="0" tIns="0" rIns="0" bIns="0" rtlCol="0" anchor="ctr"/>
             <a:lstStyle/>
             <a:p>
               <a:pPr algn="l">
@@ -3446,12 +4528,12 @@
       </p:grpSp>
       <p:sp>
         <p:nvSpPr>
-          <p:cNvPr name="TextBox 5" id="5"/>
-          <p:cNvSpPr txBox="true"/>
+          <p:cNvPr id="5" name="TextBox 5"/>
+          <p:cNvSpPr txBox="1"/>
           <p:nvPr/>
         </p:nvSpPr>
         <p:spPr>
-          <a:xfrm rot="0">
+          <a:xfrm>
             <a:off x="1348740" y="2631758"/>
             <a:ext cx="15590520" cy="1526324"/>
           </a:xfrm>
@@ -3460,7 +4542,7 @@
           </a:prstGeom>
         </p:spPr>
         <p:txBody>
-          <a:bodyPr anchor="t" rtlCol="false" tIns="0" lIns="0" bIns="0" rIns="0">
+          <a:bodyPr lIns="0" tIns="0" rIns="0" bIns="0" rtlCol="0" anchor="t">
             <a:spAutoFit/>
           </a:bodyPr>
           <a:lstStyle/>
@@ -3487,36 +4569,43 @@
       </p:sp>
       <p:sp>
         <p:nvSpPr>
-          <p:cNvPr name="AutoShape 6" id="6"/>
+          <p:cNvPr id="6" name="AutoShape 6"/>
           <p:cNvSpPr/>
           <p:nvPr/>
         </p:nvSpPr>
         <p:spPr>
-          <a:xfrm flipV="true">
+          <a:xfrm flipV="1">
             <a:off x="1257389" y="2421732"/>
             <a:ext cx="8115300" cy="19050"/>
           </a:xfrm>
           <a:prstGeom prst="line">
             <a:avLst/>
           </a:prstGeom>
-          <a:ln cap="flat" w="38100">
+          <a:ln w="38100" cap="flat">
             <a:solidFill>
               <a:srgbClr val="11CAA0"/>
             </a:solidFill>
             <a:prstDash val="solid"/>
-            <a:headEnd type="none" len="sm" w="sm"/>
-            <a:tailEnd type="none" len="sm" w="sm"/>
+            <a:headEnd type="none" w="sm" len="sm"/>
+            <a:tailEnd type="none" w="sm" len="sm"/>
           </a:ln>
         </p:spPr>
+        <p:txBody>
+          <a:bodyPr/>
+          <a:lstStyle/>
+          <a:p>
+            <a:endParaRPr lang="es-AR"/>
+          </a:p>
+        </p:txBody>
       </p:sp>
       <p:grpSp>
         <p:nvGrpSpPr>
-          <p:cNvPr name="Group 7" id="7"/>
+          <p:cNvPr id="7" name="Group 7"/>
           <p:cNvGrpSpPr/>
           <p:nvPr/>
         </p:nvGrpSpPr>
         <p:grpSpPr>
-          <a:xfrm rot="0">
+          <a:xfrm>
             <a:off x="1348740" y="4405732"/>
             <a:ext cx="7561921" cy="3898634"/>
             <a:chOff x="0" y="0"/>
@@ -3525,12 +4614,12 @@
         </p:grpSpPr>
         <p:sp>
           <p:nvSpPr>
-            <p:cNvPr name="Freeform 8" id="8"/>
+            <p:cNvPr id="8" name="Freeform 8"/>
             <p:cNvSpPr/>
             <p:nvPr/>
           </p:nvSpPr>
           <p:spPr>
-            <a:xfrm flipH="false" flipV="false" rot="0">
+            <a:xfrm>
               <a:off x="0" y="0"/>
               <a:ext cx="1991617" cy="1026801"/>
             </a:xfrm>
@@ -3539,9 +4628,9 @@
               <a:gdLst/>
               <a:ahLst/>
               <a:cxnLst/>
-              <a:rect r="r" b="b" t="t" l="l"/>
+              <a:rect l="l" t="t" r="r" b="b"/>
               <a:pathLst>
-                <a:path h="1026801" w="1991617">
+                <a:path w="1991617" h="1026801">
                   <a:moveTo>
                     <a:pt x="52214" y="0"/>
                   </a:moveTo>
@@ -3607,11 +4696,18 @@
               <a:round/>
             </a:ln>
           </p:spPr>
+          <p:txBody>
+            <a:bodyPr/>
+            <a:lstStyle/>
+            <a:p>
+              <a:endParaRPr lang="es-AR"/>
+            </a:p>
+          </p:txBody>
         </p:sp>
         <p:sp>
           <p:nvSpPr>
-            <p:cNvPr name="TextBox 9" id="9"/>
-            <p:cNvSpPr txBox="true"/>
+            <p:cNvPr id="9" name="TextBox 9"/>
+            <p:cNvSpPr txBox="1"/>
             <p:nvPr/>
           </p:nvSpPr>
           <p:spPr>
@@ -3624,7 +4720,7 @@
             </a:prstGeom>
           </p:spPr>
           <p:txBody>
-            <a:bodyPr anchor="ctr" rtlCol="false" tIns="50800" lIns="50800" bIns="50800" rIns="50800"/>
+            <a:bodyPr lIns="50800" tIns="50800" rIns="50800" bIns="50800" rtlCol="0" anchor="ctr"/>
             <a:lstStyle/>
             <a:p>
               <a:pPr algn="ctr">
@@ -3635,18 +4731,19 @@
                   <a:spcPct val="0"/>
                 </a:spcBef>
               </a:pPr>
+              <a:endParaRPr/>
             </a:p>
           </p:txBody>
         </p:sp>
       </p:grpSp>
       <p:grpSp>
         <p:nvGrpSpPr>
-          <p:cNvPr name="Group 10" id="10"/>
+          <p:cNvPr id="10" name="Group 10"/>
           <p:cNvGrpSpPr/>
           <p:nvPr/>
         </p:nvGrpSpPr>
         <p:grpSpPr>
-          <a:xfrm rot="0">
+          <a:xfrm>
             <a:off x="9697379" y="4405732"/>
             <a:ext cx="7561921" cy="3898634"/>
             <a:chOff x="0" y="0"/>
@@ -3655,12 +4752,12 @@
         </p:grpSpPr>
         <p:sp>
           <p:nvSpPr>
-            <p:cNvPr name="Freeform 11" id="11"/>
+            <p:cNvPr id="11" name="Freeform 11"/>
             <p:cNvSpPr/>
             <p:nvPr/>
           </p:nvSpPr>
           <p:spPr>
-            <a:xfrm flipH="false" flipV="false" rot="0">
+            <a:xfrm>
               <a:off x="0" y="0"/>
               <a:ext cx="1991617" cy="1026801"/>
             </a:xfrm>
@@ -3669,9 +4766,9 @@
               <a:gdLst/>
               <a:ahLst/>
               <a:cxnLst/>
-              <a:rect r="r" b="b" t="t" l="l"/>
+              <a:rect l="l" t="t" r="r" b="b"/>
               <a:pathLst>
-                <a:path h="1026801" w="1991617">
+                <a:path w="1991617" h="1026801">
                   <a:moveTo>
                     <a:pt x="52214" y="0"/>
                   </a:moveTo>
@@ -3737,11 +4834,18 @@
               <a:round/>
             </a:ln>
           </p:spPr>
+          <p:txBody>
+            <a:bodyPr/>
+            <a:lstStyle/>
+            <a:p>
+              <a:endParaRPr lang="es-AR"/>
+            </a:p>
+          </p:txBody>
         </p:sp>
         <p:sp>
           <p:nvSpPr>
-            <p:cNvPr name="TextBox 12" id="12"/>
-            <p:cNvSpPr txBox="true"/>
+            <p:cNvPr id="12" name="TextBox 12"/>
+            <p:cNvSpPr txBox="1"/>
             <p:nvPr/>
           </p:nvSpPr>
           <p:spPr>
@@ -3754,7 +4858,7 @@
             </a:prstGeom>
           </p:spPr>
           <p:txBody>
-            <a:bodyPr anchor="ctr" rtlCol="false" tIns="50800" lIns="50800" bIns="50800" rIns="50800"/>
+            <a:bodyPr lIns="50800" tIns="50800" rIns="50800" bIns="50800" rtlCol="0" anchor="ctr"/>
             <a:lstStyle/>
             <a:p>
               <a:pPr algn="ctr">
@@ -3765,18 +4869,19 @@
                   <a:spcPct val="0"/>
                 </a:spcBef>
               </a:pPr>
+              <a:endParaRPr/>
             </a:p>
           </p:txBody>
         </p:sp>
       </p:grpSp>
       <p:sp>
         <p:nvSpPr>
-          <p:cNvPr name="TextBox 13" id="13"/>
-          <p:cNvSpPr txBox="true"/>
+          <p:cNvPr id="13" name="TextBox 13"/>
+          <p:cNvSpPr txBox="1"/>
           <p:nvPr/>
         </p:nvSpPr>
         <p:spPr>
-          <a:xfrm rot="0">
+          <a:xfrm>
             <a:off x="1348740" y="4683792"/>
             <a:ext cx="7561921" cy="3294889"/>
           </a:xfrm>
@@ -3785,7 +4890,7 @@
           </a:prstGeom>
         </p:spPr>
         <p:txBody>
-          <a:bodyPr anchor="t" rtlCol="false" tIns="0" lIns="0" bIns="0" rIns="0">
+          <a:bodyPr lIns="0" tIns="0" rIns="0" bIns="0" rtlCol="0" anchor="t">
             <a:spAutoFit/>
           </a:bodyPr>
           <a:lstStyle/>
@@ -3799,7 +4904,7 @@
               </a:spcBef>
             </a:pPr>
             <a:r>
-              <a:rPr lang="en-US" b="true" sz="6100">
+              <a:rPr lang="en-US" sz="6100" b="1" dirty="0" err="1">
                 <a:solidFill>
                   <a:srgbClr val="005088"/>
                 </a:solidFill>
@@ -3810,6 +4915,15 @@
               </a:rPr>
               <a:t>Robustez</a:t>
             </a:r>
+            <a:endParaRPr lang="en-US" sz="6100" b="1" dirty="0">
+              <a:solidFill>
+                <a:srgbClr val="005088"/>
+              </a:solidFill>
+              <a:latin typeface="Aptos Bold"/>
+              <a:ea typeface="Aptos Bold"/>
+              <a:cs typeface="Aptos Bold"/>
+              <a:sym typeface="Aptos Bold"/>
+            </a:endParaRPr>
           </a:p>
           <a:p>
             <a:pPr algn="ctr">
@@ -3820,6 +4934,15 @@
                 <a:spcPct val="0"/>
               </a:spcBef>
             </a:pPr>
+            <a:endParaRPr lang="en-US" sz="6100" b="1" dirty="0">
+              <a:solidFill>
+                <a:srgbClr val="005088"/>
+              </a:solidFill>
+              <a:latin typeface="Aptos Bold"/>
+              <a:ea typeface="Aptos Bold"/>
+              <a:cs typeface="Aptos Bold"/>
+              <a:sym typeface="Aptos Bold"/>
+            </a:endParaRPr>
           </a:p>
           <a:p>
             <a:pPr algn="ctr">
@@ -3831,28 +4954,292 @@
               </a:spcBef>
             </a:pPr>
             <a:r>
-              <a:rPr lang="en-US" sz="3800">
-                <a:solidFill>
-                  <a:srgbClr val="000000"/>
-                </a:solidFill>
-                <a:latin typeface="Aptos"/>
-                <a:ea typeface="Aptos"/>
-                <a:cs typeface="Aptos"/>
-                <a:sym typeface="Aptos"/>
-              </a:rPr>
-              <a:t>La fase contiene la estructura esencial de la imagen, siendo más crítica que la magnitud para el reconocimiento.</a:t>
+              <a:rPr lang="en-US" sz="3800" dirty="0">
+                <a:solidFill>
+                  <a:srgbClr val="000000"/>
+                </a:solidFill>
+                <a:latin typeface="Aptos"/>
+                <a:ea typeface="Aptos"/>
+                <a:cs typeface="Aptos"/>
+                <a:sym typeface="Aptos"/>
+              </a:rPr>
+              <a:t>La </a:t>
+            </a:r>
+            <a:r>
+              <a:rPr lang="en-US" sz="3800" dirty="0" err="1">
+                <a:solidFill>
+                  <a:srgbClr val="000000"/>
+                </a:solidFill>
+                <a:latin typeface="Aptos"/>
+                <a:ea typeface="Aptos"/>
+                <a:cs typeface="Aptos"/>
+                <a:sym typeface="Aptos"/>
+              </a:rPr>
+              <a:t>fase</a:t>
+            </a:r>
+            <a:r>
+              <a:rPr lang="en-US" sz="3800" dirty="0">
+                <a:solidFill>
+                  <a:srgbClr val="000000"/>
+                </a:solidFill>
+                <a:latin typeface="Aptos"/>
+                <a:ea typeface="Aptos"/>
+                <a:cs typeface="Aptos"/>
+                <a:sym typeface="Aptos"/>
+              </a:rPr>
+              <a:t> </a:t>
+            </a:r>
+            <a:r>
+              <a:rPr lang="en-US" sz="3800" dirty="0" err="1">
+                <a:solidFill>
+                  <a:srgbClr val="000000"/>
+                </a:solidFill>
+                <a:latin typeface="Aptos"/>
+                <a:ea typeface="Aptos"/>
+                <a:cs typeface="Aptos"/>
+                <a:sym typeface="Aptos"/>
+              </a:rPr>
+              <a:t>contiene</a:t>
+            </a:r>
+            <a:r>
+              <a:rPr lang="en-US" sz="3800" dirty="0">
+                <a:solidFill>
+                  <a:srgbClr val="000000"/>
+                </a:solidFill>
+                <a:latin typeface="Aptos"/>
+                <a:ea typeface="Aptos"/>
+                <a:cs typeface="Aptos"/>
+                <a:sym typeface="Aptos"/>
+              </a:rPr>
+              <a:t> la </a:t>
+            </a:r>
+            <a:r>
+              <a:rPr lang="en-US" sz="3800" dirty="0" err="1">
+                <a:solidFill>
+                  <a:srgbClr val="000000"/>
+                </a:solidFill>
+                <a:latin typeface="Aptos"/>
+                <a:ea typeface="Aptos"/>
+                <a:cs typeface="Aptos"/>
+                <a:sym typeface="Aptos"/>
+              </a:rPr>
+              <a:t>estructura</a:t>
+            </a:r>
+            <a:r>
+              <a:rPr lang="en-US" sz="3800" dirty="0">
+                <a:solidFill>
+                  <a:srgbClr val="000000"/>
+                </a:solidFill>
+                <a:latin typeface="Aptos"/>
+                <a:ea typeface="Aptos"/>
+                <a:cs typeface="Aptos"/>
+                <a:sym typeface="Aptos"/>
+              </a:rPr>
+              <a:t> </a:t>
+            </a:r>
+            <a:r>
+              <a:rPr lang="en-US" sz="3800" dirty="0" err="1">
+                <a:solidFill>
+                  <a:srgbClr val="000000"/>
+                </a:solidFill>
+                <a:latin typeface="Aptos"/>
+                <a:ea typeface="Aptos"/>
+                <a:cs typeface="Aptos"/>
+                <a:sym typeface="Aptos"/>
+              </a:rPr>
+              <a:t>esencial</a:t>
+            </a:r>
+            <a:r>
+              <a:rPr lang="en-US" sz="3800" dirty="0">
+                <a:solidFill>
+                  <a:srgbClr val="000000"/>
+                </a:solidFill>
+                <a:latin typeface="Aptos"/>
+                <a:ea typeface="Aptos"/>
+                <a:cs typeface="Aptos"/>
+                <a:sym typeface="Aptos"/>
+              </a:rPr>
+              <a:t> de la imagen, </a:t>
+            </a:r>
+            <a:r>
+              <a:rPr lang="en-US" sz="3800" dirty="0" err="1">
+                <a:solidFill>
+                  <a:srgbClr val="000000"/>
+                </a:solidFill>
+                <a:latin typeface="Aptos"/>
+                <a:ea typeface="Aptos"/>
+                <a:cs typeface="Aptos"/>
+                <a:sym typeface="Aptos"/>
+              </a:rPr>
+              <a:t>siendo</a:t>
+            </a:r>
+            <a:r>
+              <a:rPr lang="en-US" sz="3800" dirty="0">
+                <a:solidFill>
+                  <a:srgbClr val="000000"/>
+                </a:solidFill>
+                <a:latin typeface="Aptos"/>
+                <a:ea typeface="Aptos"/>
+                <a:cs typeface="Aptos"/>
+                <a:sym typeface="Aptos"/>
+              </a:rPr>
+              <a:t> </a:t>
+            </a:r>
+            <a:r>
+              <a:rPr lang="en-US" sz="3800" dirty="0" err="1">
+                <a:solidFill>
+                  <a:srgbClr val="000000"/>
+                </a:solidFill>
+                <a:latin typeface="Aptos"/>
+                <a:ea typeface="Aptos"/>
+                <a:cs typeface="Aptos"/>
+                <a:sym typeface="Aptos"/>
+              </a:rPr>
+              <a:t>más</a:t>
+            </a:r>
+            <a:r>
+              <a:rPr lang="en-US" sz="3800" dirty="0">
+                <a:solidFill>
+                  <a:srgbClr val="000000"/>
+                </a:solidFill>
+                <a:latin typeface="Aptos"/>
+                <a:ea typeface="Aptos"/>
+                <a:cs typeface="Aptos"/>
+                <a:sym typeface="Aptos"/>
+              </a:rPr>
+              <a:t> </a:t>
+            </a:r>
+            <a:r>
+              <a:rPr lang="en-US" sz="3800" dirty="0" err="1">
+                <a:solidFill>
+                  <a:srgbClr val="000000"/>
+                </a:solidFill>
+                <a:latin typeface="Aptos"/>
+                <a:ea typeface="Aptos"/>
+                <a:cs typeface="Aptos"/>
+                <a:sym typeface="Aptos"/>
+              </a:rPr>
+              <a:t>crítica</a:t>
+            </a:r>
+            <a:r>
+              <a:rPr lang="en-US" sz="3800" dirty="0">
+                <a:solidFill>
+                  <a:srgbClr val="000000"/>
+                </a:solidFill>
+                <a:latin typeface="Aptos"/>
+                <a:ea typeface="Aptos"/>
+                <a:cs typeface="Aptos"/>
+                <a:sym typeface="Aptos"/>
+              </a:rPr>
+              <a:t> </a:t>
+            </a:r>
+            <a:r>
+              <a:rPr lang="en-US" sz="3800" dirty="0" err="1">
+                <a:solidFill>
+                  <a:srgbClr val="000000"/>
+                </a:solidFill>
+                <a:latin typeface="Aptos"/>
+                <a:ea typeface="Aptos"/>
+                <a:cs typeface="Aptos"/>
+                <a:sym typeface="Aptos"/>
+              </a:rPr>
+              <a:t>que</a:t>
+            </a:r>
+            <a:r>
+              <a:rPr lang="en-US" sz="3800" dirty="0">
+                <a:solidFill>
+                  <a:srgbClr val="000000"/>
+                </a:solidFill>
+                <a:latin typeface="Aptos"/>
+                <a:ea typeface="Aptos"/>
+                <a:cs typeface="Aptos"/>
+                <a:sym typeface="Aptos"/>
+              </a:rPr>
+              <a:t> la </a:t>
+            </a:r>
+            <a:r>
+              <a:rPr lang="en-US" sz="3800" dirty="0" err="1">
+                <a:solidFill>
+                  <a:srgbClr val="000000"/>
+                </a:solidFill>
+                <a:latin typeface="Aptos"/>
+                <a:ea typeface="Aptos"/>
+                <a:cs typeface="Aptos"/>
+                <a:sym typeface="Aptos"/>
+              </a:rPr>
+              <a:t>magnitud</a:t>
+            </a:r>
+            <a:r>
+              <a:rPr lang="en-US" sz="3800" dirty="0">
+                <a:solidFill>
+                  <a:srgbClr val="000000"/>
+                </a:solidFill>
+                <a:latin typeface="Aptos"/>
+                <a:ea typeface="Aptos"/>
+                <a:cs typeface="Aptos"/>
+                <a:sym typeface="Aptos"/>
+              </a:rPr>
+              <a:t> para </a:t>
+            </a:r>
+            <a:r>
+              <a:rPr lang="en-US" sz="3800" dirty="0" err="1">
+                <a:solidFill>
+                  <a:srgbClr val="000000"/>
+                </a:solidFill>
+                <a:latin typeface="Aptos"/>
+                <a:ea typeface="Aptos"/>
+                <a:cs typeface="Aptos"/>
+                <a:sym typeface="Aptos"/>
+              </a:rPr>
+              <a:t>el</a:t>
+            </a:r>
+            <a:r>
+              <a:rPr lang="en-US" sz="3800" dirty="0">
+                <a:solidFill>
+                  <a:srgbClr val="000000"/>
+                </a:solidFill>
+                <a:latin typeface="Aptos"/>
+                <a:ea typeface="Aptos"/>
+                <a:cs typeface="Aptos"/>
+                <a:sym typeface="Aptos"/>
+              </a:rPr>
+              <a:t> </a:t>
+            </a:r>
+            <a:r>
+              <a:rPr lang="en-US" sz="3800" dirty="0" err="1">
+                <a:solidFill>
+                  <a:srgbClr val="000000"/>
+                </a:solidFill>
+                <a:latin typeface="Aptos"/>
+                <a:ea typeface="Aptos"/>
+                <a:cs typeface="Aptos"/>
+                <a:sym typeface="Aptos"/>
+              </a:rPr>
+              <a:t>reconocimiento</a:t>
+            </a:r>
+            <a:r>
+              <a:rPr lang="en-US" sz="3800" dirty="0">
+                <a:solidFill>
+                  <a:srgbClr val="000000"/>
+                </a:solidFill>
+                <a:latin typeface="Aptos"/>
+                <a:ea typeface="Aptos"/>
+                <a:cs typeface="Aptos"/>
+                <a:sym typeface="Aptos"/>
+              </a:rPr>
+              <a:t>.</a:t>
             </a:r>
           </a:p>
         </p:txBody>
       </p:sp>
       <p:sp>
         <p:nvSpPr>
-          <p:cNvPr name="TextBox 14" id="14"/>
-          <p:cNvSpPr txBox="true"/>
+          <p:cNvPr id="14" name="TextBox 14"/>
+          <p:cNvSpPr txBox="1"/>
           <p:nvPr/>
         </p:nvSpPr>
         <p:spPr>
-          <a:xfrm rot="0">
+          <a:xfrm>
             <a:off x="9697379" y="4683792"/>
             <a:ext cx="7561921" cy="3294889"/>
           </a:xfrm>
@@ -3861,7 +5248,7 @@
           </a:prstGeom>
         </p:spPr>
         <p:txBody>
-          <a:bodyPr anchor="t" rtlCol="false" tIns="0" lIns="0" bIns="0" rIns="0">
+          <a:bodyPr lIns="0" tIns="0" rIns="0" bIns="0" rtlCol="0" anchor="t">
             <a:spAutoFit/>
           </a:bodyPr>
           <a:lstStyle/>
@@ -3872,7 +5259,7 @@
               </a:lnSpc>
             </a:pPr>
             <a:r>
-              <a:rPr lang="en-US" sz="6100" b="true">
+              <a:rPr lang="en-US" sz="6100" b="1">
                 <a:solidFill>
                   <a:srgbClr val="005088"/>
                 </a:solidFill>
@@ -3893,6 +5280,15 @@
                 <a:spcPct val="0"/>
               </a:spcBef>
             </a:pPr>
+            <a:endParaRPr lang="en-US" sz="6100" b="1">
+              <a:solidFill>
+                <a:srgbClr val="005088"/>
+              </a:solidFill>
+              <a:latin typeface="Aptos Bold"/>
+              <a:ea typeface="Aptos Bold"/>
+              <a:cs typeface="Aptos Bold"/>
+              <a:sym typeface="Aptos Bold"/>
+            </a:endParaRPr>
           </a:p>
           <a:p>
             <a:pPr algn="ctr">
@@ -3927,13 +5323,14 @@
 </file>
 
 <file path=ppt/slides/slide2.xml><?xml version="1.0" encoding="utf-8"?>
-<p:sld xmlns:p="http://schemas.openxmlformats.org/presentationml/2006/main" xmlns:a="http://schemas.openxmlformats.org/drawingml/2006/main" xmlns:r="http://schemas.openxmlformats.org/officeDocument/2006/relationships">
+<p:sld xmlns:a="http://schemas.openxmlformats.org/drawingml/2006/main" xmlns:r="http://schemas.openxmlformats.org/officeDocument/2006/relationships" xmlns:p="http://schemas.openxmlformats.org/presentationml/2006/main">
   <p:cSld>
     <p:bg>
       <p:bgPr>
         <a:solidFill>
           <a:srgbClr val="F3F0DF"/>
         </a:solidFill>
+        <a:effectLst/>
       </p:bgPr>
     </p:bg>
     <p:spTree>
@@ -3952,12 +5349,12 @@
       </p:grpSpPr>
       <p:grpSp>
         <p:nvGrpSpPr>
-          <p:cNvPr name="Group 2" id="2"/>
+          <p:cNvPr id="2" name="Group 2"/>
           <p:cNvGrpSpPr/>
           <p:nvPr/>
         </p:nvGrpSpPr>
         <p:grpSpPr>
-          <a:xfrm rot="0">
+          <a:xfrm>
             <a:off x="1485989" y="433388"/>
             <a:ext cx="15773400" cy="1988345"/>
             <a:chOff x="0" y="0"/>
@@ -3966,12 +5363,12 @@
         </p:grpSpPr>
         <p:sp>
           <p:nvSpPr>
-            <p:cNvPr name="Freeform 3" id="3"/>
+            <p:cNvPr id="3" name="Freeform 3"/>
             <p:cNvSpPr/>
             <p:nvPr/>
           </p:nvSpPr>
           <p:spPr>
-            <a:xfrm flipH="false" flipV="false" rot="0">
+            <a:xfrm>
               <a:off x="0" y="0"/>
               <a:ext cx="21031200" cy="2651127"/>
             </a:xfrm>
@@ -3980,9 +5377,9 @@
               <a:gdLst/>
               <a:ahLst/>
               <a:cxnLst/>
-              <a:rect r="r" b="b" t="t" l="l"/>
+              <a:rect l="l" t="t" r="r" b="b"/>
               <a:pathLst>
-                <a:path h="2651127" w="21031200">
+                <a:path w="21031200" h="2651127">
                   <a:moveTo>
                     <a:pt x="0" y="0"/>
                   </a:moveTo>
@@ -4004,15 +5401,22 @@
                 <a:alphaModFix amt="0"/>
               </a:blip>
               <a:stretch>
-                <a:fillRect l="0" t="-104573" r="0" b="-104573"/>
+                <a:fillRect t="-104573" b="-104573"/>
               </a:stretch>
             </a:blipFill>
           </p:spPr>
+          <p:txBody>
+            <a:bodyPr/>
+            <a:lstStyle/>
+            <a:p>
+              <a:endParaRPr lang="es-AR"/>
+            </a:p>
+          </p:txBody>
         </p:sp>
         <p:sp>
           <p:nvSpPr>
-            <p:cNvPr name="TextBox 4" id="4"/>
-            <p:cNvSpPr txBox="true"/>
+            <p:cNvPr id="4" name="TextBox 4"/>
+            <p:cNvSpPr txBox="1"/>
             <p:nvPr/>
           </p:nvSpPr>
           <p:spPr>
@@ -4025,7 +5429,7 @@
             </a:prstGeom>
           </p:spPr>
           <p:txBody>
-            <a:bodyPr anchor="ctr" rtlCol="false" tIns="0" lIns="0" bIns="0" rIns="0"/>
+            <a:bodyPr lIns="0" tIns="0" rIns="0" bIns="0" rtlCol="0" anchor="ctr"/>
             <a:lstStyle/>
             <a:p>
               <a:pPr algn="l">
@@ -4034,7 +5438,7 @@
                 </a:lnSpc>
               </a:pPr>
               <a:r>
-                <a:rPr lang="en-US" b="true" sz="6600">
+                <a:rPr lang="en-US" sz="6600" b="1">
                   <a:solidFill>
                     <a:srgbClr val="005088"/>
                   </a:solidFill>
@@ -4051,12 +5455,12 @@
       </p:grpSp>
       <p:sp>
         <p:nvSpPr>
-          <p:cNvPr name="TextBox 5" id="5"/>
-          <p:cNvSpPr txBox="true"/>
+          <p:cNvPr id="5" name="TextBox 5"/>
+          <p:cNvSpPr txBox="1"/>
           <p:nvPr/>
         </p:nvSpPr>
         <p:spPr>
-          <a:xfrm rot="0">
+          <a:xfrm>
             <a:off x="1348740" y="2546033"/>
             <a:ext cx="15590520" cy="6673691"/>
           </a:xfrm>
@@ -4065,12 +5469,12 @@
           </a:prstGeom>
         </p:spPr>
         <p:txBody>
-          <a:bodyPr anchor="t" rtlCol="false" tIns="0" lIns="0" bIns="0" rIns="0">
+          <a:bodyPr lIns="0" tIns="0" rIns="0" bIns="0" rtlCol="0" anchor="t">
             <a:spAutoFit/>
           </a:bodyPr>
           <a:lstStyle/>
           <a:p>
-            <a:pPr algn="l" marL="760095" indent="-380048" lvl="1">
+            <a:pPr marL="760095" lvl="1" indent="-380048" algn="l">
               <a:lnSpc>
                 <a:spcPts val="7560"/>
               </a:lnSpc>
@@ -4091,7 +5495,7 @@
             </a:r>
           </a:p>
           <a:p>
-            <a:pPr algn="l" marL="1337310" indent="-445770" lvl="2">
+            <a:pPr marL="1337310" lvl="2" indent="-445770" algn="l">
               <a:lnSpc>
                 <a:spcPts val="6480"/>
               </a:lnSpc>
@@ -4112,7 +5516,7 @@
             </a:r>
           </a:p>
           <a:p>
-            <a:pPr algn="l" marL="1337310" indent="-445770" lvl="2">
+            <a:pPr marL="1337310" lvl="2" indent="-445770" algn="l">
               <a:lnSpc>
                 <a:spcPts val="6480"/>
               </a:lnSpc>
@@ -4133,7 +5537,7 @@
             </a:r>
           </a:p>
           <a:p>
-            <a:pPr algn="l" marL="1914525" indent="-478631" lvl="3">
+            <a:pPr marL="1914525" lvl="3" indent="-478631" algn="l">
               <a:lnSpc>
                 <a:spcPts val="5400"/>
               </a:lnSpc>
@@ -4154,7 +5558,7 @@
             </a:r>
           </a:p>
           <a:p>
-            <a:pPr algn="l" marL="1914525" indent="-478631" lvl="3">
+            <a:pPr marL="1914525" lvl="3" indent="-478631" algn="l">
               <a:lnSpc>
                 <a:spcPts val="5400"/>
               </a:lnSpc>
@@ -4175,7 +5579,7 @@
             </a:r>
           </a:p>
           <a:p>
-            <a:pPr algn="l" marL="1914525" indent="-478631" lvl="3">
+            <a:pPr marL="1914525" lvl="3" indent="-478631" algn="l">
               <a:lnSpc>
                 <a:spcPts val="5400"/>
               </a:lnSpc>
@@ -4199,27 +5603,34 @@
       </p:sp>
       <p:sp>
         <p:nvSpPr>
-          <p:cNvPr name="AutoShape 6" id="6"/>
+          <p:cNvPr id="6" name="AutoShape 6"/>
           <p:cNvSpPr/>
           <p:nvPr/>
         </p:nvSpPr>
         <p:spPr>
-          <a:xfrm flipV="true">
+          <a:xfrm flipV="1">
             <a:off x="1257389" y="2421732"/>
             <a:ext cx="8115300" cy="19050"/>
           </a:xfrm>
           <a:prstGeom prst="line">
             <a:avLst/>
           </a:prstGeom>
-          <a:ln cap="flat" w="38100">
+          <a:ln w="38100" cap="flat">
             <a:solidFill>
               <a:srgbClr val="11CAA0"/>
             </a:solidFill>
             <a:prstDash val="solid"/>
-            <a:headEnd type="none" len="sm" w="sm"/>
-            <a:tailEnd type="none" len="sm" w="sm"/>
+            <a:headEnd type="none" w="sm" len="sm"/>
+            <a:tailEnd type="none" w="sm" len="sm"/>
           </a:ln>
         </p:spPr>
+        <p:txBody>
+          <a:bodyPr/>
+          <a:lstStyle/>
+          <a:p>
+            <a:endParaRPr lang="es-AR"/>
+          </a:p>
+        </p:txBody>
       </p:sp>
     </p:spTree>
   </p:cSld>
@@ -4230,13 +5641,14 @@
 </file>
 
 <file path=ppt/slides/slide3.xml><?xml version="1.0" encoding="utf-8"?>
-<p:sld xmlns:p="http://schemas.openxmlformats.org/presentationml/2006/main" xmlns:a="http://schemas.openxmlformats.org/drawingml/2006/main" xmlns:r="http://schemas.openxmlformats.org/officeDocument/2006/relationships">
+<p:sld xmlns:a="http://schemas.openxmlformats.org/drawingml/2006/main" xmlns:r="http://schemas.openxmlformats.org/officeDocument/2006/relationships" xmlns:p="http://schemas.openxmlformats.org/presentationml/2006/main">
   <p:cSld>
     <p:bg>
       <p:bgPr>
         <a:solidFill>
           <a:srgbClr val="F3F0DF"/>
         </a:solidFill>
+        <a:effectLst/>
       </p:bgPr>
     </p:bg>
     <p:spTree>
@@ -4255,12 +5667,12 @@
       </p:grpSpPr>
       <p:grpSp>
         <p:nvGrpSpPr>
-          <p:cNvPr name="Group 2" id="2"/>
+          <p:cNvPr id="2" name="Group 2"/>
           <p:cNvGrpSpPr/>
           <p:nvPr/>
         </p:nvGrpSpPr>
         <p:grpSpPr>
-          <a:xfrm rot="0">
+          <a:xfrm>
             <a:off x="1257300" y="547688"/>
             <a:ext cx="15773400" cy="1988345"/>
             <a:chOff x="0" y="0"/>
@@ -4269,12 +5681,12 @@
         </p:grpSpPr>
         <p:sp>
           <p:nvSpPr>
-            <p:cNvPr name="Freeform 3" id="3"/>
+            <p:cNvPr id="3" name="Freeform 3"/>
             <p:cNvSpPr/>
             <p:nvPr/>
           </p:nvSpPr>
           <p:spPr>
-            <a:xfrm flipH="false" flipV="false" rot="0">
+            <a:xfrm>
               <a:off x="0" y="0"/>
               <a:ext cx="21031200" cy="2651127"/>
             </a:xfrm>
@@ -4283,9 +5695,9 @@
               <a:gdLst/>
               <a:ahLst/>
               <a:cxnLst/>
-              <a:rect r="r" b="b" t="t" l="l"/>
+              <a:rect l="l" t="t" r="r" b="b"/>
               <a:pathLst>
-                <a:path h="2651127" w="21031200">
+                <a:path w="21031200" h="2651127">
                   <a:moveTo>
                     <a:pt x="0" y="0"/>
                   </a:moveTo>
@@ -4307,15 +5719,22 @@
                 <a:alphaModFix amt="0"/>
               </a:blip>
               <a:stretch>
-                <a:fillRect l="0" t="-104573" r="0" b="-104573"/>
+                <a:fillRect t="-104573" b="-104573"/>
               </a:stretch>
             </a:blipFill>
           </p:spPr>
+          <p:txBody>
+            <a:bodyPr/>
+            <a:lstStyle/>
+            <a:p>
+              <a:endParaRPr lang="es-AR"/>
+            </a:p>
+          </p:txBody>
         </p:sp>
         <p:sp>
           <p:nvSpPr>
-            <p:cNvPr name="TextBox 4" id="4"/>
-            <p:cNvSpPr txBox="true"/>
+            <p:cNvPr id="4" name="TextBox 4"/>
+            <p:cNvSpPr txBox="1"/>
             <p:nvPr/>
           </p:nvSpPr>
           <p:spPr>
@@ -4328,7 +5747,7 @@
             </a:prstGeom>
           </p:spPr>
           <p:txBody>
-            <a:bodyPr anchor="ctr" rtlCol="false" tIns="0" lIns="0" bIns="0" rIns="0"/>
+            <a:bodyPr lIns="0" tIns="0" rIns="0" bIns="0" rtlCol="0" anchor="ctr"/>
             <a:lstStyle/>
             <a:p>
               <a:pPr algn="l">
@@ -4337,7 +5756,7 @@
                 </a:lnSpc>
               </a:pPr>
               <a:r>
-                <a:rPr lang="en-US" b="true" sz="6600">
+                <a:rPr lang="en-US" sz="6600" b="1">
                   <a:solidFill>
                     <a:srgbClr val="005088"/>
                   </a:solidFill>
@@ -4354,12 +5773,12 @@
       </p:grpSp>
       <p:sp>
         <p:nvSpPr>
-          <p:cNvPr name="TextBox 5" id="5"/>
-          <p:cNvSpPr txBox="true"/>
+          <p:cNvPr id="5" name="TextBox 5"/>
+          <p:cNvSpPr txBox="1"/>
           <p:nvPr/>
         </p:nvSpPr>
         <p:spPr>
-          <a:xfrm rot="0">
+          <a:xfrm>
             <a:off x="1348740" y="2612708"/>
             <a:ext cx="15590520" cy="6607016"/>
           </a:xfrm>
@@ -4368,12 +5787,12 @@
           </a:prstGeom>
         </p:spPr>
         <p:txBody>
-          <a:bodyPr anchor="t" rtlCol="false" tIns="0" lIns="0" bIns="0" rIns="0">
+          <a:bodyPr lIns="0" tIns="0" rIns="0" bIns="0" rtlCol="0" anchor="t">
             <a:spAutoFit/>
           </a:bodyPr>
           <a:lstStyle/>
           <a:p>
-            <a:pPr algn="l" marL="760095" indent="-380048" lvl="1">
+            <a:pPr marL="760095" lvl="1" indent="-380048" algn="l">
               <a:lnSpc>
                 <a:spcPts val="6804"/>
               </a:lnSpc>
@@ -4394,7 +5813,7 @@
             </a:r>
           </a:p>
           <a:p>
-            <a:pPr algn="l" marL="1337310" indent="-445770" lvl="2">
+            <a:pPr marL="1337310" lvl="2" indent="-445770" algn="l">
               <a:lnSpc>
                 <a:spcPts val="5832"/>
               </a:lnSpc>
@@ -4415,7 +5834,7 @@
             </a:r>
           </a:p>
           <a:p>
-            <a:pPr algn="l" marL="1914525" indent="-478631" lvl="3">
+            <a:pPr marL="1914525" lvl="3" indent="-478631" algn="l">
               <a:lnSpc>
                 <a:spcPts val="4860"/>
               </a:lnSpc>
@@ -4436,7 +5855,7 @@
             </a:r>
           </a:p>
           <a:p>
-            <a:pPr algn="l" marL="1914525" indent="-478631" lvl="3">
+            <a:pPr marL="1914525" lvl="3" indent="-478631" algn="l">
               <a:lnSpc>
                 <a:spcPts val="4860"/>
               </a:lnSpc>
@@ -4457,7 +5876,7 @@
             </a:r>
           </a:p>
           <a:p>
-            <a:pPr algn="l" marL="1914525" indent="-478631" lvl="3">
+            <a:pPr marL="1914525" lvl="3" indent="-478631" algn="l">
               <a:lnSpc>
                 <a:spcPts val="4860"/>
               </a:lnSpc>
@@ -4478,14 +5897,23 @@
             </a:r>
           </a:p>
           <a:p>
-            <a:pPr algn="l" marL="2297430" indent="-574358" lvl="3">
+            <a:pPr marL="2297430" lvl="3" indent="-574358" algn="l">
               <a:lnSpc>
                 <a:spcPts val="5832"/>
               </a:lnSpc>
             </a:pPr>
-          </a:p>
-          <a:p>
-            <a:pPr algn="l" marL="1337310" indent="-445770" lvl="2">
+            <a:endParaRPr lang="en-US" sz="3000">
+              <a:solidFill>
+                <a:srgbClr val="000000"/>
+              </a:solidFill>
+              <a:latin typeface="Aptos"/>
+              <a:ea typeface="Aptos"/>
+              <a:cs typeface="Aptos"/>
+              <a:sym typeface="Aptos"/>
+            </a:endParaRPr>
+          </a:p>
+          <a:p>
+            <a:pPr marL="1337310" lvl="2" indent="-445770" algn="l">
               <a:lnSpc>
                 <a:spcPts val="5832"/>
               </a:lnSpc>
@@ -4509,27 +5937,34 @@
       </p:sp>
       <p:sp>
         <p:nvSpPr>
-          <p:cNvPr name="AutoShape 6" id="6"/>
+          <p:cNvPr id="6" name="AutoShape 6"/>
           <p:cNvSpPr/>
           <p:nvPr/>
         </p:nvSpPr>
         <p:spPr>
-          <a:xfrm flipV="true">
+          <a:xfrm flipV="1">
             <a:off x="1257389" y="2421732"/>
             <a:ext cx="8115300" cy="19050"/>
           </a:xfrm>
           <a:prstGeom prst="line">
             <a:avLst/>
           </a:prstGeom>
-          <a:ln cap="flat" w="38100">
+          <a:ln w="38100" cap="flat">
             <a:solidFill>
               <a:srgbClr val="11CAA0"/>
             </a:solidFill>
             <a:prstDash val="solid"/>
-            <a:headEnd type="none" len="sm" w="sm"/>
-            <a:tailEnd type="none" len="sm" w="sm"/>
+            <a:headEnd type="none" w="sm" len="sm"/>
+            <a:tailEnd type="none" w="sm" len="sm"/>
           </a:ln>
         </p:spPr>
+        <p:txBody>
+          <a:bodyPr/>
+          <a:lstStyle/>
+          <a:p>
+            <a:endParaRPr lang="es-AR"/>
+          </a:p>
+        </p:txBody>
       </p:sp>
     </p:spTree>
   </p:cSld>
@@ -4540,13 +5975,14 @@
 </file>
 
 <file path=ppt/slides/slide4.xml><?xml version="1.0" encoding="utf-8"?>
-<p:sld xmlns:p="http://schemas.openxmlformats.org/presentationml/2006/main" xmlns:a="http://schemas.openxmlformats.org/drawingml/2006/main" xmlns:r="http://schemas.openxmlformats.org/officeDocument/2006/relationships">
+<p:sld xmlns:a="http://schemas.openxmlformats.org/drawingml/2006/main" xmlns:r="http://schemas.openxmlformats.org/officeDocument/2006/relationships" xmlns:p="http://schemas.openxmlformats.org/presentationml/2006/main">
   <p:cSld>
     <p:bg>
       <p:bgPr>
         <a:solidFill>
           <a:srgbClr val="F3F0DF"/>
         </a:solidFill>
+        <a:effectLst/>
       </p:bgPr>
     </p:bg>
     <p:spTree>
@@ -4565,12 +6001,12 @@
       </p:grpSpPr>
       <p:grpSp>
         <p:nvGrpSpPr>
-          <p:cNvPr name="Group 2" id="2"/>
+          <p:cNvPr id="2" name="Group 2"/>
           <p:cNvGrpSpPr/>
           <p:nvPr/>
         </p:nvGrpSpPr>
         <p:grpSpPr>
-          <a:xfrm rot="0">
+          <a:xfrm>
             <a:off x="1257300" y="547688"/>
             <a:ext cx="15773400" cy="1988345"/>
             <a:chOff x="0" y="0"/>
@@ -4579,12 +6015,12 @@
         </p:grpSpPr>
         <p:sp>
           <p:nvSpPr>
-            <p:cNvPr name="Freeform 3" id="3"/>
+            <p:cNvPr id="3" name="Freeform 3"/>
             <p:cNvSpPr/>
             <p:nvPr/>
           </p:nvSpPr>
           <p:spPr>
-            <a:xfrm flipH="false" flipV="false" rot="0">
+            <a:xfrm>
               <a:off x="0" y="0"/>
               <a:ext cx="21031200" cy="2651127"/>
             </a:xfrm>
@@ -4593,9 +6029,9 @@
               <a:gdLst/>
               <a:ahLst/>
               <a:cxnLst/>
-              <a:rect r="r" b="b" t="t" l="l"/>
+              <a:rect l="l" t="t" r="r" b="b"/>
               <a:pathLst>
-                <a:path h="2651127" w="21031200">
+                <a:path w="21031200" h="2651127">
                   <a:moveTo>
                     <a:pt x="0" y="0"/>
                   </a:moveTo>
@@ -4617,15 +6053,22 @@
                 <a:alphaModFix amt="0"/>
               </a:blip>
               <a:stretch>
-                <a:fillRect l="0" t="-104573" r="0" b="-104573"/>
+                <a:fillRect t="-104573" b="-104573"/>
               </a:stretch>
             </a:blipFill>
           </p:spPr>
+          <p:txBody>
+            <a:bodyPr/>
+            <a:lstStyle/>
+            <a:p>
+              <a:endParaRPr lang="es-AR"/>
+            </a:p>
+          </p:txBody>
         </p:sp>
         <p:sp>
           <p:nvSpPr>
-            <p:cNvPr name="TextBox 4" id="4"/>
-            <p:cNvSpPr txBox="true"/>
+            <p:cNvPr id="4" name="TextBox 4"/>
+            <p:cNvSpPr txBox="1"/>
             <p:nvPr/>
           </p:nvSpPr>
           <p:spPr>
@@ -4638,7 +6081,7 @@
             </a:prstGeom>
           </p:spPr>
           <p:txBody>
-            <a:bodyPr anchor="ctr" rtlCol="false" tIns="0" lIns="0" bIns="0" rIns="0"/>
+            <a:bodyPr lIns="0" tIns="0" rIns="0" bIns="0" rtlCol="0" anchor="ctr"/>
             <a:lstStyle/>
             <a:p>
               <a:pPr algn="l">
@@ -4647,7 +6090,7 @@
                 </a:lnSpc>
               </a:pPr>
               <a:r>
-                <a:rPr lang="en-US" b="true" sz="6600">
+                <a:rPr lang="en-US" sz="6600" b="1">
                   <a:solidFill>
                     <a:srgbClr val="005088"/>
                   </a:solidFill>
@@ -4664,12 +6107,12 @@
       </p:grpSp>
       <p:sp>
         <p:nvSpPr>
-          <p:cNvPr name="TextBox 5" id="5"/>
-          <p:cNvSpPr txBox="true"/>
+          <p:cNvPr id="5" name="TextBox 5"/>
+          <p:cNvSpPr txBox="1"/>
           <p:nvPr/>
         </p:nvSpPr>
         <p:spPr>
-          <a:xfrm rot="0">
+          <a:xfrm>
             <a:off x="1348740" y="2932662"/>
             <a:ext cx="15590520" cy="6585585"/>
           </a:xfrm>
@@ -4678,7 +6121,7 @@
           </a:prstGeom>
         </p:spPr>
         <p:txBody>
-          <a:bodyPr anchor="t" rtlCol="false" tIns="0" lIns="0" bIns="0" rIns="0">
+          <a:bodyPr lIns="0" tIns="0" rIns="0" bIns="0" rtlCol="0" anchor="t">
             <a:spAutoFit/>
           </a:bodyPr>
           <a:lstStyle/>
@@ -4707,6 +6150,15 @@
                 <a:spcPts val="7560"/>
               </a:lnSpc>
             </a:pPr>
+            <a:endParaRPr lang="en-US" sz="4200">
+              <a:solidFill>
+                <a:srgbClr val="000000"/>
+              </a:solidFill>
+              <a:latin typeface="Aptos"/>
+              <a:ea typeface="Aptos"/>
+              <a:cs typeface="Aptos"/>
+              <a:sym typeface="Aptos"/>
+            </a:endParaRPr>
           </a:p>
           <a:p>
             <a:pPr algn="ctr">
@@ -4733,6 +6185,15 @@
                 <a:spcPts val="7560"/>
               </a:lnSpc>
             </a:pPr>
+            <a:endParaRPr lang="en-US" sz="4200">
+              <a:solidFill>
+                <a:srgbClr val="000000"/>
+              </a:solidFill>
+              <a:latin typeface="Aptos"/>
+              <a:ea typeface="Aptos"/>
+              <a:cs typeface="Aptos"/>
+              <a:sym typeface="Aptos"/>
+            </a:endParaRPr>
           </a:p>
           <a:p>
             <a:pPr algn="l">
@@ -4753,7 +6214,7 @@
               <a:t>Al trasladar, solo cambia la </a:t>
             </a:r>
             <a:r>
-              <a:rPr lang="en-US" sz="4200" b="true">
+              <a:rPr lang="en-US" sz="4200" b="1">
                 <a:solidFill>
                   <a:srgbClr val="000000"/>
                 </a:solidFill>
@@ -4777,7 +6238,7 @@
               <a:t> (φ), mientras que la </a:t>
             </a:r>
             <a:r>
-              <a:rPr lang="en-US" sz="4200" b="true">
+              <a:rPr lang="en-US" sz="4200" b="1">
                 <a:solidFill>
                   <a:srgbClr val="000000"/>
                 </a:solidFill>
@@ -4805,36 +6266,43 @@
       </p:sp>
       <p:sp>
         <p:nvSpPr>
-          <p:cNvPr name="AutoShape 6" id="6"/>
+          <p:cNvPr id="6" name="AutoShape 6"/>
           <p:cNvSpPr/>
           <p:nvPr/>
         </p:nvSpPr>
         <p:spPr>
-          <a:xfrm flipV="true">
+          <a:xfrm flipV="1">
             <a:off x="1257389" y="2421732"/>
             <a:ext cx="8115300" cy="19050"/>
           </a:xfrm>
           <a:prstGeom prst="line">
             <a:avLst/>
           </a:prstGeom>
-          <a:ln cap="flat" w="38100">
+          <a:ln w="38100" cap="flat">
             <a:solidFill>
               <a:srgbClr val="11CAA0"/>
             </a:solidFill>
             <a:prstDash val="solid"/>
-            <a:headEnd type="none" len="sm" w="sm"/>
-            <a:tailEnd type="none" len="sm" w="sm"/>
+            <a:headEnd type="none" w="sm" len="sm"/>
+            <a:tailEnd type="none" w="sm" len="sm"/>
           </a:ln>
         </p:spPr>
+        <p:txBody>
+          <a:bodyPr/>
+          <a:lstStyle/>
+          <a:p>
+            <a:endParaRPr lang="es-AR"/>
+          </a:p>
+        </p:txBody>
       </p:sp>
       <p:sp>
         <p:nvSpPr>
-          <p:cNvPr name="TextBox 7" id="7"/>
-          <p:cNvSpPr txBox="true"/>
+          <p:cNvPr id="7" name="TextBox 7"/>
+          <p:cNvSpPr txBox="1"/>
           <p:nvPr/>
         </p:nvSpPr>
         <p:spPr>
-          <a:xfrm rot="0">
+          <a:xfrm>
             <a:off x="10721516" y="5916271"/>
             <a:ext cx="548283" cy="428245"/>
           </a:xfrm>
@@ -4843,7 +6311,7 @@
           </a:prstGeom>
         </p:spPr>
         <p:txBody>
-          <a:bodyPr anchor="t" rtlCol="false" tIns="0" lIns="0" bIns="0" rIns="0">
+          <a:bodyPr lIns="0" tIns="0" rIns="0" bIns="0" rtlCol="0" anchor="t">
             <a:spAutoFit/>
           </a:bodyPr>
           <a:lstStyle/>
@@ -4873,12 +6341,12 @@
       </p:sp>
       <p:grpSp>
         <p:nvGrpSpPr>
-          <p:cNvPr name="Group 8" id="8"/>
+          <p:cNvPr id="8" name="Group 8"/>
           <p:cNvGrpSpPr/>
           <p:nvPr/>
         </p:nvGrpSpPr>
         <p:grpSpPr>
-          <a:xfrm rot="0">
+          <a:xfrm>
             <a:off x="5363039" y="5374227"/>
             <a:ext cx="7561921" cy="1474234"/>
             <a:chOff x="0" y="0"/>
@@ -4887,12 +6355,12 @@
         </p:grpSpPr>
         <p:sp>
           <p:nvSpPr>
-            <p:cNvPr name="Freeform 9" id="9"/>
+            <p:cNvPr id="9" name="Freeform 9"/>
             <p:cNvSpPr/>
             <p:nvPr/>
           </p:nvSpPr>
           <p:spPr>
-            <a:xfrm flipH="false" flipV="false" rot="0">
+            <a:xfrm>
               <a:off x="0" y="0"/>
               <a:ext cx="1991617" cy="388276"/>
             </a:xfrm>
@@ -4901,9 +6369,9 @@
               <a:gdLst/>
               <a:ahLst/>
               <a:cxnLst/>
-              <a:rect r="r" b="b" t="t" l="l"/>
+              <a:rect l="l" t="t" r="r" b="b"/>
               <a:pathLst>
-                <a:path h="388276" w="1991617">
+                <a:path w="1991617" h="388276">
                   <a:moveTo>
                     <a:pt x="52214" y="0"/>
                   </a:moveTo>
@@ -4969,11 +6437,18 @@
               <a:round/>
             </a:ln>
           </p:spPr>
+          <p:txBody>
+            <a:bodyPr/>
+            <a:lstStyle/>
+            <a:p>
+              <a:endParaRPr lang="es-AR"/>
+            </a:p>
+          </p:txBody>
         </p:sp>
         <p:sp>
           <p:nvSpPr>
-            <p:cNvPr name="TextBox 10" id="10"/>
-            <p:cNvSpPr txBox="true"/>
+            <p:cNvPr id="10" name="TextBox 10"/>
+            <p:cNvSpPr txBox="1"/>
             <p:nvPr/>
           </p:nvSpPr>
           <p:spPr>
@@ -4986,7 +6461,7 @@
             </a:prstGeom>
           </p:spPr>
           <p:txBody>
-            <a:bodyPr anchor="ctr" rtlCol="false" tIns="50800" lIns="50800" bIns="50800" rIns="50800"/>
+            <a:bodyPr lIns="50800" tIns="50800" rIns="50800" bIns="50800" rtlCol="0" anchor="ctr"/>
             <a:lstStyle/>
             <a:p>
               <a:pPr algn="ctr">
@@ -4997,18 +6472,19 @@
                   <a:spcPct val="0"/>
                 </a:spcBef>
               </a:pPr>
+              <a:endParaRPr/>
             </a:p>
           </p:txBody>
         </p:sp>
       </p:grpSp>
       <p:sp>
         <p:nvSpPr>
-          <p:cNvPr name="TextBox 11" id="11"/>
-          <p:cNvSpPr txBox="true"/>
+          <p:cNvPr id="11" name="TextBox 11"/>
+          <p:cNvSpPr txBox="1"/>
           <p:nvPr/>
         </p:nvSpPr>
         <p:spPr>
-          <a:xfrm rot="0">
+          <a:xfrm>
             <a:off x="5363039" y="5684815"/>
             <a:ext cx="7561921" cy="866013"/>
           </a:xfrm>
@@ -5017,7 +6493,7 @@
           </a:prstGeom>
         </p:spPr>
         <p:txBody>
-          <a:bodyPr anchor="t" rtlCol="false" tIns="0" lIns="0" bIns="0" rIns="0">
+          <a:bodyPr lIns="0" tIns="0" rIns="0" bIns="0" rtlCol="0" anchor="t">
             <a:spAutoFit/>
           </a:bodyPr>
           <a:lstStyle/>
@@ -5054,13 +6530,14 @@
 </file>
 
 <file path=ppt/slides/slide5.xml><?xml version="1.0" encoding="utf-8"?>
-<p:sld xmlns:p="http://schemas.openxmlformats.org/presentationml/2006/main" xmlns:a="http://schemas.openxmlformats.org/drawingml/2006/main" xmlns:r="http://schemas.openxmlformats.org/officeDocument/2006/relationships">
+<p:sld xmlns:a="http://schemas.openxmlformats.org/drawingml/2006/main" xmlns:r="http://schemas.openxmlformats.org/officeDocument/2006/relationships" xmlns:p="http://schemas.openxmlformats.org/presentationml/2006/main">
   <p:cSld>
     <p:bg>
       <p:bgPr>
         <a:solidFill>
           <a:srgbClr val="F3F0DF"/>
         </a:solidFill>
+        <a:effectLst/>
       </p:bgPr>
     </p:bg>
     <p:spTree>
@@ -5079,12 +6556,12 @@
       </p:grpSpPr>
       <p:grpSp>
         <p:nvGrpSpPr>
-          <p:cNvPr name="Group 2" id="2"/>
+          <p:cNvPr id="2" name="Group 2"/>
           <p:cNvGrpSpPr/>
           <p:nvPr/>
         </p:nvGrpSpPr>
         <p:grpSpPr>
-          <a:xfrm rot="0">
+          <a:xfrm>
             <a:off x="1257300" y="547688"/>
             <a:ext cx="15773400" cy="1988345"/>
             <a:chOff x="0" y="0"/>
@@ -5093,12 +6570,12 @@
         </p:grpSpPr>
         <p:sp>
           <p:nvSpPr>
-            <p:cNvPr name="Freeform 3" id="3"/>
+            <p:cNvPr id="3" name="Freeform 3"/>
             <p:cNvSpPr/>
             <p:nvPr/>
           </p:nvSpPr>
           <p:spPr>
-            <a:xfrm flipH="false" flipV="false" rot="0">
+            <a:xfrm>
               <a:off x="0" y="0"/>
               <a:ext cx="21031200" cy="2651127"/>
             </a:xfrm>
@@ -5107,9 +6584,9 @@
               <a:gdLst/>
               <a:ahLst/>
               <a:cxnLst/>
-              <a:rect r="r" b="b" t="t" l="l"/>
+              <a:rect l="l" t="t" r="r" b="b"/>
               <a:pathLst>
-                <a:path h="2651127" w="21031200">
+                <a:path w="21031200" h="2651127">
                   <a:moveTo>
                     <a:pt x="0" y="0"/>
                   </a:moveTo>
@@ -5131,15 +6608,22 @@
                 <a:alphaModFix amt="0"/>
               </a:blip>
               <a:stretch>
-                <a:fillRect l="0" t="-104573" r="0" b="-104573"/>
+                <a:fillRect t="-104573" b="-104573"/>
               </a:stretch>
             </a:blipFill>
           </p:spPr>
+          <p:txBody>
+            <a:bodyPr/>
+            <a:lstStyle/>
+            <a:p>
+              <a:endParaRPr lang="es-AR"/>
+            </a:p>
+          </p:txBody>
         </p:sp>
         <p:sp>
           <p:nvSpPr>
-            <p:cNvPr name="TextBox 4" id="4"/>
-            <p:cNvSpPr txBox="true"/>
+            <p:cNvPr id="4" name="TextBox 4"/>
+            <p:cNvSpPr txBox="1"/>
             <p:nvPr/>
           </p:nvSpPr>
           <p:spPr>
@@ -5152,7 +6636,7 @@
             </a:prstGeom>
           </p:spPr>
           <p:txBody>
-            <a:bodyPr anchor="ctr" rtlCol="false" tIns="0" lIns="0" bIns="0" rIns="0"/>
+            <a:bodyPr lIns="0" tIns="0" rIns="0" bIns="0" rtlCol="0" anchor="ctr"/>
             <a:lstStyle/>
             <a:p>
               <a:pPr algn="l">
@@ -5161,7 +6645,7 @@
                 </a:lnSpc>
               </a:pPr>
               <a:r>
-                <a:rPr lang="en-US" b="true" sz="6600">
+                <a:rPr lang="en-US" sz="6600" b="1">
                   <a:solidFill>
                     <a:srgbClr val="005088"/>
                   </a:solidFill>
@@ -5178,12 +6662,12 @@
       </p:grpSp>
       <p:sp>
         <p:nvSpPr>
-          <p:cNvPr name="TextBox 5" id="5"/>
-          <p:cNvSpPr txBox="true"/>
+          <p:cNvPr id="5" name="TextBox 5"/>
+          <p:cNvSpPr txBox="1"/>
           <p:nvPr/>
         </p:nvSpPr>
         <p:spPr>
-          <a:xfrm rot="0">
+          <a:xfrm>
             <a:off x="1348740" y="3014291"/>
             <a:ext cx="15590520" cy="6435566"/>
           </a:xfrm>
@@ -5192,12 +6676,12 @@
           </a:prstGeom>
         </p:spPr>
         <p:txBody>
-          <a:bodyPr anchor="t" rtlCol="false" tIns="0" lIns="0" bIns="0" rIns="0">
+          <a:bodyPr lIns="0" tIns="0" rIns="0" bIns="0" rtlCol="0" anchor="t">
             <a:spAutoFit/>
           </a:bodyPr>
           <a:lstStyle/>
           <a:p>
-            <a:pPr algn="l" marL="760095" indent="-380048" lvl="1">
+            <a:pPr marL="760095" lvl="1" indent="-380048" algn="l">
               <a:lnSpc>
                 <a:spcPts val="5040"/>
               </a:lnSpc>
@@ -5218,7 +6702,7 @@
             </a:r>
           </a:p>
           <a:p>
-            <a:pPr algn="l" marL="760095" indent="-380048" lvl="1">
+            <a:pPr marL="760095" lvl="1" indent="-380048" algn="l">
               <a:lnSpc>
                 <a:spcPts val="5040"/>
               </a:lnSpc>
@@ -5239,7 +6723,7 @@
             </a:r>
           </a:p>
           <a:p>
-            <a:pPr algn="l" marL="760095" indent="-380048" lvl="1">
+            <a:pPr marL="760095" lvl="1" indent="-380048" algn="l">
               <a:lnSpc>
                 <a:spcPts val="5040"/>
               </a:lnSpc>
@@ -5260,7 +6744,7 @@
             </a:r>
           </a:p>
           <a:p>
-            <a:pPr algn="l" marL="760095" indent="-380048" lvl="1">
+            <a:pPr marL="760095" lvl="1" indent="-380048" algn="l">
               <a:lnSpc>
                 <a:spcPts val="5040"/>
               </a:lnSpc>
@@ -5281,7 +6765,7 @@
             </a:r>
           </a:p>
           <a:p>
-            <a:pPr algn="l" marL="760095" indent="-380048" lvl="1">
+            <a:pPr marL="760095" lvl="1" indent="-380048" algn="l">
               <a:lnSpc>
                 <a:spcPts val="5040"/>
               </a:lnSpc>
@@ -5305,27 +6789,34 @@
       </p:sp>
       <p:sp>
         <p:nvSpPr>
-          <p:cNvPr name="AutoShape 6" id="6"/>
+          <p:cNvPr id="6" name="AutoShape 6"/>
           <p:cNvSpPr/>
           <p:nvPr/>
         </p:nvSpPr>
         <p:spPr>
-          <a:xfrm flipV="true">
+          <a:xfrm flipV="1">
             <a:off x="1257389" y="2421732"/>
             <a:ext cx="8115300" cy="19050"/>
           </a:xfrm>
           <a:prstGeom prst="line">
             <a:avLst/>
           </a:prstGeom>
-          <a:ln cap="flat" w="38100">
+          <a:ln w="38100" cap="flat">
             <a:solidFill>
               <a:srgbClr val="11CAA0"/>
             </a:solidFill>
             <a:prstDash val="solid"/>
-            <a:headEnd type="none" len="sm" w="sm"/>
-            <a:tailEnd type="none" len="sm" w="sm"/>
+            <a:headEnd type="none" w="sm" len="sm"/>
+            <a:tailEnd type="none" w="sm" len="sm"/>
           </a:ln>
         </p:spPr>
+        <p:txBody>
+          <a:bodyPr/>
+          <a:lstStyle/>
+          <a:p>
+            <a:endParaRPr lang="es-AR"/>
+          </a:p>
+        </p:txBody>
       </p:sp>
     </p:spTree>
   </p:cSld>
@@ -5336,13 +6827,14 @@
 </file>
 
 <file path=ppt/slides/slide6.xml><?xml version="1.0" encoding="utf-8"?>
-<p:sld xmlns:p="http://schemas.openxmlformats.org/presentationml/2006/main" xmlns:a="http://schemas.openxmlformats.org/drawingml/2006/main" xmlns:r="http://schemas.openxmlformats.org/officeDocument/2006/relationships">
+<p:sld xmlns:a="http://schemas.openxmlformats.org/drawingml/2006/main" xmlns:r="http://schemas.openxmlformats.org/officeDocument/2006/relationships" xmlns:p="http://schemas.openxmlformats.org/presentationml/2006/main">
   <p:cSld>
     <p:bg>
       <p:bgPr>
         <a:solidFill>
           <a:srgbClr val="F3F0DF"/>
         </a:solidFill>
+        <a:effectLst/>
       </p:bgPr>
     </p:bg>
     <p:spTree>
@@ -5361,12 +6853,12 @@
       </p:grpSpPr>
       <p:grpSp>
         <p:nvGrpSpPr>
-          <p:cNvPr name="Group 2" id="2"/>
+          <p:cNvPr id="2" name="Group 2"/>
           <p:cNvGrpSpPr/>
           <p:nvPr/>
         </p:nvGrpSpPr>
         <p:grpSpPr>
-          <a:xfrm rot="0">
+          <a:xfrm>
             <a:off x="1257300" y="547688"/>
             <a:ext cx="15773400" cy="1988345"/>
             <a:chOff x="0" y="0"/>
@@ -5375,12 +6867,12 @@
         </p:grpSpPr>
         <p:sp>
           <p:nvSpPr>
-            <p:cNvPr name="Freeform 3" id="3"/>
+            <p:cNvPr id="3" name="Freeform 3"/>
             <p:cNvSpPr/>
             <p:nvPr/>
           </p:nvSpPr>
           <p:spPr>
-            <a:xfrm flipH="false" flipV="false" rot="0">
+            <a:xfrm>
               <a:off x="0" y="0"/>
               <a:ext cx="21031200" cy="2651127"/>
             </a:xfrm>
@@ -5389,9 +6881,9 @@
               <a:gdLst/>
               <a:ahLst/>
               <a:cxnLst/>
-              <a:rect r="r" b="b" t="t" l="l"/>
+              <a:rect l="l" t="t" r="r" b="b"/>
               <a:pathLst>
-                <a:path h="2651127" w="21031200">
+                <a:path w="21031200" h="2651127">
                   <a:moveTo>
                     <a:pt x="0" y="0"/>
                   </a:moveTo>
@@ -5413,15 +6905,22 @@
                 <a:alphaModFix amt="0"/>
               </a:blip>
               <a:stretch>
-                <a:fillRect l="0" t="-104573" r="0" b="-104573"/>
+                <a:fillRect t="-104573" b="-104573"/>
               </a:stretch>
             </a:blipFill>
           </p:spPr>
+          <p:txBody>
+            <a:bodyPr/>
+            <a:lstStyle/>
+            <a:p>
+              <a:endParaRPr lang="es-AR"/>
+            </a:p>
+          </p:txBody>
         </p:sp>
         <p:sp>
           <p:nvSpPr>
-            <p:cNvPr name="TextBox 4" id="4"/>
-            <p:cNvSpPr txBox="true"/>
+            <p:cNvPr id="4" name="TextBox 4"/>
+            <p:cNvSpPr txBox="1"/>
             <p:nvPr/>
           </p:nvSpPr>
           <p:spPr>
@@ -5434,7 +6933,7 @@
             </a:prstGeom>
           </p:spPr>
           <p:txBody>
-            <a:bodyPr anchor="ctr" rtlCol="false" tIns="0" lIns="0" bIns="0" rIns="0"/>
+            <a:bodyPr lIns="0" tIns="0" rIns="0" bIns="0" rtlCol="0" anchor="ctr"/>
             <a:lstStyle/>
             <a:p>
               <a:pPr algn="l">
@@ -5443,7 +6942,7 @@
                 </a:lnSpc>
               </a:pPr>
               <a:r>
-                <a:rPr lang="en-US" b="true" sz="6600">
+                <a:rPr lang="en-US" sz="6600" b="1">
                   <a:solidFill>
                     <a:srgbClr val="005088"/>
                   </a:solidFill>
@@ -5460,12 +6959,12 @@
       </p:grpSp>
       <p:sp>
         <p:nvSpPr>
-          <p:cNvPr name="TextBox 5" id="5"/>
-          <p:cNvSpPr txBox="true"/>
+          <p:cNvPr id="5" name="TextBox 5"/>
+          <p:cNvSpPr txBox="1"/>
           <p:nvPr/>
         </p:nvSpPr>
         <p:spPr>
-          <a:xfrm rot="0">
+          <a:xfrm>
             <a:off x="1348740" y="2612708"/>
             <a:ext cx="15590520" cy="6607016"/>
           </a:xfrm>
@@ -5474,12 +6973,12 @@
           </a:prstGeom>
         </p:spPr>
         <p:txBody>
-          <a:bodyPr anchor="t" rtlCol="false" tIns="0" lIns="0" bIns="0" rIns="0">
+          <a:bodyPr lIns="0" tIns="0" rIns="0" bIns="0" rtlCol="0" anchor="t">
             <a:spAutoFit/>
           </a:bodyPr>
           <a:lstStyle/>
           <a:p>
-            <a:pPr algn="l" marL="760095" indent="-380048" lvl="1">
+            <a:pPr marL="760095" lvl="1" indent="-380048" algn="l">
               <a:lnSpc>
                 <a:spcPts val="6804"/>
               </a:lnSpc>
@@ -5500,7 +6999,7 @@
             </a:r>
           </a:p>
           <a:p>
-            <a:pPr algn="l" marL="1337310" indent="-445770" lvl="2">
+            <a:pPr marL="1337310" lvl="2" indent="-445770" algn="l">
               <a:lnSpc>
                 <a:spcPts val="5832"/>
               </a:lnSpc>
@@ -5521,7 +7020,7 @@
             </a:r>
           </a:p>
           <a:p>
-            <a:pPr algn="l" marL="1914525" indent="-478631" lvl="3">
+            <a:pPr marL="1914525" lvl="3" indent="-478631" algn="l">
               <a:lnSpc>
                 <a:spcPts val="4860"/>
               </a:lnSpc>
@@ -5542,7 +7041,7 @@
             </a:r>
           </a:p>
           <a:p>
-            <a:pPr algn="l" marL="1914525" indent="-478631" lvl="3">
+            <a:pPr marL="1914525" lvl="3" indent="-478631" algn="l">
               <a:lnSpc>
                 <a:spcPts val="4860"/>
               </a:lnSpc>
@@ -5563,7 +7062,7 @@
             </a:r>
           </a:p>
           <a:p>
-            <a:pPr algn="l" marL="1914525" indent="-478631" lvl="3">
+            <a:pPr marL="1914525" lvl="3" indent="-478631" algn="l">
               <a:lnSpc>
                 <a:spcPts val="4860"/>
               </a:lnSpc>
@@ -5584,7 +7083,7 @@
             </a:r>
           </a:p>
           <a:p>
-            <a:pPr algn="l" marL="1337310" indent="-445770" lvl="2">
+            <a:pPr marL="1337310" lvl="2" indent="-445770" algn="l">
               <a:lnSpc>
                 <a:spcPts val="5832"/>
               </a:lnSpc>
@@ -5608,27 +7107,34 @@
       </p:sp>
       <p:sp>
         <p:nvSpPr>
-          <p:cNvPr name="AutoShape 6" id="6"/>
+          <p:cNvPr id="6" name="AutoShape 6"/>
           <p:cNvSpPr/>
           <p:nvPr/>
         </p:nvSpPr>
         <p:spPr>
-          <a:xfrm flipV="true">
+          <a:xfrm flipV="1">
             <a:off x="1257389" y="2421732"/>
             <a:ext cx="8115300" cy="19050"/>
           </a:xfrm>
           <a:prstGeom prst="line">
             <a:avLst/>
           </a:prstGeom>
-          <a:ln cap="flat" w="38100">
+          <a:ln w="38100" cap="flat">
             <a:solidFill>
               <a:srgbClr val="11CAA0"/>
             </a:solidFill>
             <a:prstDash val="solid"/>
-            <a:headEnd type="none" len="sm" w="sm"/>
-            <a:tailEnd type="none" len="sm" w="sm"/>
+            <a:headEnd type="none" w="sm" len="sm"/>
+            <a:tailEnd type="none" w="sm" len="sm"/>
           </a:ln>
         </p:spPr>
+        <p:txBody>
+          <a:bodyPr/>
+          <a:lstStyle/>
+          <a:p>
+            <a:endParaRPr lang="es-AR"/>
+          </a:p>
+        </p:txBody>
       </p:sp>
     </p:spTree>
   </p:cSld>
@@ -5639,13 +7145,14 @@
 </file>
 
 <file path=ppt/slides/slide7.xml><?xml version="1.0" encoding="utf-8"?>
-<p:sld xmlns:p="http://schemas.openxmlformats.org/presentationml/2006/main" xmlns:a="http://schemas.openxmlformats.org/drawingml/2006/main" xmlns:r="http://schemas.openxmlformats.org/officeDocument/2006/relationships">
+<p:sld xmlns:a="http://schemas.openxmlformats.org/drawingml/2006/main" xmlns:r="http://schemas.openxmlformats.org/officeDocument/2006/relationships" xmlns:p="http://schemas.openxmlformats.org/presentationml/2006/main">
   <p:cSld>
     <p:bg>
       <p:bgPr>
         <a:solidFill>
           <a:srgbClr val="F3F0DF"/>
         </a:solidFill>
+        <a:effectLst/>
       </p:bgPr>
     </p:bg>
     <p:spTree>
@@ -5664,12 +7171,12 @@
       </p:grpSpPr>
       <p:grpSp>
         <p:nvGrpSpPr>
-          <p:cNvPr name="Group 2" id="2"/>
+          <p:cNvPr id="2" name="Group 2"/>
           <p:cNvGrpSpPr/>
           <p:nvPr/>
         </p:nvGrpSpPr>
         <p:grpSpPr>
-          <a:xfrm rot="0">
+          <a:xfrm>
             <a:off x="1257300" y="547688"/>
             <a:ext cx="15773400" cy="1988345"/>
             <a:chOff x="0" y="0"/>
@@ -5678,12 +7185,12 @@
         </p:grpSpPr>
         <p:sp>
           <p:nvSpPr>
-            <p:cNvPr name="Freeform 3" id="3"/>
+            <p:cNvPr id="3" name="Freeform 3"/>
             <p:cNvSpPr/>
             <p:nvPr/>
           </p:nvSpPr>
           <p:spPr>
-            <a:xfrm flipH="false" flipV="false" rot="0">
+            <a:xfrm>
               <a:off x="0" y="0"/>
               <a:ext cx="21031200" cy="2651127"/>
             </a:xfrm>
@@ -5692,9 +7199,9 @@
               <a:gdLst/>
               <a:ahLst/>
               <a:cxnLst/>
-              <a:rect r="r" b="b" t="t" l="l"/>
+              <a:rect l="l" t="t" r="r" b="b"/>
               <a:pathLst>
-                <a:path h="2651127" w="21031200">
+                <a:path w="21031200" h="2651127">
                   <a:moveTo>
                     <a:pt x="0" y="0"/>
                   </a:moveTo>
@@ -5716,15 +7223,22 @@
                 <a:alphaModFix amt="0"/>
               </a:blip>
               <a:stretch>
-                <a:fillRect l="0" t="-104573" r="0" b="-104573"/>
+                <a:fillRect t="-104573" b="-104573"/>
               </a:stretch>
             </a:blipFill>
           </p:spPr>
+          <p:txBody>
+            <a:bodyPr/>
+            <a:lstStyle/>
+            <a:p>
+              <a:endParaRPr lang="es-AR"/>
+            </a:p>
+          </p:txBody>
         </p:sp>
         <p:sp>
           <p:nvSpPr>
-            <p:cNvPr name="TextBox 4" id="4"/>
-            <p:cNvSpPr txBox="true"/>
+            <p:cNvPr id="4" name="TextBox 4"/>
+            <p:cNvSpPr txBox="1"/>
             <p:nvPr/>
           </p:nvSpPr>
           <p:spPr>
@@ -5737,7 +7251,7 @@
             </a:prstGeom>
           </p:spPr>
           <p:txBody>
-            <a:bodyPr anchor="ctr" rtlCol="false" tIns="0" lIns="0" bIns="0" rIns="0"/>
+            <a:bodyPr lIns="0" tIns="0" rIns="0" bIns="0" rtlCol="0" anchor="ctr"/>
             <a:lstStyle/>
             <a:p>
               <a:pPr algn="l">
@@ -5746,7 +7260,7 @@
                 </a:lnSpc>
               </a:pPr>
               <a:r>
-                <a:rPr lang="en-US" b="true" sz="6600">
+                <a:rPr lang="en-US" sz="6600" b="1">
                   <a:solidFill>
                     <a:srgbClr val="005088"/>
                   </a:solidFill>
@@ -5763,12 +7277,12 @@
       </p:grpSp>
       <p:sp>
         <p:nvSpPr>
-          <p:cNvPr name="TextBox 5" id="5"/>
-          <p:cNvSpPr txBox="true"/>
+          <p:cNvPr id="5" name="TextBox 5"/>
+          <p:cNvSpPr txBox="1"/>
           <p:nvPr/>
         </p:nvSpPr>
         <p:spPr>
-          <a:xfrm rot="0">
+          <a:xfrm>
             <a:off x="903059" y="2814011"/>
             <a:ext cx="16939260" cy="7163962"/>
           </a:xfrm>
@@ -5777,12 +7291,12 @@
           </a:prstGeom>
         </p:spPr>
         <p:txBody>
-          <a:bodyPr anchor="t" rtlCol="false" tIns="0" lIns="0" bIns="0" rIns="0">
+          <a:bodyPr lIns="0" tIns="0" rIns="0" bIns="0" rtlCol="0" anchor="t">
             <a:spAutoFit/>
           </a:bodyPr>
           <a:lstStyle/>
           <a:p>
-            <a:pPr algn="l" marL="744250" indent="-372125" lvl="1">
+            <a:pPr marL="744250" lvl="1" indent="-372125" algn="l">
               <a:lnSpc>
                 <a:spcPts val="5329"/>
               </a:lnSpc>
@@ -5803,7 +7317,7 @@
             </a:r>
           </a:p>
           <a:p>
-            <a:pPr algn="l" marL="1357872" indent="-452624" lvl="2">
+            <a:pPr marL="1357872" lvl="2" indent="-452624" algn="l">
               <a:lnSpc>
                 <a:spcPts val="4548"/>
               </a:lnSpc>
@@ -5824,7 +7338,7 @@
             </a:r>
           </a:p>
           <a:p>
-            <a:pPr algn="ctr" marL="1357595" indent="-452532" lvl="2">
+            <a:pPr marL="1357595" lvl="2" indent="-452532" algn="ctr">
               <a:lnSpc>
                 <a:spcPts val="4548"/>
               </a:lnSpc>
@@ -5843,7 +7357,7 @@
             </a:r>
           </a:p>
           <a:p>
-            <a:pPr algn="l" marL="744250" indent="-372125" lvl="1">
+            <a:pPr marL="744250" lvl="1" indent="-372125" algn="l">
               <a:lnSpc>
                 <a:spcPts val="5329"/>
               </a:lnSpc>
@@ -5864,7 +7378,7 @@
             </a:r>
           </a:p>
           <a:p>
-            <a:pPr algn="l" marL="1357872" indent="-452624" lvl="2">
+            <a:pPr marL="1357872" lvl="2" indent="-452624" algn="l">
               <a:lnSpc>
                 <a:spcPts val="4548"/>
               </a:lnSpc>
@@ -5885,7 +7399,7 @@
             </a:r>
           </a:p>
           <a:p>
-            <a:pPr algn="l" marL="1357872" indent="-452624" lvl="2">
+            <a:pPr marL="1357872" lvl="2" indent="-452624" algn="l">
               <a:lnSpc>
                 <a:spcPts val="4548"/>
               </a:lnSpc>
@@ -5906,7 +7420,7 @@
             </a:r>
           </a:p>
           <a:p>
-            <a:pPr algn="l" marL="744250" indent="-372125" lvl="1">
+            <a:pPr marL="744250" lvl="1" indent="-372125" algn="l">
               <a:lnSpc>
                 <a:spcPts val="5329"/>
               </a:lnSpc>
@@ -5927,7 +7441,7 @@
             </a:r>
           </a:p>
           <a:p>
-            <a:pPr algn="l" marL="1357872" indent="-452624" lvl="2">
+            <a:pPr marL="1357872" lvl="2" indent="-452624" algn="l">
               <a:lnSpc>
                 <a:spcPts val="4548"/>
               </a:lnSpc>
@@ -5948,7 +7462,7 @@
             </a:r>
           </a:p>
           <a:p>
-            <a:pPr algn="l" marL="1357872" indent="-452624" lvl="2">
+            <a:pPr marL="1357872" lvl="2" indent="-452624" algn="l">
               <a:lnSpc>
                 <a:spcPts val="4548"/>
               </a:lnSpc>
@@ -5972,36 +7486,43 @@
       </p:sp>
       <p:sp>
         <p:nvSpPr>
-          <p:cNvPr name="AutoShape 6" id="6"/>
+          <p:cNvPr id="6" name="AutoShape 6"/>
           <p:cNvSpPr/>
           <p:nvPr/>
         </p:nvSpPr>
         <p:spPr>
-          <a:xfrm flipV="true">
+          <a:xfrm flipV="1">
             <a:off x="1257389" y="2421732"/>
             <a:ext cx="8115300" cy="19050"/>
           </a:xfrm>
           <a:prstGeom prst="line">
             <a:avLst/>
           </a:prstGeom>
-          <a:ln cap="flat" w="38100">
+          <a:ln w="38100" cap="flat">
             <a:solidFill>
               <a:srgbClr val="11CAA0"/>
             </a:solidFill>
             <a:prstDash val="solid"/>
-            <a:headEnd type="none" len="sm" w="sm"/>
-            <a:tailEnd type="none" len="sm" w="sm"/>
+            <a:headEnd type="none" w="sm" len="sm"/>
+            <a:tailEnd type="none" w="sm" len="sm"/>
           </a:ln>
         </p:spPr>
+        <p:txBody>
+          <a:bodyPr/>
+          <a:lstStyle/>
+          <a:p>
+            <a:endParaRPr lang="es-AR"/>
+          </a:p>
+        </p:txBody>
       </p:sp>
       <p:grpSp>
         <p:nvGrpSpPr>
-          <p:cNvPr name="Group 7" id="7"/>
+          <p:cNvPr id="7" name="Group 7"/>
           <p:cNvGrpSpPr/>
           <p:nvPr/>
         </p:nvGrpSpPr>
         <p:grpSpPr>
-          <a:xfrm rot="0">
+          <a:xfrm>
             <a:off x="6352605" y="4055382"/>
             <a:ext cx="6040169" cy="679289"/>
             <a:chOff x="0" y="0"/>
@@ -6010,12 +7531,12 @@
         </p:grpSpPr>
         <p:sp>
           <p:nvSpPr>
-            <p:cNvPr name="Freeform 8" id="8"/>
+            <p:cNvPr id="8" name="Freeform 8"/>
             <p:cNvSpPr/>
             <p:nvPr/>
           </p:nvSpPr>
           <p:spPr>
-            <a:xfrm flipH="false" flipV="false" rot="0">
+            <a:xfrm>
               <a:off x="0" y="0"/>
               <a:ext cx="1590826" cy="178907"/>
             </a:xfrm>
@@ -6024,9 +7545,9 @@
               <a:gdLst/>
               <a:ahLst/>
               <a:cxnLst/>
-              <a:rect r="r" b="b" t="t" l="l"/>
+              <a:rect l="l" t="t" r="r" b="b"/>
               <a:pathLst>
-                <a:path h="178907" w="1590826">
+                <a:path w="1590826" h="178907">
                   <a:moveTo>
                     <a:pt x="65369" y="0"/>
                   </a:moveTo>
@@ -6077,11 +7598,18 @@
               <a:round/>
             </a:ln>
           </p:spPr>
+          <p:txBody>
+            <a:bodyPr/>
+            <a:lstStyle/>
+            <a:p>
+              <a:endParaRPr lang="es-AR"/>
+            </a:p>
+          </p:txBody>
         </p:sp>
         <p:sp>
           <p:nvSpPr>
-            <p:cNvPr name="TextBox 9" id="9"/>
-            <p:cNvSpPr txBox="true"/>
+            <p:cNvPr id="9" name="TextBox 9"/>
+            <p:cNvSpPr txBox="1"/>
             <p:nvPr/>
           </p:nvSpPr>
           <p:spPr>
@@ -6094,7 +7622,7 @@
             </a:prstGeom>
           </p:spPr>
           <p:txBody>
-            <a:bodyPr anchor="ctr" rtlCol="false" tIns="50800" lIns="50800" bIns="50800" rIns="50800"/>
+            <a:bodyPr lIns="50800" tIns="50800" rIns="50800" bIns="50800" rtlCol="0" anchor="ctr"/>
             <a:lstStyle/>
             <a:p>
               <a:pPr algn="ctr">
@@ -6105,18 +7633,19 @@
                   <a:spcPct val="0"/>
                 </a:spcBef>
               </a:pPr>
+              <a:endParaRPr/>
             </a:p>
           </p:txBody>
         </p:sp>
       </p:grpSp>
       <p:sp>
         <p:nvSpPr>
-          <p:cNvPr name="TextBox 10" id="10"/>
-          <p:cNvSpPr txBox="true"/>
+          <p:cNvPr id="10" name="TextBox 10"/>
+          <p:cNvSpPr txBox="1"/>
           <p:nvPr/>
         </p:nvSpPr>
         <p:spPr>
-          <a:xfrm rot="0">
+          <a:xfrm>
             <a:off x="7269103" y="4136708"/>
             <a:ext cx="4207173" cy="554737"/>
           </a:xfrm>
@@ -6125,7 +7654,7 @@
           </a:prstGeom>
         </p:spPr>
         <p:txBody>
-          <a:bodyPr anchor="t" rtlCol="false" tIns="0" lIns="0" bIns="0" rIns="0">
+          <a:bodyPr lIns="0" tIns="0" rIns="0" bIns="0" rtlCol="0" anchor="t">
             <a:spAutoFit/>
           </a:bodyPr>
           <a:lstStyle/>
@@ -6148,19 +7677,7 @@
                 <a:cs typeface="Aptos"/>
                 <a:sym typeface="Aptos"/>
               </a:rPr>
-              <a:t>ρ=</a:t>
-            </a:r>
-            <a:r>
-              <a:rPr lang="en-US" sz="3900">
-                <a:solidFill>
-                  <a:srgbClr val="000000"/>
-                </a:solidFill>
-                <a:latin typeface="Aptos"/>
-                <a:ea typeface="Aptos"/>
-                <a:cs typeface="Aptos"/>
-                <a:sym typeface="Aptos"/>
-              </a:rPr>
-              <a:t>ln⁡(k∙r)=ln⁡(k)+ln⁡(r)</a:t>
+              <a:t>ρ=ln⁡(k∙r)=ln⁡(k)+ln⁡(r)</a:t>
             </a:r>
           </a:p>
         </p:txBody>
@@ -6174,13 +7691,14 @@
 </file>
 
 <file path=ppt/slides/slide8.xml><?xml version="1.0" encoding="utf-8"?>
-<p:sld xmlns:p="http://schemas.openxmlformats.org/presentationml/2006/main" xmlns:a="http://schemas.openxmlformats.org/drawingml/2006/main" xmlns:r="http://schemas.openxmlformats.org/officeDocument/2006/relationships">
+<p:sld xmlns:a="http://schemas.openxmlformats.org/drawingml/2006/main" xmlns:r="http://schemas.openxmlformats.org/officeDocument/2006/relationships" xmlns:p="http://schemas.openxmlformats.org/presentationml/2006/main">
   <p:cSld>
     <p:bg>
       <p:bgPr>
         <a:solidFill>
           <a:srgbClr val="F3F0DF"/>
         </a:solidFill>
+        <a:effectLst/>
       </p:bgPr>
     </p:bg>
     <p:spTree>
@@ -6199,12 +7717,12 @@
       </p:grpSpPr>
       <p:grpSp>
         <p:nvGrpSpPr>
-          <p:cNvPr name="Group 2" id="2"/>
+          <p:cNvPr id="2" name="Group 2"/>
           <p:cNvGrpSpPr/>
           <p:nvPr/>
         </p:nvGrpSpPr>
         <p:grpSpPr>
-          <a:xfrm rot="0">
+          <a:xfrm>
             <a:off x="1257300" y="547688"/>
             <a:ext cx="15773400" cy="1988345"/>
             <a:chOff x="0" y="0"/>
@@ -6213,12 +7731,12 @@
         </p:grpSpPr>
         <p:sp>
           <p:nvSpPr>
-            <p:cNvPr name="Freeform 3" id="3"/>
+            <p:cNvPr id="3" name="Freeform 3"/>
             <p:cNvSpPr/>
             <p:nvPr/>
           </p:nvSpPr>
           <p:spPr>
-            <a:xfrm flipH="false" flipV="false" rot="0">
+            <a:xfrm>
               <a:off x="0" y="0"/>
               <a:ext cx="21031200" cy="2651127"/>
             </a:xfrm>
@@ -6227,9 +7745,9 @@
               <a:gdLst/>
               <a:ahLst/>
               <a:cxnLst/>
-              <a:rect r="r" b="b" t="t" l="l"/>
+              <a:rect l="l" t="t" r="r" b="b"/>
               <a:pathLst>
-                <a:path h="2651127" w="21031200">
+                <a:path w="21031200" h="2651127">
                   <a:moveTo>
                     <a:pt x="0" y="0"/>
                   </a:moveTo>
@@ -6251,15 +7769,22 @@
                 <a:alphaModFix amt="0"/>
               </a:blip>
               <a:stretch>
-                <a:fillRect l="0" t="-104573" r="0" b="-104573"/>
+                <a:fillRect t="-104573" b="-104573"/>
               </a:stretch>
             </a:blipFill>
           </p:spPr>
+          <p:txBody>
+            <a:bodyPr/>
+            <a:lstStyle/>
+            <a:p>
+              <a:endParaRPr lang="es-AR"/>
+            </a:p>
+          </p:txBody>
         </p:sp>
         <p:sp>
           <p:nvSpPr>
-            <p:cNvPr name="TextBox 4" id="4"/>
-            <p:cNvSpPr txBox="true"/>
+            <p:cNvPr id="4" name="TextBox 4"/>
+            <p:cNvSpPr txBox="1"/>
             <p:nvPr/>
           </p:nvSpPr>
           <p:spPr>
@@ -6272,7 +7797,7 @@
             </a:prstGeom>
           </p:spPr>
           <p:txBody>
-            <a:bodyPr anchor="ctr" rtlCol="false" tIns="0" lIns="0" bIns="0" rIns="0"/>
+            <a:bodyPr lIns="0" tIns="0" rIns="0" bIns="0" rtlCol="0" anchor="ctr"/>
             <a:lstStyle/>
             <a:p>
               <a:pPr algn="l">
@@ -6281,7 +7806,7 @@
                 </a:lnSpc>
               </a:pPr>
               <a:r>
-                <a:rPr lang="en-US" b="true" sz="6600">
+                <a:rPr lang="en-US" sz="6600" b="1">
                   <a:solidFill>
                     <a:srgbClr val="005088"/>
                   </a:solidFill>
@@ -6298,182 +7823,712 @@
       </p:grpSp>
       <p:sp>
         <p:nvSpPr>
-          <p:cNvPr name="TextBox 5" id="5"/>
-          <p:cNvSpPr txBox="true"/>
+          <p:cNvPr id="5" name="TextBox 5"/>
+          <p:cNvSpPr txBox="1"/>
           <p:nvPr/>
         </p:nvSpPr>
         <p:spPr>
-          <a:xfrm rot="0">
-            <a:off x="1348740" y="2546033"/>
-            <a:ext cx="15590520" cy="5894070"/>
+          <a:xfrm>
+            <a:off x="1348739" y="3019841"/>
+            <a:ext cx="15590520" cy="4678204"/>
           </a:xfrm>
           <a:prstGeom prst="rect">
             <a:avLst/>
           </a:prstGeom>
         </p:spPr>
         <p:txBody>
-          <a:bodyPr anchor="t" rtlCol="false" tIns="0" lIns="0" bIns="0" rIns="0">
+          <a:bodyPr lIns="0" tIns="0" rIns="0" bIns="0" rtlCol="0" anchor="t">
             <a:spAutoFit/>
           </a:bodyPr>
           <a:lstStyle/>
           <a:p>
-            <a:pPr algn="l" marL="760095" indent="-380048" lvl="1">
-              <a:lnSpc>
-                <a:spcPts val="7560"/>
-              </a:lnSpc>
+            <a:pPr marL="760095" lvl="1" indent="-380048" algn="l">
               <a:buFont typeface="Arial"/>
               <a:buChar char="•"/>
             </a:pPr>
             <a:r>
-              <a:rPr lang="en-US" sz="4200">
-                <a:solidFill>
-                  <a:srgbClr val="000000"/>
-                </a:solidFill>
-                <a:latin typeface="Aptos"/>
-                <a:ea typeface="Aptos"/>
-                <a:cs typeface="Aptos"/>
-                <a:sym typeface="Aptos"/>
-              </a:rPr>
-              <a:t>Búsqueda del factor K</a:t>
-            </a:r>
-          </a:p>
-          <a:p>
-            <a:pPr algn="l" marL="1337310" indent="-445770" lvl="2">
-              <a:lnSpc>
-                <a:spcPts val="6480"/>
-              </a:lnSpc>
+              <a:rPr lang="en-US" sz="3600" dirty="0" err="1">
+                <a:solidFill>
+                  <a:srgbClr val="000000"/>
+                </a:solidFill>
+                <a:latin typeface="Aptos"/>
+                <a:ea typeface="Aptos"/>
+                <a:cs typeface="Aptos"/>
+                <a:sym typeface="Aptos"/>
+              </a:rPr>
+              <a:t>Búsqueda</a:t>
+            </a:r>
+            <a:r>
+              <a:rPr lang="en-US" sz="3600" dirty="0">
+                <a:solidFill>
+                  <a:srgbClr val="000000"/>
+                </a:solidFill>
+                <a:latin typeface="Aptos"/>
+                <a:ea typeface="Aptos"/>
+                <a:cs typeface="Aptos"/>
+                <a:sym typeface="Aptos"/>
+              </a:rPr>
+              <a:t> del factor K</a:t>
+            </a:r>
+          </a:p>
+          <a:p>
+            <a:pPr marL="1337310" lvl="2" indent="-445770" algn="l">
               <a:buFont typeface="Arial"/>
               <a:buChar char="⚬"/>
             </a:pPr>
             <a:r>
-              <a:rPr lang="en-US" sz="3600">
-                <a:solidFill>
-                  <a:srgbClr val="000000"/>
-                </a:solidFill>
-                <a:latin typeface="Aptos"/>
-                <a:ea typeface="Aptos"/>
-                <a:cs typeface="Aptos"/>
-                <a:sym typeface="Aptos"/>
-              </a:rPr>
-              <a:t>Reconstruimos la imagen combinando magnitud de f6 y fase de f7 mediante</a:t>
-            </a:r>
-          </a:p>
-          <a:p>
-            <a:pPr algn="ctr">
-              <a:lnSpc>
-                <a:spcPts val="7199"/>
-              </a:lnSpc>
-            </a:pPr>
-            <a:r>
-              <a:rPr lang="en-US" sz="3999">
-                <a:solidFill>
-                  <a:srgbClr val="000000"/>
-                </a:solidFill>
-                <a:latin typeface="Aptos"/>
-                <a:ea typeface="Aptos"/>
-                <a:cs typeface="Aptos"/>
-                <a:sym typeface="Aptos"/>
-              </a:rPr>
-              <a:t>Espectro=Mag ∙exp⁡(i∙k∙fase)</a:t>
-            </a:r>
-          </a:p>
-          <a:p>
-            <a:pPr algn="l" marL="1337310" indent="-445770" lvl="2">
-              <a:lnSpc>
-                <a:spcPts val="6480"/>
-              </a:lnSpc>
-            </a:pPr>
-          </a:p>
-          <a:p>
-            <a:pPr algn="l" marL="1337310" indent="-445770" lvl="2">
-              <a:lnSpc>
-                <a:spcPts val="6480"/>
-              </a:lnSpc>
+              <a:rPr lang="en-US" sz="2800" dirty="0" err="1">
+                <a:solidFill>
+                  <a:srgbClr val="000000"/>
+                </a:solidFill>
+                <a:latin typeface="Aptos"/>
+                <a:ea typeface="Aptos"/>
+                <a:cs typeface="Aptos"/>
+                <a:sym typeface="Aptos"/>
+              </a:rPr>
+              <a:t>Reconstruimos</a:t>
+            </a:r>
+            <a:r>
+              <a:rPr lang="en-US" sz="2800" dirty="0">
+                <a:solidFill>
+                  <a:srgbClr val="000000"/>
+                </a:solidFill>
+                <a:latin typeface="Aptos"/>
+                <a:ea typeface="Aptos"/>
+                <a:cs typeface="Aptos"/>
+                <a:sym typeface="Aptos"/>
+              </a:rPr>
+              <a:t> la imagen </a:t>
+            </a:r>
+            <a:r>
+              <a:rPr lang="en-US" sz="2800" dirty="0" err="1">
+                <a:solidFill>
+                  <a:srgbClr val="000000"/>
+                </a:solidFill>
+                <a:latin typeface="Aptos"/>
+                <a:ea typeface="Aptos"/>
+                <a:cs typeface="Aptos"/>
+                <a:sym typeface="Aptos"/>
+              </a:rPr>
+              <a:t>combinando</a:t>
+            </a:r>
+            <a:r>
+              <a:rPr lang="en-US" sz="2800" dirty="0">
+                <a:solidFill>
+                  <a:srgbClr val="000000"/>
+                </a:solidFill>
+                <a:latin typeface="Aptos"/>
+                <a:ea typeface="Aptos"/>
+                <a:cs typeface="Aptos"/>
+                <a:sym typeface="Aptos"/>
+              </a:rPr>
+              <a:t> la </a:t>
+            </a:r>
+            <a:r>
+              <a:rPr lang="en-US" sz="2800" dirty="0" err="1">
+                <a:solidFill>
+                  <a:srgbClr val="000000"/>
+                </a:solidFill>
+                <a:latin typeface="Aptos"/>
+                <a:ea typeface="Aptos"/>
+                <a:cs typeface="Aptos"/>
+                <a:sym typeface="Aptos"/>
+              </a:rPr>
+              <a:t>magnitud</a:t>
+            </a:r>
+            <a:r>
+              <a:rPr lang="en-US" sz="2800" dirty="0">
+                <a:solidFill>
+                  <a:srgbClr val="000000"/>
+                </a:solidFill>
+                <a:latin typeface="Aptos"/>
+                <a:ea typeface="Aptos"/>
+                <a:cs typeface="Aptos"/>
+                <a:sym typeface="Aptos"/>
+              </a:rPr>
+              <a:t> </a:t>
+            </a:r>
+            <a:r>
+              <a:rPr lang="en-US" sz="2800" dirty="0" err="1">
+                <a:solidFill>
+                  <a:srgbClr val="000000"/>
+                </a:solidFill>
+                <a:latin typeface="Aptos"/>
+                <a:ea typeface="Aptos"/>
+                <a:cs typeface="Aptos"/>
+                <a:sym typeface="Aptos"/>
+              </a:rPr>
+              <a:t>espectral</a:t>
+            </a:r>
+            <a:r>
+              <a:rPr lang="en-US" sz="2800" dirty="0">
+                <a:solidFill>
+                  <a:srgbClr val="000000"/>
+                </a:solidFill>
+                <a:latin typeface="Aptos"/>
+                <a:ea typeface="Aptos"/>
+                <a:cs typeface="Aptos"/>
+                <a:sym typeface="Aptos"/>
+              </a:rPr>
+              <a:t> de f6 y la </a:t>
+            </a:r>
+            <a:r>
+              <a:rPr lang="en-US" sz="2800" dirty="0" err="1">
+                <a:solidFill>
+                  <a:srgbClr val="000000"/>
+                </a:solidFill>
+                <a:latin typeface="Aptos"/>
+                <a:ea typeface="Aptos"/>
+                <a:cs typeface="Aptos"/>
+                <a:sym typeface="Aptos"/>
+              </a:rPr>
+              <a:t>fase</a:t>
+            </a:r>
+            <a:r>
+              <a:rPr lang="en-US" sz="2800" dirty="0">
+                <a:solidFill>
+                  <a:srgbClr val="000000"/>
+                </a:solidFill>
+                <a:latin typeface="Aptos"/>
+                <a:ea typeface="Aptos"/>
+                <a:cs typeface="Aptos"/>
+                <a:sym typeface="Aptos"/>
+              </a:rPr>
+              <a:t> de f7 </a:t>
+            </a:r>
+            <a:r>
+              <a:rPr lang="en-US" sz="2800" dirty="0" err="1">
+                <a:solidFill>
+                  <a:srgbClr val="000000"/>
+                </a:solidFill>
+                <a:latin typeface="Aptos"/>
+                <a:ea typeface="Aptos"/>
+                <a:cs typeface="Aptos"/>
+                <a:sym typeface="Aptos"/>
+              </a:rPr>
+              <a:t>alterada</a:t>
+            </a:r>
+            <a:r>
+              <a:rPr lang="en-US" sz="2800" dirty="0">
+                <a:solidFill>
+                  <a:srgbClr val="000000"/>
+                </a:solidFill>
+                <a:latin typeface="Aptos"/>
+                <a:ea typeface="Aptos"/>
+                <a:cs typeface="Aptos"/>
+                <a:sym typeface="Aptos"/>
+              </a:rPr>
+              <a:t> </a:t>
+            </a:r>
+            <a:r>
+              <a:rPr lang="en-US" sz="2800" dirty="0" err="1">
+                <a:solidFill>
+                  <a:srgbClr val="000000"/>
+                </a:solidFill>
+                <a:latin typeface="Aptos"/>
+                <a:ea typeface="Aptos"/>
+                <a:cs typeface="Aptos"/>
+                <a:sym typeface="Aptos"/>
+              </a:rPr>
+              <a:t>por</a:t>
+            </a:r>
+            <a:r>
+              <a:rPr lang="en-US" sz="2800" dirty="0">
+                <a:solidFill>
+                  <a:srgbClr val="000000"/>
+                </a:solidFill>
+                <a:latin typeface="Aptos"/>
+                <a:ea typeface="Aptos"/>
+                <a:cs typeface="Aptos"/>
+                <a:sym typeface="Aptos"/>
+              </a:rPr>
+              <a:t> un factor de compression k </a:t>
+            </a:r>
+            <a:r>
+              <a:rPr lang="en-US" sz="2800" dirty="0" err="1">
+                <a:solidFill>
+                  <a:srgbClr val="000000"/>
+                </a:solidFill>
+                <a:latin typeface="Aptos"/>
+                <a:ea typeface="Aptos"/>
+                <a:cs typeface="Aptos"/>
+                <a:sym typeface="Aptos"/>
+              </a:rPr>
+              <a:t>mediante</a:t>
+            </a:r>
+            <a:r>
+              <a:rPr lang="en-US" sz="2800" dirty="0">
+                <a:solidFill>
+                  <a:srgbClr val="000000"/>
+                </a:solidFill>
+                <a:latin typeface="Aptos"/>
+                <a:ea typeface="Aptos"/>
+                <a:cs typeface="Aptos"/>
+                <a:sym typeface="Aptos"/>
+              </a:rPr>
+              <a:t> la </a:t>
+            </a:r>
+            <a:r>
+              <a:rPr lang="en-US" sz="2800" dirty="0" err="1">
+                <a:solidFill>
+                  <a:srgbClr val="000000"/>
+                </a:solidFill>
+                <a:latin typeface="Aptos"/>
+                <a:ea typeface="Aptos"/>
+                <a:cs typeface="Aptos"/>
+                <a:sym typeface="Aptos"/>
+              </a:rPr>
+              <a:t>siguiente</a:t>
+            </a:r>
+            <a:r>
+              <a:rPr lang="en-US" sz="2800" dirty="0">
+                <a:solidFill>
+                  <a:srgbClr val="000000"/>
+                </a:solidFill>
+                <a:latin typeface="Aptos"/>
+                <a:ea typeface="Aptos"/>
+                <a:cs typeface="Aptos"/>
+                <a:sym typeface="Aptos"/>
+              </a:rPr>
+              <a:t> </a:t>
+            </a:r>
+            <a:r>
+              <a:rPr lang="en-US" sz="2800" dirty="0" err="1">
+                <a:solidFill>
+                  <a:srgbClr val="000000"/>
+                </a:solidFill>
+                <a:latin typeface="Aptos"/>
+                <a:ea typeface="Aptos"/>
+                <a:cs typeface="Aptos"/>
+                <a:sym typeface="Aptos"/>
+              </a:rPr>
+              <a:t>relación</a:t>
+            </a:r>
+            <a:r>
+              <a:rPr lang="en-US" sz="2800" dirty="0">
+                <a:solidFill>
+                  <a:srgbClr val="000000"/>
+                </a:solidFill>
+                <a:latin typeface="Aptos"/>
+                <a:ea typeface="Aptos"/>
+                <a:cs typeface="Aptos"/>
+                <a:sym typeface="Aptos"/>
+              </a:rPr>
+              <a:t> fundamental</a:t>
+            </a:r>
+          </a:p>
+          <a:p>
+            <a:pPr marL="1337310" lvl="2" indent="-445770" algn="l"/>
+            <a:endParaRPr lang="en-US" sz="3200" dirty="0">
+              <a:solidFill>
+                <a:srgbClr val="000000"/>
+              </a:solidFill>
+              <a:latin typeface="Aptos"/>
+              <a:ea typeface="Aptos"/>
+              <a:cs typeface="Aptos"/>
+              <a:sym typeface="Aptos"/>
+            </a:endParaRPr>
+          </a:p>
+          <a:p>
+            <a:pPr marL="1337310" lvl="2" indent="-445770" algn="l"/>
+            <a:endParaRPr lang="en-US" sz="3200" dirty="0">
+              <a:solidFill>
+                <a:srgbClr val="000000"/>
+              </a:solidFill>
+              <a:latin typeface="Aptos"/>
+              <a:ea typeface="Aptos"/>
+              <a:cs typeface="Aptos"/>
+              <a:sym typeface="Aptos"/>
+            </a:endParaRPr>
+          </a:p>
+          <a:p>
+            <a:pPr marL="1337310" lvl="2" indent="-445770" algn="l"/>
+            <a:endParaRPr lang="en-US" sz="3200" dirty="0">
+              <a:solidFill>
+                <a:srgbClr val="000000"/>
+              </a:solidFill>
+              <a:latin typeface="Aptos"/>
+              <a:ea typeface="Aptos"/>
+              <a:cs typeface="Aptos"/>
+              <a:sym typeface="Aptos"/>
+            </a:endParaRPr>
+          </a:p>
+          <a:p>
+            <a:pPr marL="1337310" lvl="2" indent="-445770" algn="l"/>
+            <a:endParaRPr lang="en-US" sz="3200" dirty="0">
+              <a:solidFill>
+                <a:srgbClr val="000000"/>
+              </a:solidFill>
+              <a:latin typeface="Aptos"/>
+              <a:ea typeface="Aptos"/>
+              <a:cs typeface="Aptos"/>
+              <a:sym typeface="Aptos"/>
+            </a:endParaRPr>
+          </a:p>
+          <a:p>
+            <a:pPr marL="1337310" lvl="2" indent="-445770" algn="l">
               <a:buFont typeface="Arial"/>
               <a:buChar char="⚬"/>
             </a:pPr>
             <a:r>
-              <a:rPr lang="en-US" sz="3600">
-                <a:solidFill>
-                  <a:srgbClr val="000000"/>
-                </a:solidFill>
-                <a:latin typeface="Aptos"/>
-                <a:ea typeface="Aptos"/>
-                <a:cs typeface="Aptos"/>
-                <a:sym typeface="Aptos"/>
-              </a:rPr>
-              <a:t>Métrica de nitidez: Magnitud del gradiente espacial.</a:t>
-            </a:r>
-          </a:p>
-          <a:p>
-            <a:pPr algn="l" marL="1337310" indent="-445770" lvl="2">
-              <a:lnSpc>
-                <a:spcPts val="6480"/>
-              </a:lnSpc>
+              <a:rPr lang="en-US" sz="2800" dirty="0" err="1">
+                <a:solidFill>
+                  <a:srgbClr val="000000"/>
+                </a:solidFill>
+                <a:latin typeface="Aptos"/>
+                <a:ea typeface="Aptos"/>
+                <a:cs typeface="Aptos"/>
+                <a:sym typeface="Aptos"/>
+              </a:rPr>
+              <a:t>Aplicamos</a:t>
+            </a:r>
+            <a:r>
+              <a:rPr lang="en-US" sz="2800" dirty="0">
+                <a:solidFill>
+                  <a:srgbClr val="000000"/>
+                </a:solidFill>
+                <a:latin typeface="Aptos"/>
+                <a:ea typeface="Aptos"/>
+                <a:cs typeface="Aptos"/>
+                <a:sym typeface="Aptos"/>
+              </a:rPr>
+              <a:t> la </a:t>
+            </a:r>
+            <a:r>
+              <a:rPr lang="en-US" sz="2800" dirty="0" err="1">
+                <a:solidFill>
+                  <a:srgbClr val="000000"/>
+                </a:solidFill>
+                <a:latin typeface="Aptos"/>
+                <a:ea typeface="Aptos"/>
+                <a:cs typeface="Aptos"/>
+                <a:sym typeface="Aptos"/>
+              </a:rPr>
+              <a:t>transformada</a:t>
+            </a:r>
+            <a:r>
+              <a:rPr lang="en-US" sz="2800" dirty="0">
+                <a:solidFill>
+                  <a:srgbClr val="000000"/>
+                </a:solidFill>
+                <a:latin typeface="Aptos"/>
+                <a:ea typeface="Aptos"/>
+                <a:cs typeface="Aptos"/>
+                <a:sym typeface="Aptos"/>
+              </a:rPr>
+              <a:t> </a:t>
+            </a:r>
+            <a:r>
+              <a:rPr lang="en-US" sz="2800" dirty="0" err="1">
+                <a:solidFill>
+                  <a:srgbClr val="000000"/>
+                </a:solidFill>
+                <a:latin typeface="Aptos"/>
+                <a:ea typeface="Aptos"/>
+                <a:cs typeface="Aptos"/>
+                <a:sym typeface="Aptos"/>
+              </a:rPr>
+              <a:t>inversa</a:t>
+            </a:r>
+            <a:r>
+              <a:rPr lang="en-US" sz="2800" dirty="0">
+                <a:solidFill>
+                  <a:srgbClr val="000000"/>
+                </a:solidFill>
+                <a:latin typeface="Aptos"/>
+                <a:ea typeface="Aptos"/>
+                <a:cs typeface="Aptos"/>
+                <a:sym typeface="Aptos"/>
+              </a:rPr>
+              <a:t> de Fourier para </a:t>
+            </a:r>
+            <a:r>
+              <a:rPr lang="en-US" sz="2800" dirty="0" err="1">
+                <a:solidFill>
+                  <a:srgbClr val="000000"/>
+                </a:solidFill>
+                <a:latin typeface="Aptos"/>
+                <a:ea typeface="Aptos"/>
+                <a:cs typeface="Aptos"/>
+                <a:sym typeface="Aptos"/>
+              </a:rPr>
+              <a:t>volver</a:t>
+            </a:r>
+            <a:r>
+              <a:rPr lang="en-US" sz="2800" dirty="0">
+                <a:solidFill>
+                  <a:srgbClr val="000000"/>
+                </a:solidFill>
+                <a:latin typeface="Aptos"/>
+                <a:ea typeface="Aptos"/>
+                <a:cs typeface="Aptos"/>
+                <a:sym typeface="Aptos"/>
+              </a:rPr>
+              <a:t> al </a:t>
+            </a:r>
+            <a:r>
+              <a:rPr lang="en-US" sz="2800" dirty="0" err="1">
+                <a:solidFill>
+                  <a:srgbClr val="000000"/>
+                </a:solidFill>
+                <a:latin typeface="Aptos"/>
+                <a:ea typeface="Aptos"/>
+                <a:cs typeface="Aptos"/>
+                <a:sym typeface="Aptos"/>
+              </a:rPr>
+              <a:t>dominio</a:t>
+            </a:r>
+            <a:r>
+              <a:rPr lang="en-US" sz="2800" dirty="0">
+                <a:solidFill>
+                  <a:srgbClr val="000000"/>
+                </a:solidFill>
+                <a:latin typeface="Aptos"/>
+                <a:ea typeface="Aptos"/>
+                <a:cs typeface="Aptos"/>
+                <a:sym typeface="Aptos"/>
+              </a:rPr>
+              <a:t> especial y </a:t>
+            </a:r>
+            <a:r>
+              <a:rPr lang="en-US" sz="2800" dirty="0" err="1">
+                <a:solidFill>
+                  <a:srgbClr val="000000"/>
+                </a:solidFill>
+                <a:latin typeface="Aptos"/>
+                <a:ea typeface="Aptos"/>
+                <a:cs typeface="Aptos"/>
+                <a:sym typeface="Aptos"/>
+              </a:rPr>
+              <a:t>obtener</a:t>
+            </a:r>
+            <a:r>
+              <a:rPr lang="en-US" sz="2800" dirty="0">
+                <a:solidFill>
+                  <a:srgbClr val="000000"/>
+                </a:solidFill>
+                <a:latin typeface="Aptos"/>
+                <a:ea typeface="Aptos"/>
+                <a:cs typeface="Aptos"/>
+                <a:sym typeface="Aptos"/>
+              </a:rPr>
+              <a:t> la imagen </a:t>
+            </a:r>
+            <a:r>
+              <a:rPr lang="en-US" sz="2800" dirty="0" err="1">
+                <a:solidFill>
+                  <a:srgbClr val="000000"/>
+                </a:solidFill>
+                <a:latin typeface="Aptos"/>
+                <a:ea typeface="Aptos"/>
+                <a:cs typeface="Aptos"/>
+                <a:sym typeface="Aptos"/>
+              </a:rPr>
+              <a:t>reconstruida</a:t>
+            </a:r>
+            <a:endParaRPr lang="en-US" sz="2800" dirty="0">
+              <a:solidFill>
+                <a:srgbClr val="000000"/>
+              </a:solidFill>
+              <a:latin typeface="Aptos"/>
+              <a:ea typeface="Aptos"/>
+              <a:cs typeface="Aptos"/>
+              <a:sym typeface="Aptos"/>
+            </a:endParaRPr>
+          </a:p>
+          <a:p>
+            <a:pPr marL="1337310" lvl="2" indent="-445770" algn="l">
               <a:buFont typeface="Arial"/>
               <a:buChar char="⚬"/>
             </a:pPr>
             <a:r>
-              <a:rPr lang="en-US" sz="3600">
-                <a:solidFill>
-                  <a:srgbClr val="000000"/>
-                </a:solidFill>
-                <a:latin typeface="Aptos"/>
-                <a:ea typeface="Aptos"/>
-                <a:cs typeface="Aptos"/>
-                <a:sym typeface="Aptos"/>
-              </a:rPr>
-              <a:t>Búsqueda automática del k óptimo que maximiza bordes definidos.</a:t>
+              <a:rPr lang="en-US" sz="2800" dirty="0">
+                <a:solidFill>
+                  <a:srgbClr val="000000"/>
+                </a:solidFill>
+                <a:latin typeface="Aptos"/>
+                <a:ea typeface="Aptos"/>
+                <a:cs typeface="Aptos"/>
+                <a:sym typeface="Aptos"/>
+              </a:rPr>
+              <a:t>Se </a:t>
+            </a:r>
+            <a:r>
+              <a:rPr lang="en-US" sz="2800" dirty="0" err="1">
+                <a:solidFill>
+                  <a:srgbClr val="000000"/>
+                </a:solidFill>
+                <a:latin typeface="Aptos"/>
+                <a:ea typeface="Aptos"/>
+                <a:cs typeface="Aptos"/>
+                <a:sym typeface="Aptos"/>
+              </a:rPr>
+              <a:t>implementó</a:t>
+            </a:r>
+            <a:r>
+              <a:rPr lang="en-US" sz="2800" dirty="0">
+                <a:solidFill>
+                  <a:srgbClr val="000000"/>
+                </a:solidFill>
+                <a:latin typeface="Aptos"/>
+                <a:ea typeface="Aptos"/>
+                <a:cs typeface="Aptos"/>
+                <a:sym typeface="Aptos"/>
+              </a:rPr>
+              <a:t> </a:t>
+            </a:r>
+            <a:r>
+              <a:rPr lang="en-US" sz="2800" dirty="0" err="1">
+                <a:solidFill>
+                  <a:srgbClr val="000000"/>
+                </a:solidFill>
+                <a:latin typeface="Aptos"/>
+                <a:ea typeface="Aptos"/>
+                <a:cs typeface="Aptos"/>
+                <a:sym typeface="Aptos"/>
+              </a:rPr>
+              <a:t>una</a:t>
+            </a:r>
+            <a:r>
+              <a:rPr lang="en-US" sz="2800" dirty="0">
+                <a:solidFill>
+                  <a:srgbClr val="000000"/>
+                </a:solidFill>
+                <a:latin typeface="Aptos"/>
+                <a:ea typeface="Aptos"/>
+                <a:cs typeface="Aptos"/>
+                <a:sym typeface="Aptos"/>
+              </a:rPr>
+              <a:t> </a:t>
+            </a:r>
+            <a:r>
+              <a:rPr lang="en-US" sz="2800" dirty="0" err="1">
+                <a:solidFill>
+                  <a:srgbClr val="000000"/>
+                </a:solidFill>
+                <a:latin typeface="Aptos"/>
+                <a:ea typeface="Aptos"/>
+                <a:cs typeface="Aptos"/>
+                <a:sym typeface="Aptos"/>
+              </a:rPr>
+              <a:t>busqueda</a:t>
+            </a:r>
+            <a:r>
+              <a:rPr lang="en-US" sz="2800" dirty="0">
+                <a:solidFill>
+                  <a:srgbClr val="000000"/>
+                </a:solidFill>
+                <a:latin typeface="Aptos"/>
+                <a:ea typeface="Aptos"/>
+                <a:cs typeface="Aptos"/>
+                <a:sym typeface="Aptos"/>
+              </a:rPr>
+              <a:t> </a:t>
+            </a:r>
+            <a:r>
+              <a:rPr lang="en-US" sz="2800" dirty="0" err="1">
+                <a:solidFill>
+                  <a:srgbClr val="000000"/>
+                </a:solidFill>
+                <a:latin typeface="Aptos"/>
+                <a:ea typeface="Aptos"/>
+                <a:cs typeface="Aptos"/>
+                <a:sym typeface="Aptos"/>
+              </a:rPr>
+              <a:t>en</a:t>
+            </a:r>
+            <a:r>
+              <a:rPr lang="en-US" sz="2800" dirty="0">
+                <a:solidFill>
+                  <a:srgbClr val="000000"/>
+                </a:solidFill>
+                <a:latin typeface="Aptos"/>
+                <a:ea typeface="Aptos"/>
+                <a:cs typeface="Aptos"/>
+                <a:sym typeface="Aptos"/>
+              </a:rPr>
+              <a:t> 2 </a:t>
+            </a:r>
+            <a:r>
+              <a:rPr lang="en-US" sz="2800" dirty="0" err="1">
+                <a:solidFill>
+                  <a:srgbClr val="000000"/>
+                </a:solidFill>
+                <a:latin typeface="Aptos"/>
+                <a:ea typeface="Aptos"/>
+                <a:cs typeface="Aptos"/>
+                <a:sym typeface="Aptos"/>
+              </a:rPr>
+              <a:t>etapas</a:t>
+            </a:r>
+            <a:r>
+              <a:rPr lang="en-US" sz="2800" dirty="0">
+                <a:solidFill>
+                  <a:srgbClr val="000000"/>
+                </a:solidFill>
+                <a:latin typeface="Aptos"/>
+                <a:ea typeface="Aptos"/>
+                <a:cs typeface="Aptos"/>
+                <a:sym typeface="Aptos"/>
+              </a:rPr>
+              <a:t>.</a:t>
             </a:r>
           </a:p>
         </p:txBody>
       </p:sp>
       <p:sp>
         <p:nvSpPr>
-          <p:cNvPr name="AutoShape 6" id="6"/>
+          <p:cNvPr id="6" name="AutoShape 6"/>
           <p:cNvSpPr/>
           <p:nvPr/>
         </p:nvSpPr>
         <p:spPr>
-          <a:xfrm flipV="true">
+          <a:xfrm flipV="1">
             <a:off x="1257389" y="2421732"/>
             <a:ext cx="8115300" cy="19050"/>
           </a:xfrm>
           <a:prstGeom prst="line">
             <a:avLst/>
           </a:prstGeom>
-          <a:ln cap="flat" w="38100">
+          <a:ln w="38100" cap="flat">
             <a:solidFill>
               <a:srgbClr val="11CAA0"/>
             </a:solidFill>
             <a:prstDash val="solid"/>
-            <a:headEnd type="none" len="sm" w="sm"/>
-            <a:tailEnd type="none" len="sm" w="sm"/>
+            <a:headEnd type="none" w="sm" len="sm"/>
+            <a:tailEnd type="none" w="sm" len="sm"/>
           </a:ln>
         </p:spPr>
+        <p:txBody>
+          <a:bodyPr/>
+          <a:lstStyle/>
+          <a:p>
+            <a:endParaRPr lang="es-AR"/>
+          </a:p>
+        </p:txBody>
       </p:sp>
       <p:grpSp>
         <p:nvGrpSpPr>
-          <p:cNvPr name="Group 7" id="7"/>
+          <p:cNvPr id="7" name="Group 7"/>
           <p:cNvGrpSpPr/>
           <p:nvPr/>
         </p:nvGrpSpPr>
         <p:grpSpPr>
-          <a:xfrm rot="0">
-            <a:off x="5363039" y="4964579"/>
-            <a:ext cx="7561921" cy="1474234"/>
+          <a:xfrm>
+            <a:off x="5840479" y="4851143"/>
+            <a:ext cx="6607042" cy="1054357"/>
             <a:chOff x="0" y="0"/>
             <a:chExt cx="1991617" cy="388276"/>
           </a:xfrm>
         </p:grpSpPr>
         <p:sp>
           <p:nvSpPr>
-            <p:cNvPr name="Freeform 8" id="8"/>
+            <p:cNvPr id="8" name="Freeform 8"/>
             <p:cNvSpPr/>
             <p:nvPr/>
           </p:nvSpPr>
           <p:spPr>
-            <a:xfrm flipH="false" flipV="false" rot="0">
+            <a:xfrm>
               <a:off x="0" y="0"/>
               <a:ext cx="1991617" cy="388276"/>
             </a:xfrm>
@@ -6482,9 +8537,9 @@
               <a:gdLst/>
               <a:ahLst/>
               <a:cxnLst/>
-              <a:rect r="r" b="b" t="t" l="l"/>
+              <a:rect l="l" t="t" r="r" b="b"/>
               <a:pathLst>
-                <a:path h="388276" w="1991617">
+                <a:path w="1991617" h="388276">
                   <a:moveTo>
                     <a:pt x="52214" y="0"/>
                   </a:moveTo>
@@ -6550,11 +8605,18 @@
               <a:round/>
             </a:ln>
           </p:spPr>
+          <p:txBody>
+            <a:bodyPr/>
+            <a:lstStyle/>
+            <a:p>
+              <a:endParaRPr lang="es-AR" dirty="0"/>
+            </a:p>
+          </p:txBody>
         </p:sp>
         <p:sp>
           <p:nvSpPr>
-            <p:cNvPr name="TextBox 9" id="9"/>
-            <p:cNvSpPr txBox="true"/>
+            <p:cNvPr id="9" name="TextBox 9"/>
+            <p:cNvSpPr txBox="1"/>
             <p:nvPr/>
           </p:nvSpPr>
           <p:spPr>
@@ -6567,7 +8629,7 @@
             </a:prstGeom>
           </p:spPr>
           <p:txBody>
-            <a:bodyPr anchor="ctr" rtlCol="false" tIns="50800" lIns="50800" bIns="50800" rIns="50800"/>
+            <a:bodyPr lIns="50800" tIns="50800" rIns="50800" bIns="50800" rtlCol="0" anchor="ctr"/>
             <a:lstStyle/>
             <a:p>
               <a:pPr algn="ctr">
@@ -6578,66 +8640,273 @@
                   <a:spcPct val="0"/>
                 </a:spcBef>
               </a:pPr>
+              <a:endParaRPr/>
             </a:p>
           </p:txBody>
         </p:sp>
       </p:grpSp>
-      <p:sp>
-        <p:nvSpPr>
-          <p:cNvPr name="TextBox 10" id="10"/>
-          <p:cNvSpPr txBox="true"/>
-          <p:nvPr/>
-        </p:nvSpPr>
-        <p:spPr>
-          <a:xfrm rot="0">
-            <a:off x="5363039" y="5437091"/>
-            <a:ext cx="7561921" cy="576835"/>
-          </a:xfrm>
-          <a:prstGeom prst="rect">
-            <a:avLst/>
-          </a:prstGeom>
-        </p:spPr>
-        <p:txBody>
-          <a:bodyPr anchor="t" rtlCol="false" tIns="0" lIns="0" bIns="0" rIns="0">
-            <a:spAutoFit/>
-          </a:bodyPr>
-          <a:lstStyle/>
-          <a:p>
-            <a:pPr algn="ctr">
-              <a:lnSpc>
-                <a:spcPts val="4428"/>
-              </a:lnSpc>
-              <a:spcBef>
-                <a:spcPct val="0"/>
-              </a:spcBef>
-            </a:pPr>
-            <a:r>
-              <a:rPr lang="en-US" sz="4100">
-                <a:solidFill>
-                  <a:srgbClr val="000000"/>
-                </a:solidFill>
-                <a:latin typeface="Aptos"/>
-                <a:ea typeface="Aptos"/>
-                <a:cs typeface="Aptos"/>
-                <a:sym typeface="Aptos"/>
-              </a:rPr>
-              <a:t>Esp</a:t>
-            </a:r>
-            <a:r>
-              <a:rPr lang="en-US" sz="4100">
-                <a:solidFill>
-                  <a:srgbClr val="000000"/>
-                </a:solidFill>
-                <a:latin typeface="Aptos"/>
-                <a:ea typeface="Aptos"/>
-                <a:cs typeface="Aptos"/>
-                <a:sym typeface="Aptos"/>
-              </a:rPr>
-              <a:t>ectro=Mag ∙exp⁡(i∙k∙fase)</a:t>
-            </a:r>
-          </a:p>
-        </p:txBody>
-      </p:sp>
+      <mc:AlternateContent xmlns:mc="http://schemas.openxmlformats.org/markup-compatibility/2006">
+        <mc:Choice xmlns:a14="http://schemas.microsoft.com/office/drawing/2010/main" Requires="a14">
+          <p:sp>
+            <p:nvSpPr>
+              <p:cNvPr id="11" name="TextBox 10">
+                <a:extLst>
+                  <a:ext uri="{FF2B5EF4-FFF2-40B4-BE49-F238E27FC236}">
+                    <a16:creationId xmlns:a16="http://schemas.microsoft.com/office/drawing/2014/main" id="{C9AC6385-2398-CF94-FE61-E40B47A4FEF1}"/>
+                  </a:ext>
+                </a:extLst>
+              </p:cNvPr>
+              <p:cNvSpPr txBox="1"/>
+              <p:nvPr/>
+            </p:nvSpPr>
+            <p:spPr>
+              <a:xfrm>
+                <a:off x="5966046" y="5060460"/>
+                <a:ext cx="6355907" cy="532262"/>
+              </a:xfrm>
+              <a:prstGeom prst="rect">
+                <a:avLst/>
+              </a:prstGeom>
+              <a:noFill/>
+            </p:spPr>
+            <p:txBody>
+              <a:bodyPr wrap="none" lIns="0" tIns="0" rIns="0" bIns="0" rtlCol="0">
+                <a:spAutoFit/>
+              </a:bodyPr>
+              <a:lstStyle/>
+              <a:p>
+                <a14:m>
+                  <m:oMathPara xmlns:m="http://schemas.openxmlformats.org/officeDocument/2006/math">
+                    <m:oMathParaPr>
+                      <m:jc m:val="centerGroup"/>
+                    </m:oMathParaPr>
+                    <m:oMath xmlns:m="http://schemas.openxmlformats.org/officeDocument/2006/math">
+                      <m:r>
+                        <a:rPr lang="es-AR" sz="3200" b="0" i="1" smtClean="0">
+                          <a:latin typeface="Cambria Math" panose="02040503050406030204" pitchFamily="18" charset="0"/>
+                        </a:rPr>
+                        <m:t>𝐸𝑠𝑝𝑒𝑐𝑡𝑟𝑜</m:t>
+                      </m:r>
+                      <m:r>
+                        <a:rPr lang="es-AR" sz="3200" b="0" i="1" smtClean="0">
+                          <a:latin typeface="Cambria Math" panose="02040503050406030204" pitchFamily="18" charset="0"/>
+                        </a:rPr>
+                        <m:t>=</m:t>
+                      </m:r>
+                      <m:d>
+                        <m:dPr>
+                          <m:begChr m:val="|"/>
+                          <m:endChr m:val="|"/>
+                          <m:ctrlPr>
+                            <a:rPr lang="es-AR" sz="3200" b="0" i="1" smtClean="0">
+                              <a:latin typeface="Cambria Math" panose="02040503050406030204" pitchFamily="18" charset="0"/>
+                            </a:rPr>
+                          </m:ctrlPr>
+                        </m:dPr>
+                        <m:e>
+                          <m:r>
+                            <a:rPr lang="es-AR" sz="3200" b="0" i="1" smtClean="0">
+                              <a:latin typeface="Cambria Math" panose="02040503050406030204" pitchFamily="18" charset="0"/>
+                            </a:rPr>
+                            <m:t>𝐹𝐹𝑇</m:t>
+                          </m:r>
+                          <m:d>
+                            <m:dPr>
+                              <m:ctrlPr>
+                                <a:rPr lang="es-AR" sz="3200" b="0" i="1" smtClean="0">
+                                  <a:latin typeface="Cambria Math" panose="02040503050406030204" pitchFamily="18" charset="0"/>
+                                </a:rPr>
+                              </m:ctrlPr>
+                            </m:dPr>
+                            <m:e>
+                              <m:sSub>
+                                <m:sSubPr>
+                                  <m:ctrlPr>
+                                    <a:rPr lang="es-AR" sz="3200" b="0" i="1" smtClean="0">
+                                      <a:latin typeface="Cambria Math" panose="02040503050406030204" pitchFamily="18" charset="0"/>
+                                    </a:rPr>
+                                  </m:ctrlPr>
+                                </m:sSubPr>
+                                <m:e>
+                                  <m:r>
+                                    <a:rPr lang="es-AR" sz="3200" b="0" i="1" smtClean="0">
+                                      <a:latin typeface="Cambria Math" panose="02040503050406030204" pitchFamily="18" charset="0"/>
+                                    </a:rPr>
+                                    <m:t>𝑓</m:t>
+                                  </m:r>
+                                </m:e>
+                                <m:sub>
+                                  <m:r>
+                                    <a:rPr lang="es-AR" sz="3200" b="0" i="1" smtClean="0">
+                                      <a:latin typeface="Cambria Math" panose="02040503050406030204" pitchFamily="18" charset="0"/>
+                                    </a:rPr>
+                                    <m:t>6</m:t>
+                                  </m:r>
+                                </m:sub>
+                              </m:sSub>
+                            </m:e>
+                          </m:d>
+                        </m:e>
+                      </m:d>
+                      <m:r>
+                        <a:rPr lang="es-AR" sz="3200" b="0" i="1" smtClean="0">
+                          <a:latin typeface="Cambria Math" panose="02040503050406030204" pitchFamily="18" charset="0"/>
+                          <a:ea typeface="Cambria Math" panose="02040503050406030204" pitchFamily="18" charset="0"/>
+                        </a:rPr>
+                        <m:t>∙</m:t>
+                      </m:r>
+                      <m:sSup>
+                        <m:sSupPr>
+                          <m:ctrlPr>
+                            <a:rPr lang="es-AR" sz="3200" b="0" i="1" smtClean="0">
+                              <a:latin typeface="Cambria Math" panose="02040503050406030204" pitchFamily="18" charset="0"/>
+                              <a:ea typeface="Cambria Math" panose="02040503050406030204" pitchFamily="18" charset="0"/>
+                            </a:rPr>
+                          </m:ctrlPr>
+                        </m:sSupPr>
+                        <m:e>
+                          <m:r>
+                            <a:rPr lang="es-AR" sz="3200" b="0" i="1" smtClean="0">
+                              <a:latin typeface="Cambria Math" panose="02040503050406030204" pitchFamily="18" charset="0"/>
+                              <a:ea typeface="Cambria Math" panose="02040503050406030204" pitchFamily="18" charset="0"/>
+                            </a:rPr>
+                            <m:t>𝑒</m:t>
+                          </m:r>
+                        </m:e>
+                        <m:sup>
+                          <m:r>
+                            <a:rPr lang="es-AR" sz="3200" b="0" i="1" smtClean="0">
+                              <a:latin typeface="Cambria Math" panose="02040503050406030204" pitchFamily="18" charset="0"/>
+                              <a:ea typeface="Cambria Math" panose="02040503050406030204" pitchFamily="18" charset="0"/>
+                            </a:rPr>
+                            <m:t>𝑖</m:t>
+                          </m:r>
+                          <m:r>
+                            <a:rPr lang="es-AR" sz="3200" b="0" i="1" smtClean="0">
+                              <a:latin typeface="Cambria Math" panose="02040503050406030204" pitchFamily="18" charset="0"/>
+                              <a:ea typeface="Cambria Math" panose="02040503050406030204" pitchFamily="18" charset="0"/>
+                            </a:rPr>
+                            <m:t>∙</m:t>
+                          </m:r>
+                          <m:r>
+                            <a:rPr lang="es-AR" sz="3200" b="0" i="1" smtClean="0">
+                              <a:latin typeface="Cambria Math" panose="02040503050406030204" pitchFamily="18" charset="0"/>
+                              <a:ea typeface="Cambria Math" panose="02040503050406030204" pitchFamily="18" charset="0"/>
+                            </a:rPr>
+                            <m:t>𝑘</m:t>
+                          </m:r>
+                          <m:r>
+                            <a:rPr lang="es-AR" sz="3200" b="0" i="1" smtClean="0">
+                              <a:latin typeface="Cambria Math" panose="02040503050406030204" pitchFamily="18" charset="0"/>
+                              <a:ea typeface="Cambria Math" panose="02040503050406030204" pitchFamily="18" charset="0"/>
+                            </a:rPr>
+                            <m:t>∙</m:t>
+                          </m:r>
+                          <m:r>
+                            <m:rPr>
+                              <m:nor/>
+                            </m:rPr>
+                            <a:rPr lang="es-AR" sz="3200" smtClean="0"/>
+                            <m:t>∠</m:t>
+                          </m:r>
+                          <m:r>
+                            <a:rPr lang="es-AR" sz="3200" b="0" i="1" smtClean="0">
+                              <a:latin typeface="Cambria Math" panose="02040503050406030204" pitchFamily="18" charset="0"/>
+                            </a:rPr>
+                            <m:t>𝐹𝐹𝑇</m:t>
+                          </m:r>
+                          <m:r>
+                            <a:rPr lang="es-AR" sz="3200" b="0" i="1" smtClean="0">
+                              <a:latin typeface="Cambria Math" panose="02040503050406030204" pitchFamily="18" charset="0"/>
+                            </a:rPr>
+                            <m:t>(</m:t>
+                          </m:r>
+                          <m:sSub>
+                            <m:sSubPr>
+                              <m:ctrlPr>
+                                <a:rPr lang="es-AR" sz="3200" b="0" i="1" smtClean="0">
+                                  <a:latin typeface="Cambria Math" panose="02040503050406030204" pitchFamily="18" charset="0"/>
+                                </a:rPr>
+                              </m:ctrlPr>
+                            </m:sSubPr>
+                            <m:e>
+                              <m:r>
+                                <a:rPr lang="es-AR" sz="3200" b="0" i="1" smtClean="0">
+                                  <a:latin typeface="Cambria Math" panose="02040503050406030204" pitchFamily="18" charset="0"/>
+                                </a:rPr>
+                                <m:t>𝑓</m:t>
+                              </m:r>
+                            </m:e>
+                            <m:sub>
+                              <m:r>
+                                <a:rPr lang="es-AR" sz="3200" b="0" i="1" smtClean="0">
+                                  <a:latin typeface="Cambria Math" panose="02040503050406030204" pitchFamily="18" charset="0"/>
+                                </a:rPr>
+                                <m:t>7</m:t>
+                              </m:r>
+                            </m:sub>
+                          </m:sSub>
+                          <m:r>
+                            <a:rPr lang="es-AR" sz="3200" b="0" i="1" smtClean="0">
+                              <a:latin typeface="Cambria Math" panose="02040503050406030204" pitchFamily="18" charset="0"/>
+                            </a:rPr>
+                            <m:t>)</m:t>
+                          </m:r>
+                        </m:sup>
+                      </m:sSup>
+                    </m:oMath>
+                  </m:oMathPara>
+                </a14:m>
+                <a:endParaRPr lang="es-AR" sz="3200" dirty="0"/>
+              </a:p>
+            </p:txBody>
+          </p:sp>
+        </mc:Choice>
+        <mc:Fallback>
+          <p:sp>
+            <p:nvSpPr>
+              <p:cNvPr id="11" name="TextBox 10">
+                <a:extLst>
+                  <a:ext uri="{FF2B5EF4-FFF2-40B4-BE49-F238E27FC236}">
+                    <a16:creationId xmlns:a16="http://schemas.microsoft.com/office/drawing/2014/main" id="{C9AC6385-2398-CF94-FE61-E40B47A4FEF1}"/>
+                  </a:ext>
+                </a:extLst>
+              </p:cNvPr>
+              <p:cNvSpPr txBox="1">
+                <a:spLocks noRot="1" noChangeAspect="1" noMove="1" noResize="1" noEditPoints="1" noAdjustHandles="1" noChangeArrowheads="1" noChangeShapeType="1" noTextEdit="1"/>
+              </p:cNvSpPr>
+              <p:nvPr/>
+            </p:nvSpPr>
+            <p:spPr>
+              <a:xfrm>
+                <a:off x="5966046" y="5060460"/>
+                <a:ext cx="6355907" cy="532262"/>
+              </a:xfrm>
+              <a:prstGeom prst="rect">
+                <a:avLst/>
+              </a:prstGeom>
+              <a:blipFill>
+                <a:blip r:embed="rId3"/>
+                <a:stretch>
+                  <a:fillRect/>
+                </a:stretch>
+              </a:blipFill>
+            </p:spPr>
+            <p:txBody>
+              <a:bodyPr/>
+              <a:lstStyle/>
+              <a:p>
+                <a:r>
+                  <a:rPr lang="es-AR">
+                    <a:noFill/>
+                  </a:rPr>
+                  <a:t> </a:t>
+                </a:r>
+              </a:p>
+            </p:txBody>
+          </p:sp>
+        </mc:Fallback>
+      </mc:AlternateContent>
     </p:spTree>
   </p:cSld>
   <p:clrMapOvr>
@@ -6647,18 +8916,25 @@
 </file>
 
 <file path=ppt/slides/slide9.xml><?xml version="1.0" encoding="utf-8"?>
-<p:sld xmlns:p="http://schemas.openxmlformats.org/presentationml/2006/main" xmlns:a="http://schemas.openxmlformats.org/drawingml/2006/main" xmlns:r="http://schemas.openxmlformats.org/officeDocument/2006/relationships">
+<p:sld xmlns:a="http://schemas.openxmlformats.org/drawingml/2006/main" xmlns:r="http://schemas.openxmlformats.org/officeDocument/2006/relationships" xmlns:p="http://schemas.openxmlformats.org/presentationml/2006/main">
   <p:cSld>
     <p:bg>
       <p:bgPr>
         <a:solidFill>
           <a:srgbClr val="F3F0DF"/>
         </a:solidFill>
+        <a:effectLst/>
       </p:bgPr>
     </p:bg>
     <p:spTree>
       <p:nvGrpSpPr>
-        <p:cNvPr id="1" name=""/>
+        <p:cNvPr id="1" name="">
+          <a:extLst>
+            <a:ext uri="{FF2B5EF4-FFF2-40B4-BE49-F238E27FC236}">
+              <a16:creationId xmlns:a16="http://schemas.microsoft.com/office/drawing/2014/main" id="{988875FB-9C68-C86E-9F99-EA55DC90C0CD}"/>
+            </a:ext>
+          </a:extLst>
+        </p:cNvPr>
         <p:cNvGrpSpPr/>
         <p:nvPr/>
       </p:nvGrpSpPr>
@@ -6672,12 +8948,18 @@
       </p:grpSpPr>
       <p:grpSp>
         <p:nvGrpSpPr>
-          <p:cNvPr name="Group 2" id="2"/>
+          <p:cNvPr id="2" name="Group 2">
+            <a:extLst>
+              <a:ext uri="{FF2B5EF4-FFF2-40B4-BE49-F238E27FC236}">
+                <a16:creationId xmlns:a16="http://schemas.microsoft.com/office/drawing/2014/main" id="{CACD11C4-C062-3376-1CB6-819177F2F856}"/>
+              </a:ext>
+            </a:extLst>
+          </p:cNvPr>
           <p:cNvGrpSpPr/>
           <p:nvPr/>
         </p:nvGrpSpPr>
         <p:grpSpPr>
-          <a:xfrm rot="0">
+          <a:xfrm>
             <a:off x="1257300" y="547688"/>
             <a:ext cx="15773400" cy="1988345"/>
             <a:chOff x="0" y="0"/>
@@ -6686,12 +8968,18 @@
         </p:grpSpPr>
         <p:sp>
           <p:nvSpPr>
-            <p:cNvPr name="Freeform 3" id="3"/>
+            <p:cNvPr id="3" name="Freeform 3">
+              <a:extLst>
+                <a:ext uri="{FF2B5EF4-FFF2-40B4-BE49-F238E27FC236}">
+                  <a16:creationId xmlns:a16="http://schemas.microsoft.com/office/drawing/2014/main" id="{4E26E8A6-5E15-45E9-15B6-1C89700429D6}"/>
+                </a:ext>
+              </a:extLst>
+            </p:cNvPr>
             <p:cNvSpPr/>
             <p:nvPr/>
           </p:nvSpPr>
           <p:spPr>
-            <a:xfrm flipH="false" flipV="false" rot="0">
+            <a:xfrm>
               <a:off x="0" y="0"/>
               <a:ext cx="21031200" cy="2651127"/>
             </a:xfrm>
@@ -6700,9 +8988,9 @@
               <a:gdLst/>
               <a:ahLst/>
               <a:cxnLst/>
-              <a:rect r="r" b="b" t="t" l="l"/>
+              <a:rect l="l" t="t" r="r" b="b"/>
               <a:pathLst>
-                <a:path h="2651127" w="21031200">
+                <a:path w="21031200" h="2651127">
                   <a:moveTo>
                     <a:pt x="0" y="0"/>
                   </a:moveTo>
@@ -6724,15 +9012,28 @@
                 <a:alphaModFix amt="0"/>
               </a:blip>
               <a:stretch>
-                <a:fillRect l="0" t="-104573" r="0" b="-104573"/>
+                <a:fillRect t="-104573" b="-104573"/>
               </a:stretch>
             </a:blipFill>
           </p:spPr>
+          <p:txBody>
+            <a:bodyPr/>
+            <a:lstStyle/>
+            <a:p>
+              <a:endParaRPr lang="es-AR"/>
+            </a:p>
+          </p:txBody>
         </p:sp>
         <p:sp>
           <p:nvSpPr>
-            <p:cNvPr name="TextBox 4" id="4"/>
-            <p:cNvSpPr txBox="true"/>
+            <p:cNvPr id="4" name="TextBox 4">
+              <a:extLst>
+                <a:ext uri="{FF2B5EF4-FFF2-40B4-BE49-F238E27FC236}">
+                  <a16:creationId xmlns:a16="http://schemas.microsoft.com/office/drawing/2014/main" id="{1CF25723-4FB3-9CC7-D9BD-9AC3C73D4B49}"/>
+                </a:ext>
+              </a:extLst>
+            </p:cNvPr>
+            <p:cNvSpPr txBox="1"/>
             <p:nvPr/>
           </p:nvSpPr>
           <p:spPr>
@@ -6745,7 +9046,7 @@
             </a:prstGeom>
           </p:spPr>
           <p:txBody>
-            <a:bodyPr anchor="ctr" rtlCol="false" tIns="0" lIns="0" bIns="0" rIns="0"/>
+            <a:bodyPr lIns="0" tIns="0" rIns="0" bIns="0" rtlCol="0" anchor="ctr"/>
             <a:lstStyle/>
             <a:p>
               <a:pPr algn="l">
@@ -6754,7 +9055,7 @@
                 </a:lnSpc>
               </a:pPr>
               <a:r>
-                <a:rPr lang="en-US" b="true" sz="6600">
+                <a:rPr lang="en-US" sz="6600" b="1" dirty="0" err="1">
                   <a:solidFill>
                     <a:srgbClr val="005088"/>
                   </a:solidFill>
@@ -6763,489 +9064,486 @@
                   <a:cs typeface="Aptos Bold"/>
                   <a:sym typeface="Aptos Bold"/>
                 </a:rPr>
-                <a:t>Resultados: TIF vs JPG</a:t>
+                <a:t>Algoritmo</a:t>
               </a:r>
+              <a:r>
+                <a:rPr lang="en-US" sz="6600" b="1" dirty="0">
+                  <a:solidFill>
+                    <a:srgbClr val="005088"/>
+                  </a:solidFill>
+                  <a:latin typeface="Aptos Bold"/>
+                  <a:ea typeface="Aptos Bold"/>
+                  <a:cs typeface="Aptos Bold"/>
+                  <a:sym typeface="Aptos Bold"/>
+                </a:rPr>
+                <a:t> de </a:t>
+              </a:r>
+              <a:r>
+                <a:rPr lang="en-US" sz="6600" b="1" dirty="0" err="1">
+                  <a:solidFill>
+                    <a:srgbClr val="005088"/>
+                  </a:solidFill>
+                  <a:latin typeface="Aptos Bold"/>
+                  <a:ea typeface="Aptos Bold"/>
+                  <a:cs typeface="Aptos Bold"/>
+                  <a:sym typeface="Aptos Bold"/>
+                </a:rPr>
+                <a:t>Búsqueda</a:t>
+              </a:r>
+              <a:endParaRPr lang="en-US" sz="6600" b="1" dirty="0">
+                <a:solidFill>
+                  <a:srgbClr val="005088"/>
+                </a:solidFill>
+                <a:latin typeface="Aptos Bold"/>
+                <a:ea typeface="Aptos Bold"/>
+                <a:cs typeface="Aptos Bold"/>
+                <a:sym typeface="Aptos Bold"/>
+              </a:endParaRPr>
             </a:p>
           </p:txBody>
         </p:sp>
       </p:grpSp>
       <p:sp>
         <p:nvSpPr>
-          <p:cNvPr name="AutoShape 5" id="5"/>
+          <p:cNvPr id="5" name="TextBox 5">
+            <a:extLst>
+              <a:ext uri="{FF2B5EF4-FFF2-40B4-BE49-F238E27FC236}">
+                <a16:creationId xmlns:a16="http://schemas.microsoft.com/office/drawing/2014/main" id="{C74BEAA1-C1F4-FCFE-D427-310843783673}"/>
+              </a:ext>
+            </a:extLst>
+          </p:cNvPr>
+          <p:cNvSpPr txBox="1"/>
+          <p:nvPr/>
+        </p:nvSpPr>
+        <p:spPr>
+          <a:xfrm>
+            <a:off x="1348739" y="3019841"/>
+            <a:ext cx="15590520" cy="984885"/>
+          </a:xfrm>
+          <a:prstGeom prst="rect">
+            <a:avLst/>
+          </a:prstGeom>
+        </p:spPr>
+        <p:txBody>
+          <a:bodyPr lIns="0" tIns="0" rIns="0" bIns="0" rtlCol="0" anchor="t">
+            <a:spAutoFit/>
+          </a:bodyPr>
+          <a:lstStyle/>
+          <a:p>
+            <a:pPr marL="760095" lvl="1" indent="-380048" algn="l">
+              <a:buFont typeface="Arial"/>
+              <a:buChar char="•"/>
+            </a:pPr>
+            <a:r>
+              <a:rPr lang="en-US" sz="3600" dirty="0" err="1">
+                <a:solidFill>
+                  <a:srgbClr val="000000"/>
+                </a:solidFill>
+                <a:latin typeface="Aptos"/>
+                <a:ea typeface="Aptos"/>
+                <a:cs typeface="Aptos"/>
+                <a:sym typeface="Aptos"/>
+              </a:rPr>
+              <a:t>Estrategia</a:t>
+            </a:r>
+            <a:r>
+              <a:rPr lang="en-US" sz="3600" dirty="0">
+                <a:solidFill>
+                  <a:srgbClr val="000000"/>
+                </a:solidFill>
+                <a:latin typeface="Aptos"/>
+                <a:ea typeface="Aptos"/>
+                <a:cs typeface="Aptos"/>
+                <a:sym typeface="Aptos"/>
+              </a:rPr>
+              <a:t> </a:t>
+            </a:r>
+            <a:r>
+              <a:rPr lang="en-US" sz="3600" dirty="0" err="1">
+                <a:solidFill>
+                  <a:srgbClr val="000000"/>
+                </a:solidFill>
+                <a:latin typeface="Aptos"/>
+                <a:ea typeface="Aptos"/>
+                <a:cs typeface="Aptos"/>
+                <a:sym typeface="Aptos"/>
+              </a:rPr>
+              <a:t>en</a:t>
+            </a:r>
+            <a:r>
+              <a:rPr lang="en-US" sz="3600" dirty="0">
+                <a:solidFill>
+                  <a:srgbClr val="000000"/>
+                </a:solidFill>
+                <a:latin typeface="Aptos"/>
+                <a:ea typeface="Aptos"/>
+                <a:cs typeface="Aptos"/>
+                <a:sym typeface="Aptos"/>
+              </a:rPr>
+              <a:t> 2 </a:t>
+            </a:r>
+            <a:r>
+              <a:rPr lang="en-US" sz="3600" dirty="0" err="1">
+                <a:solidFill>
+                  <a:srgbClr val="000000"/>
+                </a:solidFill>
+                <a:latin typeface="Aptos"/>
+                <a:ea typeface="Aptos"/>
+                <a:cs typeface="Aptos"/>
+                <a:sym typeface="Aptos"/>
+              </a:rPr>
+              <a:t>etapas</a:t>
+            </a:r>
+            <a:endParaRPr lang="en-US" sz="3600" dirty="0">
+              <a:solidFill>
+                <a:srgbClr val="000000"/>
+              </a:solidFill>
+              <a:latin typeface="Aptos"/>
+              <a:ea typeface="Aptos"/>
+              <a:cs typeface="Aptos"/>
+              <a:sym typeface="Aptos"/>
+            </a:endParaRPr>
+          </a:p>
+          <a:p>
+            <a:pPr marL="1337310" lvl="2" indent="-445770" algn="l">
+              <a:buFont typeface="Arial"/>
+              <a:buChar char="⚬"/>
+            </a:pPr>
+            <a:r>
+              <a:rPr lang="en-US" sz="2800" dirty="0">
+                <a:solidFill>
+                  <a:srgbClr val="000000"/>
+                </a:solidFill>
+                <a:latin typeface="Aptos"/>
+                <a:ea typeface="Aptos"/>
+                <a:cs typeface="Aptos"/>
+                <a:sym typeface="Aptos"/>
+              </a:rPr>
+              <a:t>Para </a:t>
+            </a:r>
+            <a:r>
+              <a:rPr lang="en-US" sz="2800" dirty="0" err="1">
+                <a:solidFill>
+                  <a:srgbClr val="000000"/>
+                </a:solidFill>
+                <a:latin typeface="Aptos"/>
+                <a:ea typeface="Aptos"/>
+                <a:cs typeface="Aptos"/>
+                <a:sym typeface="Aptos"/>
+              </a:rPr>
+              <a:t>optimizar</a:t>
+            </a:r>
+            <a:r>
+              <a:rPr lang="en-US" sz="2800" dirty="0">
+                <a:solidFill>
+                  <a:srgbClr val="000000"/>
+                </a:solidFill>
+                <a:latin typeface="Aptos"/>
+                <a:ea typeface="Aptos"/>
+                <a:cs typeface="Aptos"/>
+                <a:sym typeface="Aptos"/>
+              </a:rPr>
+              <a:t> la </a:t>
+            </a:r>
+            <a:r>
+              <a:rPr lang="en-US" sz="2800" dirty="0" err="1">
+                <a:solidFill>
+                  <a:srgbClr val="000000"/>
+                </a:solidFill>
+                <a:latin typeface="Aptos"/>
+                <a:ea typeface="Aptos"/>
+                <a:cs typeface="Aptos"/>
+                <a:sym typeface="Aptos"/>
+              </a:rPr>
+              <a:t>eficiencia</a:t>
+            </a:r>
+            <a:r>
+              <a:rPr lang="en-US" sz="2800" dirty="0">
+                <a:solidFill>
+                  <a:srgbClr val="000000"/>
+                </a:solidFill>
+                <a:latin typeface="Aptos"/>
+                <a:ea typeface="Aptos"/>
+                <a:cs typeface="Aptos"/>
+                <a:sym typeface="Aptos"/>
+              </a:rPr>
+              <a:t> y la </a:t>
+            </a:r>
+            <a:r>
+              <a:rPr lang="en-US" sz="2800" dirty="0" err="1">
+                <a:solidFill>
+                  <a:srgbClr val="000000"/>
+                </a:solidFill>
+                <a:latin typeface="Aptos"/>
+                <a:ea typeface="Aptos"/>
+                <a:cs typeface="Aptos"/>
+                <a:sym typeface="Aptos"/>
+              </a:rPr>
+              <a:t>precisión</a:t>
+            </a:r>
+            <a:r>
+              <a:rPr lang="en-US" sz="2800" dirty="0">
+                <a:solidFill>
+                  <a:srgbClr val="000000"/>
+                </a:solidFill>
+                <a:latin typeface="Aptos"/>
+                <a:ea typeface="Aptos"/>
+                <a:cs typeface="Aptos"/>
+                <a:sym typeface="Aptos"/>
+              </a:rPr>
+              <a:t>, </a:t>
+            </a:r>
+            <a:r>
+              <a:rPr lang="en-US" sz="2800" dirty="0" err="1">
+                <a:solidFill>
+                  <a:srgbClr val="000000"/>
+                </a:solidFill>
+                <a:latin typeface="Aptos"/>
+                <a:ea typeface="Aptos"/>
+                <a:cs typeface="Aptos"/>
+                <a:sym typeface="Aptos"/>
+              </a:rPr>
+              <a:t>diseñamos</a:t>
+            </a:r>
+            <a:r>
+              <a:rPr lang="en-US" sz="2800" dirty="0">
+                <a:solidFill>
+                  <a:srgbClr val="000000"/>
+                </a:solidFill>
+                <a:latin typeface="Aptos"/>
+                <a:ea typeface="Aptos"/>
+                <a:cs typeface="Aptos"/>
+                <a:sym typeface="Aptos"/>
+              </a:rPr>
+              <a:t> un </a:t>
+            </a:r>
+            <a:r>
+              <a:rPr lang="en-US" sz="2800" dirty="0" err="1">
+                <a:solidFill>
+                  <a:srgbClr val="000000"/>
+                </a:solidFill>
+                <a:latin typeface="Aptos"/>
+                <a:ea typeface="Aptos"/>
+                <a:cs typeface="Aptos"/>
+                <a:sym typeface="Aptos"/>
+              </a:rPr>
+              <a:t>proceso</a:t>
+            </a:r>
+            <a:r>
+              <a:rPr lang="en-US" sz="2800" dirty="0">
+                <a:solidFill>
+                  <a:srgbClr val="000000"/>
+                </a:solidFill>
+                <a:latin typeface="Aptos"/>
+                <a:ea typeface="Aptos"/>
+                <a:cs typeface="Aptos"/>
+                <a:sym typeface="Aptos"/>
+              </a:rPr>
+              <a:t> de </a:t>
+            </a:r>
+            <a:r>
+              <a:rPr lang="en-US" sz="2800" dirty="0" err="1">
+                <a:solidFill>
+                  <a:srgbClr val="000000"/>
+                </a:solidFill>
+                <a:latin typeface="Aptos"/>
+                <a:ea typeface="Aptos"/>
+                <a:cs typeface="Aptos"/>
+                <a:sym typeface="Aptos"/>
+              </a:rPr>
+              <a:t>búsqueda</a:t>
+            </a:r>
+            <a:r>
+              <a:rPr lang="en-US" sz="2800" dirty="0">
+                <a:solidFill>
+                  <a:srgbClr val="000000"/>
+                </a:solidFill>
+                <a:latin typeface="Aptos"/>
+                <a:ea typeface="Aptos"/>
+                <a:cs typeface="Aptos"/>
+                <a:sym typeface="Aptos"/>
+              </a:rPr>
+              <a:t> </a:t>
+            </a:r>
+            <a:r>
+              <a:rPr lang="en-US" sz="2800" dirty="0" err="1">
+                <a:solidFill>
+                  <a:srgbClr val="000000"/>
+                </a:solidFill>
+                <a:latin typeface="Aptos"/>
+                <a:ea typeface="Aptos"/>
+                <a:cs typeface="Aptos"/>
+                <a:sym typeface="Aptos"/>
+              </a:rPr>
+              <a:t>automática</a:t>
+            </a:r>
+            <a:r>
+              <a:rPr lang="en-US" sz="2800" dirty="0">
+                <a:solidFill>
+                  <a:srgbClr val="000000"/>
+                </a:solidFill>
+                <a:latin typeface="Aptos"/>
+                <a:ea typeface="Aptos"/>
+                <a:cs typeface="Aptos"/>
+                <a:sym typeface="Aptos"/>
+              </a:rPr>
+              <a:t>:</a:t>
+            </a:r>
+          </a:p>
+        </p:txBody>
+      </p:sp>
+      <p:sp>
+        <p:nvSpPr>
+          <p:cNvPr id="6" name="AutoShape 6">
+            <a:extLst>
+              <a:ext uri="{FF2B5EF4-FFF2-40B4-BE49-F238E27FC236}">
+                <a16:creationId xmlns:a16="http://schemas.microsoft.com/office/drawing/2014/main" id="{792AE8BA-7838-ED0A-2842-CBE140992393}"/>
+              </a:ext>
+            </a:extLst>
+          </p:cNvPr>
           <p:cNvSpPr/>
           <p:nvPr/>
         </p:nvSpPr>
         <p:spPr>
-          <a:xfrm flipV="true">
+          <a:xfrm flipV="1">
             <a:off x="1257389" y="2421732"/>
             <a:ext cx="8115300" cy="19050"/>
           </a:xfrm>
           <a:prstGeom prst="line">
             <a:avLst/>
           </a:prstGeom>
-          <a:ln cap="flat" w="38100">
+          <a:ln w="38100" cap="flat">
             <a:solidFill>
               <a:srgbClr val="11CAA0"/>
             </a:solidFill>
             <a:prstDash val="solid"/>
-            <a:headEnd type="none" len="sm" w="sm"/>
-            <a:tailEnd type="none" len="sm" w="sm"/>
+            <a:headEnd type="none" w="sm" len="sm"/>
+            <a:tailEnd type="none" w="sm" len="sm"/>
           </a:ln>
         </p:spPr>
+        <p:txBody>
+          <a:bodyPr/>
+          <a:lstStyle/>
+          <a:p>
+            <a:endParaRPr lang="es-AR"/>
+          </a:p>
+        </p:txBody>
       </p:sp>
-      <p:grpSp>
-        <p:nvGrpSpPr>
-          <p:cNvPr name="Group 6" id="6"/>
-          <p:cNvGrpSpPr/>
-          <p:nvPr/>
-        </p:nvGrpSpPr>
-        <p:grpSpPr>
-          <a:xfrm rot="0">
-            <a:off x="1257300" y="2784158"/>
-            <a:ext cx="7561921" cy="5698801"/>
-            <a:chOff x="0" y="0"/>
-            <a:chExt cx="1991617" cy="1500919"/>
-          </a:xfrm>
-        </p:grpSpPr>
-        <p:sp>
-          <p:nvSpPr>
-            <p:cNvPr name="Freeform 7" id="7"/>
-            <p:cNvSpPr/>
-            <p:nvPr/>
-          </p:nvSpPr>
-          <p:spPr>
-            <a:xfrm flipH="false" flipV="false" rot="0">
-              <a:off x="0" y="0"/>
-              <a:ext cx="1991617" cy="1500919"/>
-            </a:xfrm>
-            <a:custGeom>
-              <a:avLst/>
-              <a:gdLst/>
-              <a:ahLst/>
-              <a:cxnLst/>
-              <a:rect r="r" b="b" t="t" l="l"/>
-              <a:pathLst>
-                <a:path h="1500919" w="1991617">
-                  <a:moveTo>
-                    <a:pt x="52214" y="0"/>
-                  </a:moveTo>
-                  <a:lnTo>
-                    <a:pt x="1939403" y="0"/>
-                  </a:lnTo>
-                  <a:cubicBezTo>
-                    <a:pt x="1968240" y="0"/>
-                    <a:pt x="1991617" y="23377"/>
-                    <a:pt x="1991617" y="52214"/>
-                  </a:cubicBezTo>
-                  <a:lnTo>
-                    <a:pt x="1991617" y="1448705"/>
-                  </a:lnTo>
-                  <a:cubicBezTo>
-                    <a:pt x="1991617" y="1462553"/>
-                    <a:pt x="1986116" y="1475834"/>
-                    <a:pt x="1976324" y="1485626"/>
-                  </a:cubicBezTo>
-                  <a:cubicBezTo>
-                    <a:pt x="1966532" y="1495418"/>
-                    <a:pt x="1953251" y="1500919"/>
-                    <a:pt x="1939403" y="1500919"/>
-                  </a:cubicBezTo>
-                  <a:lnTo>
-                    <a:pt x="52214" y="1500919"/>
-                  </a:lnTo>
-                  <a:cubicBezTo>
-                    <a:pt x="38366" y="1500919"/>
-                    <a:pt x="25085" y="1495418"/>
-                    <a:pt x="15293" y="1485626"/>
-                  </a:cubicBezTo>
-                  <a:cubicBezTo>
-                    <a:pt x="5501" y="1475834"/>
-                    <a:pt x="0" y="1462553"/>
-                    <a:pt x="0" y="1448705"/>
-                  </a:cubicBezTo>
-                  <a:lnTo>
-                    <a:pt x="0" y="52214"/>
-                  </a:lnTo>
-                  <a:cubicBezTo>
-                    <a:pt x="0" y="38366"/>
-                    <a:pt x="5501" y="25085"/>
-                    <a:pt x="15293" y="15293"/>
-                  </a:cubicBezTo>
-                  <a:cubicBezTo>
-                    <a:pt x="25085" y="5501"/>
-                    <a:pt x="38366" y="0"/>
-                    <a:pt x="52214" y="0"/>
-                  </a:cubicBezTo>
-                  <a:close/>
-                </a:path>
-              </a:pathLst>
-            </a:custGeom>
-            <a:solidFill>
-              <a:srgbClr val="FFFFFF"/>
-            </a:solidFill>
-            <a:ln w="38100" cap="rnd">
-              <a:solidFill>
-                <a:srgbClr val="000000"/>
-              </a:solidFill>
-              <a:prstDash val="solid"/>
-              <a:round/>
-            </a:ln>
-          </p:spPr>
-        </p:sp>
-        <p:sp>
-          <p:nvSpPr>
-            <p:cNvPr name="TextBox 8" id="8"/>
-            <p:cNvSpPr txBox="true"/>
-            <p:nvPr/>
-          </p:nvSpPr>
-          <p:spPr>
-            <a:xfrm>
-              <a:off x="0" y="-38100"/>
-              <a:ext cx="1991617" cy="1539019"/>
-            </a:xfrm>
-            <a:prstGeom prst="rect">
-              <a:avLst/>
-            </a:prstGeom>
-          </p:spPr>
-          <p:txBody>
-            <a:bodyPr anchor="ctr" rtlCol="false" tIns="50800" lIns="50800" bIns="50800" rIns="50800"/>
-            <a:lstStyle/>
-            <a:p>
-              <a:pPr algn="ctr">
-                <a:lnSpc>
-                  <a:spcPts val="2659"/>
-                </a:lnSpc>
-                <a:spcBef>
-                  <a:spcPct val="0"/>
-                </a:spcBef>
-              </a:pPr>
-            </a:p>
-          </p:txBody>
-        </p:sp>
-      </p:grpSp>
-      <p:grpSp>
-        <p:nvGrpSpPr>
-          <p:cNvPr name="Group 9" id="9"/>
-          <p:cNvGrpSpPr/>
-          <p:nvPr/>
-        </p:nvGrpSpPr>
-        <p:grpSpPr>
-          <a:xfrm rot="0">
-            <a:off x="9697379" y="2784158"/>
-            <a:ext cx="7561921" cy="5698801"/>
-            <a:chOff x="0" y="0"/>
-            <a:chExt cx="1991617" cy="1500919"/>
-          </a:xfrm>
-        </p:grpSpPr>
-        <p:sp>
-          <p:nvSpPr>
-            <p:cNvPr name="Freeform 10" id="10"/>
-            <p:cNvSpPr/>
-            <p:nvPr/>
-          </p:nvSpPr>
-          <p:spPr>
-            <a:xfrm flipH="false" flipV="false" rot="0">
-              <a:off x="0" y="0"/>
-              <a:ext cx="1991617" cy="1500919"/>
-            </a:xfrm>
-            <a:custGeom>
-              <a:avLst/>
-              <a:gdLst/>
-              <a:ahLst/>
-              <a:cxnLst/>
-              <a:rect r="r" b="b" t="t" l="l"/>
-              <a:pathLst>
-                <a:path h="1500919" w="1991617">
-                  <a:moveTo>
-                    <a:pt x="52214" y="0"/>
-                  </a:moveTo>
-                  <a:lnTo>
-                    <a:pt x="1939403" y="0"/>
-                  </a:lnTo>
-                  <a:cubicBezTo>
-                    <a:pt x="1968240" y="0"/>
-                    <a:pt x="1991617" y="23377"/>
-                    <a:pt x="1991617" y="52214"/>
-                  </a:cubicBezTo>
-                  <a:lnTo>
-                    <a:pt x="1991617" y="1448705"/>
-                  </a:lnTo>
-                  <a:cubicBezTo>
-                    <a:pt x="1991617" y="1462553"/>
-                    <a:pt x="1986116" y="1475834"/>
-                    <a:pt x="1976324" y="1485626"/>
-                  </a:cubicBezTo>
-                  <a:cubicBezTo>
-                    <a:pt x="1966532" y="1495418"/>
-                    <a:pt x="1953251" y="1500919"/>
-                    <a:pt x="1939403" y="1500919"/>
-                  </a:cubicBezTo>
-                  <a:lnTo>
-                    <a:pt x="52214" y="1500919"/>
-                  </a:lnTo>
-                  <a:cubicBezTo>
-                    <a:pt x="38366" y="1500919"/>
-                    <a:pt x="25085" y="1495418"/>
-                    <a:pt x="15293" y="1485626"/>
-                  </a:cubicBezTo>
-                  <a:cubicBezTo>
-                    <a:pt x="5501" y="1475834"/>
-                    <a:pt x="0" y="1462553"/>
-                    <a:pt x="0" y="1448705"/>
-                  </a:cubicBezTo>
-                  <a:lnTo>
-                    <a:pt x="0" y="52214"/>
-                  </a:lnTo>
-                  <a:cubicBezTo>
-                    <a:pt x="0" y="38366"/>
-                    <a:pt x="5501" y="25085"/>
-                    <a:pt x="15293" y="15293"/>
-                  </a:cubicBezTo>
-                  <a:cubicBezTo>
-                    <a:pt x="25085" y="5501"/>
-                    <a:pt x="38366" y="0"/>
-                    <a:pt x="52214" y="0"/>
-                  </a:cubicBezTo>
-                  <a:close/>
-                </a:path>
-              </a:pathLst>
-            </a:custGeom>
-            <a:solidFill>
-              <a:srgbClr val="FFFFFF"/>
-            </a:solidFill>
-            <a:ln w="38100" cap="rnd">
-              <a:solidFill>
-                <a:srgbClr val="000000"/>
-              </a:solidFill>
-              <a:prstDash val="solid"/>
-              <a:round/>
-            </a:ln>
-          </p:spPr>
-        </p:sp>
-        <p:sp>
-          <p:nvSpPr>
-            <p:cNvPr name="TextBox 11" id="11"/>
-            <p:cNvSpPr txBox="true"/>
-            <p:nvPr/>
-          </p:nvSpPr>
-          <p:spPr>
-            <a:xfrm>
-              <a:off x="0" y="-38100"/>
-              <a:ext cx="1991617" cy="1539019"/>
-            </a:xfrm>
-            <a:prstGeom prst="rect">
-              <a:avLst/>
-            </a:prstGeom>
-          </p:spPr>
-          <p:txBody>
-            <a:bodyPr anchor="ctr" rtlCol="false" tIns="50800" lIns="50800" bIns="50800" rIns="50800"/>
-            <a:lstStyle/>
-            <a:p>
-              <a:pPr algn="ctr">
-                <a:lnSpc>
-                  <a:spcPts val="2659"/>
-                </a:lnSpc>
-                <a:spcBef>
-                  <a:spcPct val="0"/>
-                </a:spcBef>
-              </a:pPr>
-            </a:p>
-          </p:txBody>
-        </p:sp>
-      </p:grpSp>
       <p:sp>
         <p:nvSpPr>
-          <p:cNvPr name="TextBox 12" id="12"/>
-          <p:cNvSpPr txBox="true"/>
+          <p:cNvPr id="10" name="TextBox 9">
+            <a:extLst>
+              <a:ext uri="{FF2B5EF4-FFF2-40B4-BE49-F238E27FC236}">
+                <a16:creationId xmlns:a16="http://schemas.microsoft.com/office/drawing/2014/main" id="{D25EABE0-CC0A-9EFF-170D-8C4C2C0C1B8C}"/>
+              </a:ext>
+            </a:extLst>
+          </p:cNvPr>
+          <p:cNvSpPr txBox="1"/>
           <p:nvPr/>
         </p:nvSpPr>
         <p:spPr>
-          <a:xfrm rot="0">
-            <a:off x="1257300" y="3221266"/>
-            <a:ext cx="7561921" cy="4281679"/>
+          <a:xfrm>
+            <a:off x="2705189" y="4488533"/>
+            <a:ext cx="13335000" cy="2662139"/>
           </a:xfrm>
           <a:prstGeom prst="rect">
             <a:avLst/>
           </a:prstGeom>
+          <a:noFill/>
         </p:spPr>
         <p:txBody>
-          <a:bodyPr anchor="t" rtlCol="false" tIns="0" lIns="0" bIns="0" rIns="0">
+          <a:bodyPr wrap="square" numCol="2" rtlCol="0">
             <a:spAutoFit/>
           </a:bodyPr>
           <a:lstStyle/>
           <a:p>
-            <a:pPr algn="ctr">
+            <a:pPr marL="457200" indent="-457200">
               <a:lnSpc>
-                <a:spcPts val="5724"/>
+                <a:spcPct val="150000"/>
+              </a:lnSpc>
+              <a:buFont typeface="Arial" panose="020B0604020202020204" pitchFamily="34" charset="0"/>
+              <a:buChar char="•"/>
+            </a:pPr>
+            <a:r>
+              <a:rPr lang="es-AR" sz="2800" b="1" dirty="0"/>
+              <a:t>Etapa 1: Búsqueda Global</a:t>
+            </a:r>
+          </a:p>
+          <a:p>
+            <a:pPr>
+              <a:lnSpc>
+                <a:spcPct val="150000"/>
               </a:lnSpc>
             </a:pPr>
             <a:r>
-              <a:rPr lang="en-US" sz="5300" b="true">
-                <a:solidFill>
-                  <a:srgbClr val="000000"/>
-                </a:solidFill>
-                <a:latin typeface="Aptos Bold"/>
-                <a:ea typeface="Aptos Bold"/>
-                <a:cs typeface="Aptos Bold"/>
-                <a:sym typeface="Aptos Bold"/>
-              </a:rPr>
-              <a:t>Formato JPG</a:t>
-            </a:r>
-          </a:p>
-          <a:p>
-            <a:pPr algn="ctr">
+              <a:rPr lang="es-AR" sz="2800" dirty="0"/>
+              <a:t>Escaneo en un rango Amplio</a:t>
+            </a:r>
+            <a:r>
+              <a:rPr lang="en-US" sz="2800" dirty="0"/>
+              <a:t> [0.1,0.5] para </a:t>
+            </a:r>
+            <a:r>
+              <a:rPr lang="en-US" sz="2800" dirty="0" err="1"/>
+              <a:t>identificar</a:t>
+            </a:r>
+            <a:r>
+              <a:rPr lang="en-US" sz="2800" dirty="0"/>
+              <a:t> la </a:t>
+            </a:r>
+            <a:r>
+              <a:rPr lang="en-US" sz="2800" dirty="0" err="1"/>
+              <a:t>regi</a:t>
+            </a:r>
+            <a:r>
+              <a:rPr lang="es-AR" sz="2800" dirty="0" err="1"/>
+              <a:t>ón</a:t>
+            </a:r>
+            <a:r>
+              <a:rPr lang="es-AR" sz="2800" dirty="0"/>
+              <a:t> de interés.</a:t>
+            </a:r>
+          </a:p>
+          <a:p>
+            <a:pPr>
               <a:lnSpc>
-                <a:spcPts val="5724"/>
+                <a:spcPct val="150000"/>
               </a:lnSpc>
             </a:pPr>
-          </a:p>
-          <a:p>
-            <a:pPr algn="ctr">
+            <a:endParaRPr lang="es-AR" sz="2800" dirty="0"/>
+          </a:p>
+          <a:p>
+            <a:pPr marL="457200" indent="-457200">
               <a:lnSpc>
-                <a:spcPts val="4428"/>
+                <a:spcPct val="150000"/>
+              </a:lnSpc>
+              <a:buFont typeface="Arial" panose="020B0604020202020204" pitchFamily="34" charset="0"/>
+              <a:buChar char="•"/>
+            </a:pPr>
+            <a:r>
+              <a:rPr lang="es-AR" sz="2800" b="1" dirty="0"/>
+              <a:t>Etapa 2: Búsqueda Fina</a:t>
+            </a:r>
+          </a:p>
+          <a:p>
+            <a:pPr lvl="1">
+              <a:lnSpc>
+                <a:spcPct val="150000"/>
               </a:lnSpc>
             </a:pPr>
             <a:r>
-              <a:rPr lang="en-US" sz="4100">
-                <a:solidFill>
-                  <a:srgbClr val="000000"/>
-                </a:solidFill>
-                <a:latin typeface="Aptos"/>
-                <a:ea typeface="Aptos"/>
-                <a:cs typeface="Aptos"/>
-                <a:sym typeface="Aptos"/>
-              </a:rPr>
-              <a:t>La compresión recorta frecuencias altas, afetando agresivamente la fase.</a:t>
-            </a:r>
-          </a:p>
-          <a:p>
-            <a:pPr algn="ctr">
-              <a:lnSpc>
-                <a:spcPts val="4428"/>
-              </a:lnSpc>
-            </a:pPr>
-          </a:p>
-          <a:p>
-            <a:pPr algn="ctr">
-              <a:lnSpc>
-                <a:spcPts val="4428"/>
-              </a:lnSpc>
-              <a:spcBef>
-                <a:spcPct val="0"/>
-              </a:spcBef>
-            </a:pPr>
-            <a:r>
-              <a:rPr lang="en-US" sz="4100">
-                <a:solidFill>
-                  <a:srgbClr val="000000"/>
-                </a:solidFill>
-                <a:latin typeface="Aptos"/>
-                <a:ea typeface="Aptos"/>
-                <a:cs typeface="Aptos"/>
-                <a:sym typeface="Aptos"/>
-              </a:rPr>
-              <a:t>Menor nitidez máxima.</a:t>
-            </a:r>
-          </a:p>
-        </p:txBody>
-      </p:sp>
-      <p:sp>
-        <p:nvSpPr>
-          <p:cNvPr name="TextBox 13" id="13"/>
-          <p:cNvSpPr txBox="true"/>
-          <p:nvPr/>
-        </p:nvSpPr>
-        <p:spPr>
-          <a:xfrm rot="0">
-            <a:off x="9697379" y="3221266"/>
-            <a:ext cx="7561921" cy="4281679"/>
-          </a:xfrm>
-          <a:prstGeom prst="rect">
-            <a:avLst/>
-          </a:prstGeom>
-        </p:spPr>
-        <p:txBody>
-          <a:bodyPr anchor="t" rtlCol="false" tIns="0" lIns="0" bIns="0" rIns="0">
-            <a:spAutoFit/>
-          </a:bodyPr>
-          <a:lstStyle/>
-          <a:p>
-            <a:pPr algn="ctr">
-              <a:lnSpc>
-                <a:spcPts val="5724"/>
-              </a:lnSpc>
-            </a:pPr>
-            <a:r>
-              <a:rPr lang="en-US" sz="5300" b="true">
-                <a:solidFill>
-                  <a:srgbClr val="000000"/>
-                </a:solidFill>
-                <a:latin typeface="Aptos Bold"/>
-                <a:ea typeface="Aptos Bold"/>
-                <a:cs typeface="Aptos Bold"/>
-                <a:sym typeface="Aptos Bold"/>
-              </a:rPr>
-              <a:t>Formato TIF</a:t>
-            </a:r>
-          </a:p>
-          <a:p>
-            <a:pPr algn="ctr">
-              <a:lnSpc>
-                <a:spcPts val="5724"/>
-              </a:lnSpc>
-            </a:pPr>
-          </a:p>
-          <a:p>
-            <a:pPr algn="ctr">
-              <a:lnSpc>
-                <a:spcPts val="4428"/>
-              </a:lnSpc>
-            </a:pPr>
-            <a:r>
-              <a:rPr lang="en-US" sz="4100">
-                <a:solidFill>
-                  <a:srgbClr val="000000"/>
-                </a:solidFill>
-                <a:latin typeface="Aptos"/>
-                <a:ea typeface="Aptos"/>
-                <a:cs typeface="Aptos"/>
-                <a:sym typeface="Aptos"/>
-              </a:rPr>
-              <a:t>Sin pérdida.</a:t>
-            </a:r>
-          </a:p>
-          <a:p>
-            <a:pPr algn="ctr">
-              <a:lnSpc>
-                <a:spcPts val="4428"/>
-              </a:lnSpc>
-            </a:pPr>
-          </a:p>
-          <a:p>
-            <a:pPr algn="ctr">
-              <a:lnSpc>
-                <a:spcPts val="4428"/>
-              </a:lnSpc>
-              <a:spcBef>
-                <a:spcPct val="0"/>
-              </a:spcBef>
-            </a:pPr>
-            <a:r>
-              <a:rPr lang="en-US" sz="4100">
-                <a:solidFill>
-                  <a:srgbClr val="000000"/>
-                </a:solidFill>
-                <a:latin typeface="Aptos"/>
-                <a:ea typeface="Aptos"/>
-                <a:cs typeface="Aptos"/>
-                <a:sym typeface="Aptos"/>
-              </a:rPr>
-              <a:t>Información matemática intacta, resultado en nitidez superior y k predecible.</a:t>
+              <a:rPr lang="es-AR" sz="2800" dirty="0"/>
+              <a:t>Ajuste de precisión sobre la zona detectada para halar el máximo global de nitidez.</a:t>
             </a:r>
           </a:p>
         </p:txBody>
       </p:sp>
     </p:spTree>
+    <p:extLst>
+      <p:ext uri="{BB962C8B-B14F-4D97-AF65-F5344CB8AC3E}">
+        <p14:creationId xmlns:p14="http://schemas.microsoft.com/office/powerpoint/2010/main" val="2334351"/>
+      </p:ext>
+    </p:extLst>
   </p:cSld>
   <p:clrMapOvr>
     <a:masterClrMapping/>
